--- a/docs/组会汇报_20260907/组会进展汇报_纯视觉芍药行间除草机器人.pptx
+++ b/docs/组会汇报_20260907/组会进展汇报_纯视觉芍药行间除草机器人.pptx
@@ -19,6 +19,10 @@
     <p:sldId id="267" r:id="rId18"/>
     <p:sldId id="268" r:id="rId19"/>
     <p:sldId id="269" r:id="rId20"/>
+    <p:sldId id="270" r:id="rId21"/>
+    <p:sldId id="271" r:id="rId22"/>
+    <p:sldId id="272" r:id="rId23"/>
+    <p:sldId id="273" r:id="rId24"/>
   </p:sldIdLst>
   <p:sldSz cx="12191695" cy="6858000" type="screen4x3"/>
   <p:notesSz cx="6858000" cy="9144000"/>
@@ -3485,86 +3489,6 @@
             <a:avLst/>
           </a:prstGeom>
           <a:solidFill>
-            <a:srgbClr val="FFFFFF"/>
-          </a:solidFill>
-          <a:ln w="10160">
-            <a:solidFill>
-              <a:srgbClr val="BEBEBE"/>
-            </a:solidFill>
-          </a:ln>
-        </p:spPr>
-        <p:style>
-          <a:lnRef idx="1">
-            <a:schemeClr val="accent1"/>
-          </a:lnRef>
-          <a:fillRef idx="3">
-            <a:schemeClr val="accent1"/>
-          </a:fillRef>
-          <a:effectRef idx="2">
-            <a:schemeClr val="accent1"/>
-          </a:effectRef>
-          <a:fontRef idx="minor">
-            <a:schemeClr val="lt1"/>
-          </a:fontRef>
-        </p:style>
-        <p:txBody>
-          <a:bodyPr rtlCol="0" anchor="ctr"/>
-          <a:lstStyle/>
-          <a:p>
-            <a:pPr algn="ctr"/>
-          </a:p>
-        </p:txBody>
-      </p:sp>
-      <p:sp>
-        <p:nvSpPr>
-          <p:cNvPr id="7" name="AGENT_NAV_LABEL_2"/>
-          <p:cNvSpPr txBox="1"/>
-          <p:nvPr/>
-        </p:nvSpPr>
-        <p:spPr>
-          <a:xfrm>
-            <a:off x="4904841" y="59436"/>
-            <a:ext cx="2379268" cy="228600"/>
-          </a:xfrm>
-          <a:prstGeom prst="rect">
-            <a:avLst/>
-          </a:prstGeom>
-          <a:noFill/>
-        </p:spPr>
-        <p:txBody>
-          <a:bodyPr wrap="none" lIns="0" rIns="0" tIns="0" bIns="0" anchor="ctr">
-            <a:spAutoFit/>
-          </a:bodyPr>
-          <a:lstStyle/>
-          <a:p>
-            <a:pPr algn="ctr"/>
-            <a:r>
-              <a:rPr sz="1200" b="0" ea="Microsoft YaHei">
-                <a:solidFill>
-                  <a:srgbClr val="1E1E1E"/>
-                </a:solidFill>
-                <a:latin typeface="Microsoft YaHei"/>
-              </a:rPr>
-              <a:t>理论方法</a:t>
-            </a:r>
-          </a:p>
-        </p:txBody>
-      </p:sp>
-      <p:sp>
-        <p:nvSpPr>
-          <p:cNvPr id="8" name="AGENT_NAV_SLOT_3"/>
-          <p:cNvSpPr/>
-          <p:nvPr/>
-        </p:nvSpPr>
-        <p:spPr>
-          <a:xfrm>
-            <a:off x="7284110" y="27432"/>
-            <a:ext cx="2379268" cy="347472"/>
-          </a:xfrm>
-          <a:prstGeom prst="rect">
-            <a:avLst/>
-          </a:prstGeom>
-          <a:solidFill>
             <a:srgbClr val="8B0D18"/>
           </a:solidFill>
           <a:ln w="10160">
@@ -3597,13 +3521,13 @@
       </p:sp>
       <p:sp>
         <p:nvSpPr>
-          <p:cNvPr id="9" name="AGENT_NAV_LABEL_3"/>
-          <p:cNvSpPr txBox="1"/>
-          <p:nvPr/>
-        </p:nvSpPr>
-        <p:spPr>
-          <a:xfrm>
-            <a:off x="7284110" y="59436"/>
+          <p:cNvPr id="7" name="AGENT_NAV_LABEL_2"/>
+          <p:cNvSpPr txBox="1"/>
+          <p:nvPr/>
+        </p:nvSpPr>
+        <p:spPr>
+          <a:xfrm>
+            <a:off x="4904841" y="59436"/>
             <a:ext cx="2379268" cy="228600"/>
           </a:xfrm>
           <a:prstGeom prst="rect">
@@ -3625,20 +3549,20 @@
                 </a:solidFill>
                 <a:latin typeface="Microsoft YaHei"/>
               </a:rPr>
-              <a:t>试验设计</a:t>
-            </a:r>
-          </a:p>
-        </p:txBody>
-      </p:sp>
-      <p:sp>
-        <p:nvSpPr>
-          <p:cNvPr id="10" name="AGENT_NAV_SLOT_4"/>
+              <a:t>理论方法</a:t>
+            </a:r>
+          </a:p>
+        </p:txBody>
+      </p:sp>
+      <p:sp>
+        <p:nvSpPr>
+          <p:cNvPr id="8" name="AGENT_NAV_SLOT_3"/>
           <p:cNvSpPr/>
           <p:nvPr/>
         </p:nvSpPr>
         <p:spPr>
           <a:xfrm>
-            <a:off x="9663379" y="27432"/>
+            <a:off x="7284110" y="27432"/>
             <a:ext cx="2379268" cy="347472"/>
           </a:xfrm>
           <a:prstGeom prst="rect">
@@ -3677,6 +3601,86 @@
       </p:sp>
       <p:sp>
         <p:nvSpPr>
+          <p:cNvPr id="9" name="AGENT_NAV_LABEL_3"/>
+          <p:cNvSpPr txBox="1"/>
+          <p:nvPr/>
+        </p:nvSpPr>
+        <p:spPr>
+          <a:xfrm>
+            <a:off x="7284110" y="59436"/>
+            <a:ext cx="2379268" cy="228600"/>
+          </a:xfrm>
+          <a:prstGeom prst="rect">
+            <a:avLst/>
+          </a:prstGeom>
+          <a:noFill/>
+        </p:spPr>
+        <p:txBody>
+          <a:bodyPr wrap="none" lIns="0" rIns="0" tIns="0" bIns="0" anchor="ctr">
+            <a:spAutoFit/>
+          </a:bodyPr>
+          <a:lstStyle/>
+          <a:p>
+            <a:pPr algn="ctr"/>
+            <a:r>
+              <a:rPr sz="1200" b="0" ea="Microsoft YaHei">
+                <a:solidFill>
+                  <a:srgbClr val="1E1E1E"/>
+                </a:solidFill>
+                <a:latin typeface="Microsoft YaHei"/>
+              </a:rPr>
+              <a:t>试验设计</a:t>
+            </a:r>
+          </a:p>
+        </p:txBody>
+      </p:sp>
+      <p:sp>
+        <p:nvSpPr>
+          <p:cNvPr id="10" name="AGENT_NAV_SLOT_4"/>
+          <p:cNvSpPr/>
+          <p:nvPr/>
+        </p:nvSpPr>
+        <p:spPr>
+          <a:xfrm>
+            <a:off x="9663379" y="27432"/>
+            <a:ext cx="2379268" cy="347472"/>
+          </a:xfrm>
+          <a:prstGeom prst="rect">
+            <a:avLst/>
+          </a:prstGeom>
+          <a:solidFill>
+            <a:srgbClr val="FFFFFF"/>
+          </a:solidFill>
+          <a:ln w="10160">
+            <a:solidFill>
+              <a:srgbClr val="BEBEBE"/>
+            </a:solidFill>
+          </a:ln>
+        </p:spPr>
+        <p:style>
+          <a:lnRef idx="1">
+            <a:schemeClr val="accent1"/>
+          </a:lnRef>
+          <a:fillRef idx="3">
+            <a:schemeClr val="accent1"/>
+          </a:fillRef>
+          <a:effectRef idx="2">
+            <a:schemeClr val="accent1"/>
+          </a:effectRef>
+          <a:fontRef idx="minor">
+            <a:schemeClr val="lt1"/>
+          </a:fontRef>
+        </p:style>
+        <p:txBody>
+          <a:bodyPr rtlCol="0" anchor="ctr"/>
+          <a:lstStyle/>
+          <a:p>
+            <a:pPr algn="ctr"/>
+          </a:p>
+        </p:txBody>
+      </p:sp>
+      <p:sp>
+        <p:nvSpPr>
           <p:cNvPr id="11" name="AGENT_NAV_LABEL_4"/>
           <p:cNvSpPr txBox="1"/>
           <p:nvPr/>
@@ -3810,21 +3814,66 @@
                 </a:solidFill>
                 <a:latin typeface="Microsoft YaHei"/>
               </a:rPr>
-              <a:t>三组对比试验覆盖方法、机构与工程三层</a:t>
-            </a:r>
-          </a:p>
-        </p:txBody>
-      </p:sp>
-      <p:sp>
-        <p:nvSpPr>
-          <p:cNvPr id="15" name="AGENT_COLUMN_HEAD_0"/>
-          <p:cNvSpPr txBox="1"/>
-          <p:nvPr/>
-        </p:nvSpPr>
-        <p:spPr>
-          <a:xfrm>
-            <a:off x="868680" y="1508760"/>
-            <a:ext cx="4709160" cy="320040"/>
+              <a:t>理论二：差速底盘横向误差模型与 PD 控制</a:t>
+            </a:r>
+          </a:p>
+        </p:txBody>
+      </p:sp>
+      <p:sp>
+        <p:nvSpPr>
+          <p:cNvPr id="15" name="AGENT_TEXT_PANEL"/>
+          <p:cNvSpPr/>
+          <p:nvPr/>
+        </p:nvSpPr>
+        <p:spPr>
+          <a:xfrm>
+            <a:off x="685800" y="1417320"/>
+            <a:ext cx="10835640" cy="4434840"/>
+          </a:xfrm>
+          <a:prstGeom prst="roundRect">
+            <a:avLst/>
+          </a:prstGeom>
+          <a:solidFill>
+            <a:srgbClr val="FFFFFF"/>
+          </a:solidFill>
+          <a:ln w="10160">
+            <a:solidFill>
+              <a:srgbClr val="BEBEBE"/>
+            </a:solidFill>
+          </a:ln>
+        </p:spPr>
+        <p:style>
+          <a:lnRef idx="1">
+            <a:schemeClr val="accent1"/>
+          </a:lnRef>
+          <a:fillRef idx="3">
+            <a:schemeClr val="accent1"/>
+          </a:fillRef>
+          <a:effectRef idx="2">
+            <a:schemeClr val="accent1"/>
+          </a:effectRef>
+          <a:fontRef idx="minor">
+            <a:schemeClr val="lt1"/>
+          </a:fontRef>
+        </p:style>
+        <p:txBody>
+          <a:bodyPr rtlCol="0" anchor="ctr"/>
+          <a:lstStyle/>
+          <a:p>
+            <a:pPr algn="ctr"/>
+          </a:p>
+        </p:txBody>
+      </p:sp>
+      <p:sp>
+        <p:nvSpPr>
+          <p:cNvPr id="16" name="AGENT_BODY"/>
+          <p:cNvSpPr txBox="1"/>
+          <p:nvPr/>
+        </p:nvSpPr>
+        <p:spPr>
+          <a:xfrm>
+            <a:off x="960120" y="1664208"/>
+            <a:ext cx="10287000" cy="3931920"/>
           </a:xfrm>
           <a:prstGeom prst="rect">
             <a:avLst/>
@@ -3839,123 +3888,17 @@
           <a:p>
             <a:pPr algn="l"/>
             <a:r>
-              <a:rPr sz="2100" b="1" ea="Microsoft YaHei">
-                <a:solidFill>
-                  <a:srgbClr val="8B0D18"/>
-                </a:solidFill>
-                <a:latin typeface="Microsoft YaHei"/>
-              </a:rPr>
-              <a:t>三组对比试验</a:t>
-            </a:r>
-          </a:p>
-        </p:txBody>
-      </p:sp>
-      <p:sp>
-        <p:nvSpPr>
-          <p:cNvPr id="16" name="AGENT_BODY"/>
-          <p:cNvSpPr txBox="1"/>
-          <p:nvPr/>
-        </p:nvSpPr>
-        <p:spPr>
-          <a:xfrm>
-            <a:off x="868680" y="1965960"/>
-            <a:ext cx="4709160" cy="3383280"/>
-          </a:xfrm>
-          <a:prstGeom prst="rect">
-            <a:avLst/>
-          </a:prstGeom>
-          <a:noFill/>
-        </p:spPr>
-        <p:txBody>
-          <a:bodyPr wrap="square" lIns="0" rIns="0" tIns="0" bIns="0" anchor="ctr">
-            <a:spAutoFit/>
-          </a:bodyPr>
-          <a:lstStyle/>
-          <a:p>
-            <a:pPr algn="l"/>
-            <a:r>
-              <a:rPr sz="1800" b="0" ea="Microsoft YaHei">
+              <a:rPr sz="2000" b="0" ea="Microsoft YaHei">
                 <a:solidFill>
                   <a:srgbClr val="1E1E1E"/>
                 </a:solidFill>
                 <a:latin typeface="Microsoft YaHei"/>
               </a:rPr>
-              <a:t>1. 方法层：主动对行 vs 固定刀（各 5 趟）
-2. 机构层：鸭掌铲 vs 弹齿（各 3 趟）
-3. 工程层：时延补偿开 vs 关（RMS 偏差）</a:t>
-            </a:r>
-          </a:p>
-        </p:txBody>
-      </p:sp>
-      <p:sp>
-        <p:nvSpPr>
-          <p:cNvPr id="17" name="AGENT_COLUMN_HEAD_1"/>
-          <p:cNvSpPr txBox="1"/>
-          <p:nvPr/>
-        </p:nvSpPr>
-        <p:spPr>
-          <a:xfrm>
-            <a:off x="6217920" y="1508760"/>
-            <a:ext cx="4709160" cy="320040"/>
-          </a:xfrm>
-          <a:prstGeom prst="rect">
-            <a:avLst/>
-          </a:prstGeom>
-          <a:noFill/>
-        </p:spPr>
-        <p:txBody>
-          <a:bodyPr wrap="square" lIns="0" rIns="0" tIns="0" bIns="0" anchor="ctr">
-            <a:spAutoFit/>
-          </a:bodyPr>
-          <a:lstStyle/>
-          <a:p>
-            <a:pPr algn="l"/>
-            <a:r>
-              <a:rPr sz="2100" b="1" ea="Microsoft YaHei">
-                <a:solidFill>
-                  <a:srgbClr val="8B0D18"/>
-                </a:solidFill>
-                <a:latin typeface="Microsoft YaHei"/>
-              </a:rPr>
-              <a:t>统一工况与统计</a:t>
-            </a:r>
-          </a:p>
-        </p:txBody>
-      </p:sp>
-      <p:sp>
-        <p:nvSpPr>
-          <p:cNvPr id="18" name="AGENT_BODY"/>
-          <p:cNvSpPr txBox="1"/>
-          <p:nvPr/>
-        </p:nvSpPr>
-        <p:spPr>
-          <a:xfrm>
-            <a:off x="6217920" y="1965960"/>
-            <a:ext cx="4709160" cy="3383280"/>
-          </a:xfrm>
-          <a:prstGeom prst="rect">
-            <a:avLst/>
-          </a:prstGeom>
-          <a:noFill/>
-        </p:spPr>
-        <p:txBody>
-          <a:bodyPr wrap="square" lIns="0" rIns="0" tIns="0" bIns="0" anchor="ctr">
-            <a:spAutoFit/>
-          </a:bodyPr>
-          <a:lstStyle/>
-          <a:p>
-            <a:pPr algn="l"/>
-            <a:r>
-              <a:rPr sz="1800" b="0" ea="Microsoft YaHei">
-                <a:solidFill>
-                  <a:srgbClr val="1E1E1E"/>
-                </a:solidFill>
-                <a:latin typeface="Microsoft YaHei"/>
-              </a:rPr>
-              <a:t>1. 0.5km/h、耕深 3cm、20m 试验段
-2. 样方前后拍照，数据全部入 CSV
-3. 均值±标准差 + 单因素方差分析
-4. 结论边界：坡度≤15° 壤土芍药田</a:t>
+              <a:t>1. 运动学：v=(vR+vL)/2，ω=(vR−vL)/W_eff（滑移转向）
+2. 横向误差动态：ė = v·ψ，ψ̇ = 2Δv/W_eff
+3. 控制量 Δv = k_p·e + k_d·ė，闭环三阶可作稳定性分析
+4. 执行滞后 τ≈0.1s 时 k_lat 上限由相位裕度反算
+5. 轮速由 TIM3 输入捕获实测，打滑系数田间标定修正</a:t>
             </a:r>
           </a:p>
         </p:txBody>
@@ -4153,7 +4096,7 @@
             <a:avLst/>
           </a:prstGeom>
           <a:solidFill>
-            <a:srgbClr val="FFFFFF"/>
+            <a:srgbClr val="8B0D18"/>
           </a:solidFill>
           <a:ln w="10160">
             <a:solidFill>
@@ -4207,9 +4150,9 @@
           <a:p>
             <a:pPr algn="ctr"/>
             <a:r>
-              <a:rPr sz="1200" b="0" ea="Microsoft YaHei">
-                <a:solidFill>
-                  <a:srgbClr val="1E1E1E"/>
+              <a:rPr sz="1200" b="1" ea="Microsoft YaHei">
+                <a:solidFill>
+                  <a:srgbClr val="FFFFFF"/>
                 </a:solidFill>
                 <a:latin typeface="Microsoft YaHei"/>
               </a:rPr>
@@ -4313,7 +4256,7 @@
             <a:avLst/>
           </a:prstGeom>
           <a:solidFill>
-            <a:srgbClr val="8B0D18"/>
+            <a:srgbClr val="FFFFFF"/>
           </a:solidFill>
           <a:ln w="10160">
             <a:solidFill>
@@ -4367,9 +4310,9 @@
           <a:p>
             <a:pPr algn="ctr"/>
             <a:r>
-              <a:rPr sz="1200" b="1" ea="Microsoft YaHei">
-                <a:solidFill>
-                  <a:srgbClr val="FFFFFF"/>
+              <a:rPr sz="1200" b="0" ea="Microsoft YaHei">
+                <a:solidFill>
+                  <a:srgbClr val="1E1E1E"/>
                 </a:solidFill>
                 <a:latin typeface="Microsoft YaHei"/>
               </a:rPr>
@@ -4478,30 +4421,32 @@
                 </a:solidFill>
                 <a:latin typeface="Microsoft YaHei"/>
               </a:rPr>
-              <a:t>代码与固件侧交付已全部完成</a:t>
-            </a:r>
-          </a:p>
-        </p:txBody>
-      </p:sp>
-      <p:sp>
-        <p:nvSpPr>
-          <p:cNvPr id="15" name="AGENT_SUMMARY_LINE_0"/>
+              <a:t>理论三：无线链路时延的前馈补偿</a:t>
+            </a:r>
+          </a:p>
+        </p:txBody>
+      </p:sp>
+      <p:sp>
+        <p:nvSpPr>
+          <p:cNvPr id="15" name="AGENT_TEXT_PANEL"/>
           <p:cNvSpPr/>
           <p:nvPr/>
         </p:nvSpPr>
         <p:spPr>
           <a:xfrm>
-            <a:off x="868680" y="1417320"/>
-            <a:ext cx="10378440" cy="10972"/>
-          </a:xfrm>
-          <a:prstGeom prst="rect">
+            <a:off x="685800" y="1417320"/>
+            <a:ext cx="10835640" cy="4434840"/>
+          </a:xfrm>
+          <a:prstGeom prst="roundRect">
             <a:avLst/>
           </a:prstGeom>
           <a:solidFill>
-            <a:srgbClr val="8B0D18"/>
+            <a:srgbClr val="FFFFFF"/>
           </a:solidFill>
-          <a:ln>
-            <a:noFill/>
+          <a:ln w="10160">
+            <a:solidFill>
+              <a:srgbClr val="BEBEBE"/>
+            </a:solidFill>
           </a:ln>
         </p:spPr>
         <p:style>
@@ -4528,14 +4473,14 @@
       </p:sp>
       <p:sp>
         <p:nvSpPr>
-          <p:cNvPr id="16" name="AGENT_SUMMARY_LABEL_0"/>
-          <p:cNvSpPr txBox="1"/>
-          <p:nvPr/>
-        </p:nvSpPr>
-        <p:spPr>
-          <a:xfrm>
-            <a:off x="960120" y="1527048"/>
-            <a:ext cx="1828800" cy="898398"/>
+          <p:cNvPr id="16" name="AGENT_BODY"/>
+          <p:cNvSpPr txBox="1"/>
+          <p:nvPr/>
+        </p:nvSpPr>
+        <p:spPr>
+          <a:xfrm>
+            <a:off x="960120" y="1664208"/>
+            <a:ext cx="10287000" cy="3931920"/>
           </a:xfrm>
           <a:prstGeom prst="rect">
             <a:avLst/>
@@ -4550,387 +4495,17 @@
           <a:p>
             <a:pPr algn="l"/>
             <a:r>
-              <a:rPr sz="1900" b="1" ea="Microsoft YaHei">
-                <a:solidFill>
-                  <a:srgbClr val="8B0D18"/>
-                </a:solidFill>
-                <a:latin typeface="Microsoft YaHei"/>
-              </a:rPr>
-              <a:t>算法</a:t>
-            </a:r>
-          </a:p>
-        </p:txBody>
-      </p:sp>
-      <p:sp>
-        <p:nvSpPr>
-          <p:cNvPr id="17" name="AGENT_SUMMARY_VALUE_0"/>
-          <p:cNvSpPr txBox="1"/>
-          <p:nvPr/>
-        </p:nvSpPr>
-        <p:spPr>
-          <a:xfrm>
-            <a:off x="2926080" y="1527048"/>
-            <a:ext cx="7909560" cy="898398"/>
-          </a:xfrm>
-          <a:prstGeom prst="rect">
-            <a:avLst/>
-          </a:prstGeom>
-          <a:noFill/>
-        </p:spPr>
-        <p:txBody>
-          <a:bodyPr wrap="square" lIns="0" rIns="0" tIns="0" bIns="0" anchor="ctr">
-            <a:spAutoFit/>
-          </a:bodyPr>
-          <a:lstStyle/>
-          <a:p>
-            <a:pPr algn="l"/>
-            <a:r>
-              <a:rPr sz="1800" b="0" ea="Microsoft YaHei">
+              <a:rPr sz="2000" b="0" ea="Microsoft YaHei">
                 <a:solidFill>
                   <a:srgbClr val="1E1E1E"/>
                 </a:solidFill>
                 <a:latin typeface="Microsoft YaHei"/>
               </a:rPr>
-              <a:t>感知/控制/状态机/协议全链路，35 项测试通过</a:t>
-            </a:r>
-          </a:p>
-        </p:txBody>
-      </p:sp>
-      <p:sp>
-        <p:nvSpPr>
-          <p:cNvPr id="18" name="AGENT_SUMMARY_LINE_1"/>
-          <p:cNvSpPr/>
-          <p:nvPr/>
-        </p:nvSpPr>
-        <p:spPr>
-          <a:xfrm>
-            <a:off x="868680" y="2480310"/>
-            <a:ext cx="10378440" cy="10972"/>
-          </a:xfrm>
-          <a:prstGeom prst="rect">
-            <a:avLst/>
-          </a:prstGeom>
-          <a:solidFill>
-            <a:srgbClr val="8B0D18"/>
-          </a:solidFill>
-          <a:ln>
-            <a:noFill/>
-          </a:ln>
-        </p:spPr>
-        <p:style>
-          <a:lnRef idx="1">
-            <a:schemeClr val="accent1"/>
-          </a:lnRef>
-          <a:fillRef idx="3">
-            <a:schemeClr val="accent1"/>
-          </a:fillRef>
-          <a:effectRef idx="2">
-            <a:schemeClr val="accent1"/>
-          </a:effectRef>
-          <a:fontRef idx="minor">
-            <a:schemeClr val="lt1"/>
-          </a:fontRef>
-        </p:style>
-        <p:txBody>
-          <a:bodyPr rtlCol="0" anchor="ctr"/>
-          <a:lstStyle/>
-          <a:p>
-            <a:pPr algn="ctr"/>
-          </a:p>
-        </p:txBody>
-      </p:sp>
-      <p:sp>
-        <p:nvSpPr>
-          <p:cNvPr id="19" name="AGENT_SUMMARY_LABEL_1"/>
-          <p:cNvSpPr txBox="1"/>
-          <p:nvPr/>
-        </p:nvSpPr>
-        <p:spPr>
-          <a:xfrm>
-            <a:off x="960120" y="2590038"/>
-            <a:ext cx="1828800" cy="898398"/>
-          </a:xfrm>
-          <a:prstGeom prst="rect">
-            <a:avLst/>
-          </a:prstGeom>
-          <a:noFill/>
-        </p:spPr>
-        <p:txBody>
-          <a:bodyPr wrap="square" lIns="0" rIns="0" tIns="0" bIns="0" anchor="ctr">
-            <a:spAutoFit/>
-          </a:bodyPr>
-          <a:lstStyle/>
-          <a:p>
-            <a:pPr algn="l"/>
-            <a:r>
-              <a:rPr sz="1900" b="1" ea="Microsoft YaHei">
-                <a:solidFill>
-                  <a:srgbClr val="8B0D18"/>
-                </a:solidFill>
-                <a:latin typeface="Microsoft YaHei"/>
-              </a:rPr>
-              <a:t>固件</a:t>
-            </a:r>
-          </a:p>
-        </p:txBody>
-      </p:sp>
-      <p:sp>
-        <p:nvSpPr>
-          <p:cNvPr id="20" name="AGENT_SUMMARY_VALUE_1"/>
-          <p:cNvSpPr txBox="1"/>
-          <p:nvPr/>
-        </p:nvSpPr>
-        <p:spPr>
-          <a:xfrm>
-            <a:off x="2926080" y="2590038"/>
-            <a:ext cx="7909560" cy="898398"/>
-          </a:xfrm>
-          <a:prstGeom prst="rect">
-            <a:avLst/>
-          </a:prstGeom>
-          <a:noFill/>
-        </p:spPr>
-        <p:txBody>
-          <a:bodyPr wrap="square" lIns="0" rIns="0" tIns="0" bIns="0" anchor="ctr">
-            <a:spAutoFit/>
-          </a:bodyPr>
-          <a:lstStyle/>
-          <a:p>
-            <a:pPr algn="l"/>
-            <a:r>
-              <a:rPr sz="1800" b="0" ea="Microsoft YaHei">
-                <a:solidFill>
-                  <a:srgbClr val="1E1E1E"/>
-                </a:solidFill>
-                <a:latin typeface="Microsoft YaHei"/>
-              </a:rPr>
-              <a:t>双指令源+三级看门狗，Keil 编译 0 错误</a:t>
-            </a:r>
-          </a:p>
-        </p:txBody>
-      </p:sp>
-      <p:sp>
-        <p:nvSpPr>
-          <p:cNvPr id="21" name="AGENT_SUMMARY_LINE_2"/>
-          <p:cNvSpPr/>
-          <p:nvPr/>
-        </p:nvSpPr>
-        <p:spPr>
-          <a:xfrm>
-            <a:off x="868680" y="3543300"/>
-            <a:ext cx="10378440" cy="10972"/>
-          </a:xfrm>
-          <a:prstGeom prst="rect">
-            <a:avLst/>
-          </a:prstGeom>
-          <a:solidFill>
-            <a:srgbClr val="8B0D18"/>
-          </a:solidFill>
-          <a:ln>
-            <a:noFill/>
-          </a:ln>
-        </p:spPr>
-        <p:style>
-          <a:lnRef idx="1">
-            <a:schemeClr val="accent1"/>
-          </a:lnRef>
-          <a:fillRef idx="3">
-            <a:schemeClr val="accent1"/>
-          </a:fillRef>
-          <a:effectRef idx="2">
-            <a:schemeClr val="accent1"/>
-          </a:effectRef>
-          <a:fontRef idx="minor">
-            <a:schemeClr val="lt1"/>
-          </a:fontRef>
-        </p:style>
-        <p:txBody>
-          <a:bodyPr rtlCol="0" anchor="ctr"/>
-          <a:lstStyle/>
-          <a:p>
-            <a:pPr algn="ctr"/>
-          </a:p>
-        </p:txBody>
-      </p:sp>
-      <p:sp>
-        <p:nvSpPr>
-          <p:cNvPr id="22" name="AGENT_SUMMARY_LABEL_2"/>
-          <p:cNvSpPr txBox="1"/>
-          <p:nvPr/>
-        </p:nvSpPr>
-        <p:spPr>
-          <a:xfrm>
-            <a:off x="960120" y="3653028"/>
-            <a:ext cx="1828800" cy="898398"/>
-          </a:xfrm>
-          <a:prstGeom prst="rect">
-            <a:avLst/>
-          </a:prstGeom>
-          <a:noFill/>
-        </p:spPr>
-        <p:txBody>
-          <a:bodyPr wrap="square" lIns="0" rIns="0" tIns="0" bIns="0" anchor="ctr">
-            <a:spAutoFit/>
-          </a:bodyPr>
-          <a:lstStyle/>
-          <a:p>
-            <a:pPr algn="l"/>
-            <a:r>
-              <a:rPr sz="1900" b="1" ea="Microsoft YaHei">
-                <a:solidFill>
-                  <a:srgbClr val="8B0D18"/>
-                </a:solidFill>
-                <a:latin typeface="Microsoft YaHei"/>
-              </a:rPr>
-              <a:t>安全</a:t>
-            </a:r>
-          </a:p>
-        </p:txBody>
-      </p:sp>
-      <p:sp>
-        <p:nvSpPr>
-          <p:cNvPr id="23" name="AGENT_SUMMARY_VALUE_2"/>
-          <p:cNvSpPr txBox="1"/>
-          <p:nvPr/>
-        </p:nvSpPr>
-        <p:spPr>
-          <a:xfrm>
-            <a:off x="2926080" y="3653028"/>
-            <a:ext cx="7909560" cy="898398"/>
-          </a:xfrm>
-          <a:prstGeom prst="rect">
-            <a:avLst/>
-          </a:prstGeom>
-          <a:noFill/>
-        </p:spPr>
-        <p:txBody>
-          <a:bodyPr wrap="square" lIns="0" rIns="0" tIns="0" bIns="0" anchor="ctr">
-            <a:spAutoFit/>
-          </a:bodyPr>
-          <a:lstStyle/>
-          <a:p>
-            <a:pPr algn="l"/>
-            <a:r>
-              <a:rPr sz="1800" b="0" ea="Microsoft YaHei">
-                <a:solidFill>
-                  <a:srgbClr val="1E1E1E"/>
-                </a:solidFill>
-                <a:latin typeface="Microsoft YaHei"/>
-              </a:rPr>
-              <a:t>驱动门控接入真实路径，急停帧显式下发</a:t>
-            </a:r>
-          </a:p>
-        </p:txBody>
-      </p:sp>
-      <p:sp>
-        <p:nvSpPr>
-          <p:cNvPr id="24" name="AGENT_SUMMARY_LINE_3"/>
-          <p:cNvSpPr/>
-          <p:nvPr/>
-        </p:nvSpPr>
-        <p:spPr>
-          <a:xfrm>
-            <a:off x="868680" y="4606290"/>
-            <a:ext cx="10378440" cy="10972"/>
-          </a:xfrm>
-          <a:prstGeom prst="rect">
-            <a:avLst/>
-          </a:prstGeom>
-          <a:solidFill>
-            <a:srgbClr val="8B0D18"/>
-          </a:solidFill>
-          <a:ln>
-            <a:noFill/>
-          </a:ln>
-        </p:spPr>
-        <p:style>
-          <a:lnRef idx="1">
-            <a:schemeClr val="accent1"/>
-          </a:lnRef>
-          <a:fillRef idx="3">
-            <a:schemeClr val="accent1"/>
-          </a:fillRef>
-          <a:effectRef idx="2">
-            <a:schemeClr val="accent1"/>
-          </a:effectRef>
-          <a:fontRef idx="minor">
-            <a:schemeClr val="lt1"/>
-          </a:fontRef>
-        </p:style>
-        <p:txBody>
-          <a:bodyPr rtlCol="0" anchor="ctr"/>
-          <a:lstStyle/>
-          <a:p>
-            <a:pPr algn="ctr"/>
-          </a:p>
-        </p:txBody>
-      </p:sp>
-      <p:sp>
-        <p:nvSpPr>
-          <p:cNvPr id="25" name="AGENT_SUMMARY_LABEL_3"/>
-          <p:cNvSpPr txBox="1"/>
-          <p:nvPr/>
-        </p:nvSpPr>
-        <p:spPr>
-          <a:xfrm>
-            <a:off x="960120" y="4716018"/>
-            <a:ext cx="1828800" cy="898398"/>
-          </a:xfrm>
-          <a:prstGeom prst="rect">
-            <a:avLst/>
-          </a:prstGeom>
-          <a:noFill/>
-        </p:spPr>
-        <p:txBody>
-          <a:bodyPr wrap="square" lIns="0" rIns="0" tIns="0" bIns="0" anchor="ctr">
-            <a:spAutoFit/>
-          </a:bodyPr>
-          <a:lstStyle/>
-          <a:p>
-            <a:pPr algn="l"/>
-            <a:r>
-              <a:rPr sz="1900" b="1" ea="Microsoft YaHei">
-                <a:solidFill>
-                  <a:srgbClr val="8B0D18"/>
-                </a:solidFill>
-                <a:latin typeface="Microsoft YaHei"/>
-              </a:rPr>
-              <a:t>评审</a:t>
-            </a:r>
-          </a:p>
-        </p:txBody>
-      </p:sp>
-      <p:sp>
-        <p:nvSpPr>
-          <p:cNvPr id="26" name="AGENT_SUMMARY_VALUE_3"/>
-          <p:cNvSpPr txBox="1"/>
-          <p:nvPr/>
-        </p:nvSpPr>
-        <p:spPr>
-          <a:xfrm>
-            <a:off x="2926080" y="4716018"/>
-            <a:ext cx="7909560" cy="898398"/>
-          </a:xfrm>
-          <a:prstGeom prst="rect">
-            <a:avLst/>
-          </a:prstGeom>
-          <a:noFill/>
-        </p:spPr>
-        <p:txBody>
-          <a:bodyPr wrap="square" lIns="0" rIns="0" tIns="0" bIns="0" anchor="ctr">
-            <a:spAutoFit/>
-          </a:bodyPr>
-          <a:lstStyle/>
-          <a:p>
-            <a:pPr algn="l"/>
-            <a:r>
-              <a:rPr sz="1800" b="0" ea="Microsoft YaHei">
-                <a:solidFill>
-                  <a:srgbClr val="1E1E1E"/>
-                </a:solidFill>
-                <a:latin typeface="Microsoft YaHei"/>
-              </a:rPr>
-              <a:t>外部 12 条意见逐条采纳/驳回并留档</a:t>
+              <a:t>1. 补偿律：e_exec = e_meas + ė·τ，开环前馈不改特征方程
+2. 时延统计取滚动中位数，对 Wi-Fi 重尾分布稳健
+3. p95 超过 50ms 触发告警，500ms 断链强制急停
+4. 可验证预言：关补偿时 RMS 偏差恶化量应正比于 τ·v
+5. 补偿置于工程实现章节，方法贡献聚焦在对行本身</a:t>
             </a:r>
           </a:p>
         </p:txBody>
@@ -5128,7 +4703,7 @@
             <a:avLst/>
           </a:prstGeom>
           <a:solidFill>
-            <a:srgbClr val="FFFFFF"/>
+            <a:srgbClr val="8B0D18"/>
           </a:solidFill>
           <a:ln w="10160">
             <a:solidFill>
@@ -5182,9 +4757,9 @@
           <a:p>
             <a:pPr algn="ctr"/>
             <a:r>
-              <a:rPr sz="1200" b="0" ea="Microsoft YaHei">
-                <a:solidFill>
-                  <a:srgbClr val="1E1E1E"/>
+              <a:rPr sz="1200" b="1" ea="Microsoft YaHei">
+                <a:solidFill>
+                  <a:srgbClr val="FFFFFF"/>
                 </a:solidFill>
                 <a:latin typeface="Microsoft YaHei"/>
               </a:rPr>
@@ -5288,191 +4863,6 @@
             <a:avLst/>
           </a:prstGeom>
           <a:solidFill>
-            <a:srgbClr val="8B0D18"/>
-          </a:solidFill>
-          <a:ln w="10160">
-            <a:solidFill>
-              <a:srgbClr val="BEBEBE"/>
-            </a:solidFill>
-          </a:ln>
-        </p:spPr>
-        <p:style>
-          <a:lnRef idx="1">
-            <a:schemeClr val="accent1"/>
-          </a:lnRef>
-          <a:fillRef idx="3">
-            <a:schemeClr val="accent1"/>
-          </a:fillRef>
-          <a:effectRef idx="2">
-            <a:schemeClr val="accent1"/>
-          </a:effectRef>
-          <a:fontRef idx="minor">
-            <a:schemeClr val="lt1"/>
-          </a:fontRef>
-        </p:style>
-        <p:txBody>
-          <a:bodyPr rtlCol="0" anchor="ctr"/>
-          <a:lstStyle/>
-          <a:p>
-            <a:pPr algn="ctr"/>
-          </a:p>
-        </p:txBody>
-      </p:sp>
-      <p:sp>
-        <p:nvSpPr>
-          <p:cNvPr id="11" name="AGENT_NAV_LABEL_4"/>
-          <p:cNvSpPr txBox="1"/>
-          <p:nvPr/>
-        </p:nvSpPr>
-        <p:spPr>
-          <a:xfrm>
-            <a:off x="9663379" y="59436"/>
-            <a:ext cx="2379268" cy="228600"/>
-          </a:xfrm>
-          <a:prstGeom prst="rect">
-            <a:avLst/>
-          </a:prstGeom>
-          <a:noFill/>
-        </p:spPr>
-        <p:txBody>
-          <a:bodyPr wrap="none" lIns="0" rIns="0" tIns="0" bIns="0" anchor="ctr">
-            <a:spAutoFit/>
-          </a:bodyPr>
-          <a:lstStyle/>
-          <a:p>
-            <a:pPr algn="ctr"/>
-            <a:r>
-              <a:rPr sz="1200" b="1" ea="Microsoft YaHei">
-                <a:solidFill>
-                  <a:srgbClr val="FFFFFF"/>
-                </a:solidFill>
-                <a:latin typeface="Microsoft YaHei"/>
-              </a:rPr>
-              <a:t>进度与计划</a:t>
-            </a:r>
-          </a:p>
-        </p:txBody>
-      </p:sp>
-      <p:sp>
-        <p:nvSpPr>
-          <p:cNvPr id="12" name="AGENT_FOOTER"/>
-          <p:cNvSpPr txBox="1"/>
-          <p:nvPr/>
-        </p:nvSpPr>
-        <p:spPr>
-          <a:xfrm>
-            <a:off x="320040" y="6510528"/>
-            <a:ext cx="8595360" cy="128016"/>
-          </a:xfrm>
-          <a:prstGeom prst="rect">
-            <a:avLst/>
-          </a:prstGeom>
-          <a:noFill/>
-        </p:spPr>
-        <p:txBody>
-          <a:bodyPr wrap="none" lIns="0" rIns="0" tIns="0" bIns="0" anchor="ctr">
-            <a:spAutoFit/>
-          </a:bodyPr>
-          <a:lstStyle/>
-          <a:p>
-            <a:pPr algn="l"/>
-            <a:r>
-              <a:rPr sz="800" b="0" ea="Microsoft YaHei">
-                <a:solidFill>
-                  <a:srgbClr val="696969"/>
-                </a:solidFill>
-                <a:latin typeface="Microsoft YaHei"/>
-              </a:rPr>
-              <a:t>纯视觉芍药行间除草机器人 · 组会进展汇报 · 2026-09-07</a:t>
-            </a:r>
-          </a:p>
-        </p:txBody>
-      </p:sp>
-      <p:sp>
-        <p:nvSpPr>
-          <p:cNvPr id="13" name="AGENT_PAGE_NUMBER"/>
-          <p:cNvSpPr txBox="1"/>
-          <p:nvPr/>
-        </p:nvSpPr>
-        <p:spPr>
-          <a:xfrm>
-            <a:off x="11521440" y="6501384"/>
-            <a:ext cx="256032" cy="128016"/>
-          </a:xfrm>
-          <a:prstGeom prst="rect">
-            <a:avLst/>
-          </a:prstGeom>
-          <a:noFill/>
-        </p:spPr>
-        <p:txBody>
-          <a:bodyPr wrap="none" lIns="0" rIns="0" tIns="0" bIns="0" anchor="ctr">
-            <a:spAutoFit/>
-          </a:bodyPr>
-          <a:lstStyle/>
-          <a:p>
-            <a:pPr algn="r"/>
-            <a:r>
-              <a:rPr sz="800" b="0" ea="Microsoft YaHei">
-                <a:solidFill>
-                  <a:srgbClr val="696969"/>
-                </a:solidFill>
-                <a:latin typeface="Microsoft YaHei"/>
-              </a:rPr>
-              <a:t>12</a:t>
-            </a:r>
-          </a:p>
-        </p:txBody>
-      </p:sp>
-      <p:sp>
-        <p:nvSpPr>
-          <p:cNvPr id="14" name="AGENT_TITLE"/>
-          <p:cNvSpPr txBox="1"/>
-          <p:nvPr/>
-        </p:nvSpPr>
-        <p:spPr>
-          <a:xfrm>
-            <a:off x="320040" y="539496"/>
-            <a:ext cx="11292840" cy="493776"/>
-          </a:xfrm>
-          <a:prstGeom prst="rect">
-            <a:avLst/>
-          </a:prstGeom>
-          <a:noFill/>
-        </p:spPr>
-        <p:txBody>
-          <a:bodyPr wrap="square" lIns="0" rIns="0" tIns="0" bIns="0" anchor="ctr">
-            <a:spAutoFit/>
-          </a:bodyPr>
-          <a:lstStyle/>
-          <a:p>
-            <a:pPr algn="l"/>
-            <a:r>
-              <a:rPr sz="3000" b="0" ea="Microsoft YaHei">
-                <a:solidFill>
-                  <a:srgbClr val="8B0D18"/>
-                </a:solidFill>
-                <a:latin typeface="Microsoft YaHei"/>
-              </a:rPr>
-              <a:t>当前瓶颈在实物侧，不在算法侧</a:t>
-            </a:r>
-          </a:p>
-        </p:txBody>
-      </p:sp>
-      <p:sp>
-        <p:nvSpPr>
-          <p:cNvPr id="15" name="AGENT_TEXT_PANEL"/>
-          <p:cNvSpPr/>
-          <p:nvPr/>
-        </p:nvSpPr>
-        <p:spPr>
-          <a:xfrm>
-            <a:off x="685800" y="1417320"/>
-            <a:ext cx="10835640" cy="4434840"/>
-          </a:xfrm>
-          <a:prstGeom prst="roundRect">
-            <a:avLst/>
-          </a:prstGeom>
-          <a:solidFill>
             <a:srgbClr val="FFFFFF"/>
           </a:solidFill>
           <a:ln w="10160">
@@ -5505,14 +4895,119 @@
       </p:sp>
       <p:sp>
         <p:nvSpPr>
-          <p:cNvPr id="16" name="AGENT_BODY"/>
-          <p:cNvSpPr txBox="1"/>
-          <p:nvPr/>
-        </p:nvSpPr>
-        <p:spPr>
-          <a:xfrm>
-            <a:off x="960120" y="1664208"/>
-            <a:ext cx="10287000" cy="3931920"/>
+          <p:cNvPr id="11" name="AGENT_NAV_LABEL_4"/>
+          <p:cNvSpPr txBox="1"/>
+          <p:nvPr/>
+        </p:nvSpPr>
+        <p:spPr>
+          <a:xfrm>
+            <a:off x="9663379" y="59436"/>
+            <a:ext cx="2379268" cy="228600"/>
+          </a:xfrm>
+          <a:prstGeom prst="rect">
+            <a:avLst/>
+          </a:prstGeom>
+          <a:noFill/>
+        </p:spPr>
+        <p:txBody>
+          <a:bodyPr wrap="none" lIns="0" rIns="0" tIns="0" bIns="0" anchor="ctr">
+            <a:spAutoFit/>
+          </a:bodyPr>
+          <a:lstStyle/>
+          <a:p>
+            <a:pPr algn="ctr"/>
+            <a:r>
+              <a:rPr sz="1200" b="0" ea="Microsoft YaHei">
+                <a:solidFill>
+                  <a:srgbClr val="1E1E1E"/>
+                </a:solidFill>
+                <a:latin typeface="Microsoft YaHei"/>
+              </a:rPr>
+              <a:t>进度与计划</a:t>
+            </a:r>
+          </a:p>
+        </p:txBody>
+      </p:sp>
+      <p:sp>
+        <p:nvSpPr>
+          <p:cNvPr id="12" name="AGENT_FOOTER"/>
+          <p:cNvSpPr txBox="1"/>
+          <p:nvPr/>
+        </p:nvSpPr>
+        <p:spPr>
+          <a:xfrm>
+            <a:off x="320040" y="6510528"/>
+            <a:ext cx="8595360" cy="128016"/>
+          </a:xfrm>
+          <a:prstGeom prst="rect">
+            <a:avLst/>
+          </a:prstGeom>
+          <a:noFill/>
+        </p:spPr>
+        <p:txBody>
+          <a:bodyPr wrap="none" lIns="0" rIns="0" tIns="0" bIns="0" anchor="ctr">
+            <a:spAutoFit/>
+          </a:bodyPr>
+          <a:lstStyle/>
+          <a:p>
+            <a:pPr algn="l"/>
+            <a:r>
+              <a:rPr sz="800" b="0" ea="Microsoft YaHei">
+                <a:solidFill>
+                  <a:srgbClr val="696969"/>
+                </a:solidFill>
+                <a:latin typeface="Microsoft YaHei"/>
+              </a:rPr>
+              <a:t>纯视觉芍药行间除草机器人 · 组会进展汇报 · 2026-09-07</a:t>
+            </a:r>
+          </a:p>
+        </p:txBody>
+      </p:sp>
+      <p:sp>
+        <p:nvSpPr>
+          <p:cNvPr id="13" name="AGENT_PAGE_NUMBER"/>
+          <p:cNvSpPr txBox="1"/>
+          <p:nvPr/>
+        </p:nvSpPr>
+        <p:spPr>
+          <a:xfrm>
+            <a:off x="11521440" y="6501384"/>
+            <a:ext cx="256032" cy="128016"/>
+          </a:xfrm>
+          <a:prstGeom prst="rect">
+            <a:avLst/>
+          </a:prstGeom>
+          <a:noFill/>
+        </p:spPr>
+        <p:txBody>
+          <a:bodyPr wrap="none" lIns="0" rIns="0" tIns="0" bIns="0" anchor="ctr">
+            <a:spAutoFit/>
+          </a:bodyPr>
+          <a:lstStyle/>
+          <a:p>
+            <a:pPr algn="r"/>
+            <a:r>
+              <a:rPr sz="800" b="0" ea="Microsoft YaHei">
+                <a:solidFill>
+                  <a:srgbClr val="696969"/>
+                </a:solidFill>
+                <a:latin typeface="Microsoft YaHei"/>
+              </a:rPr>
+              <a:t>12</a:t>
+            </a:r>
+          </a:p>
+        </p:txBody>
+      </p:sp>
+      <p:sp>
+        <p:nvSpPr>
+          <p:cNvPr id="14" name="AGENT_TITLE"/>
+          <p:cNvSpPr txBox="1"/>
+          <p:nvPr/>
+        </p:nvSpPr>
+        <p:spPr>
+          <a:xfrm>
+            <a:off x="320040" y="539496"/>
+            <a:ext cx="11292840" cy="493776"/>
           </a:xfrm>
           <a:prstGeom prst="rect">
             <a:avLst/>
@@ -5527,17 +5022,465 @@
           <a:p>
             <a:pPr algn="l"/>
             <a:r>
-              <a:rPr sz="2000" b="0" ea="Microsoft YaHei">
+              <a:rPr sz="3000" b="0" ea="Microsoft YaHei">
+                <a:solidFill>
+                  <a:srgbClr val="8B0D18"/>
+                </a:solidFill>
+                <a:latin typeface="Microsoft YaHei"/>
+              </a:rPr>
+              <a:t>IPM 投影误差已分解，对策覆盖主要误差源</a:t>
+            </a:r>
+          </a:p>
+        </p:txBody>
+      </p:sp>
+      <p:sp>
+        <p:nvSpPr>
+          <p:cNvPr id="15" name="AGENT_SUMMARY_LINE_0"/>
+          <p:cNvSpPr/>
+          <p:nvPr/>
+        </p:nvSpPr>
+        <p:spPr>
+          <a:xfrm>
+            <a:off x="868680" y="1417320"/>
+            <a:ext cx="10378440" cy="10972"/>
+          </a:xfrm>
+          <a:prstGeom prst="rect">
+            <a:avLst/>
+          </a:prstGeom>
+          <a:solidFill>
+            <a:srgbClr val="8B0D18"/>
+          </a:solidFill>
+          <a:ln>
+            <a:noFill/>
+          </a:ln>
+        </p:spPr>
+        <p:style>
+          <a:lnRef idx="1">
+            <a:schemeClr val="accent1"/>
+          </a:lnRef>
+          <a:fillRef idx="3">
+            <a:schemeClr val="accent1"/>
+          </a:fillRef>
+          <a:effectRef idx="2">
+            <a:schemeClr val="accent1"/>
+          </a:effectRef>
+          <a:fontRef idx="minor">
+            <a:schemeClr val="lt1"/>
+          </a:fontRef>
+        </p:style>
+        <p:txBody>
+          <a:bodyPr rtlCol="0" anchor="ctr"/>
+          <a:lstStyle/>
+          <a:p>
+            <a:pPr algn="ctr"/>
+          </a:p>
+        </p:txBody>
+      </p:sp>
+      <p:sp>
+        <p:nvSpPr>
+          <p:cNvPr id="16" name="AGENT_SUMMARY_LABEL_0"/>
+          <p:cNvSpPr txBox="1"/>
+          <p:nvPr/>
+        </p:nvSpPr>
+        <p:spPr>
+          <a:xfrm>
+            <a:off x="960120" y="1527048"/>
+            <a:ext cx="1828800" cy="898398"/>
+          </a:xfrm>
+          <a:prstGeom prst="rect">
+            <a:avLst/>
+          </a:prstGeom>
+          <a:noFill/>
+        </p:spPr>
+        <p:txBody>
+          <a:bodyPr wrap="square" lIns="0" rIns="0" tIns="0" bIns="0" anchor="ctr">
+            <a:spAutoFit/>
+          </a:bodyPr>
+          <a:lstStyle/>
+          <a:p>
+            <a:pPr algn="l"/>
+            <a:r>
+              <a:rPr sz="1900" b="1" ea="Microsoft YaHei">
+                <a:solidFill>
+                  <a:srgbClr val="8B0D18"/>
+                </a:solidFill>
+                <a:latin typeface="Microsoft YaHei"/>
+              </a:rPr>
+              <a:t>安装高度</a:t>
+            </a:r>
+          </a:p>
+        </p:txBody>
+      </p:sp>
+      <p:sp>
+        <p:nvSpPr>
+          <p:cNvPr id="17" name="AGENT_SUMMARY_VALUE_0"/>
+          <p:cNvSpPr txBox="1"/>
+          <p:nvPr/>
+        </p:nvSpPr>
+        <p:spPr>
+          <a:xfrm>
+            <a:off x="2926080" y="1527048"/>
+            <a:ext cx="7909560" cy="898398"/>
+          </a:xfrm>
+          <a:prstGeom prst="rect">
+            <a:avLst/>
+          </a:prstGeom>
+          <a:noFill/>
+        </p:spPr>
+        <p:txBody>
+          <a:bodyPr wrap="square" lIns="0" rIns="0" tIns="0" bIns="0" anchor="ctr">
+            <a:spAutoFit/>
+          </a:bodyPr>
+          <a:lstStyle/>
+          <a:p>
+            <a:pPr algn="l"/>
+            <a:r>
+              <a:rPr sz="1800" b="0" ea="Microsoft YaHei">
                 <a:solidFill>
                   <a:srgbClr val="1E1E1E"/>
                 </a:solidFill>
                 <a:latin typeface="Microsoft YaHei"/>
               </a:rPr>
-              <a:t>1. 待办：固件烧录、串口对拍、接线与三项系数标定
-2. 待购：RDK X5 网关、CP2102×2、TB6600、CPE 网桥一对
-3. 域差异风险已实测：夏季模型在当前田况过分割
-4. 对策：10 月中前补采 200-300 张秋季样本并微调
-5. 采集清单已定稿：光照×行况×视角矩阵，含密度分级标准</a:t>
+              <a:t>0.9m 机位下约 1.1cm，一次标定消除</a:t>
+            </a:r>
+          </a:p>
+        </p:txBody>
+      </p:sp>
+      <p:sp>
+        <p:nvSpPr>
+          <p:cNvPr id="18" name="AGENT_SUMMARY_LINE_1"/>
+          <p:cNvSpPr/>
+          <p:nvPr/>
+        </p:nvSpPr>
+        <p:spPr>
+          <a:xfrm>
+            <a:off x="868680" y="2480310"/>
+            <a:ext cx="10378440" cy="10972"/>
+          </a:xfrm>
+          <a:prstGeom prst="rect">
+            <a:avLst/>
+          </a:prstGeom>
+          <a:solidFill>
+            <a:srgbClr val="8B0D18"/>
+          </a:solidFill>
+          <a:ln>
+            <a:noFill/>
+          </a:ln>
+        </p:spPr>
+        <p:style>
+          <a:lnRef idx="1">
+            <a:schemeClr val="accent1"/>
+          </a:lnRef>
+          <a:fillRef idx="3">
+            <a:schemeClr val="accent1"/>
+          </a:fillRef>
+          <a:effectRef idx="2">
+            <a:schemeClr val="accent1"/>
+          </a:effectRef>
+          <a:fontRef idx="minor">
+            <a:schemeClr val="lt1"/>
+          </a:fontRef>
+        </p:style>
+        <p:txBody>
+          <a:bodyPr rtlCol="0" anchor="ctr"/>
+          <a:lstStyle/>
+          <a:p>
+            <a:pPr algn="ctr"/>
+          </a:p>
+        </p:txBody>
+      </p:sp>
+      <p:sp>
+        <p:nvSpPr>
+          <p:cNvPr id="19" name="AGENT_SUMMARY_LABEL_1"/>
+          <p:cNvSpPr txBox="1"/>
+          <p:nvPr/>
+        </p:nvSpPr>
+        <p:spPr>
+          <a:xfrm>
+            <a:off x="960120" y="2590038"/>
+            <a:ext cx="1828800" cy="898398"/>
+          </a:xfrm>
+          <a:prstGeom prst="rect">
+            <a:avLst/>
+          </a:prstGeom>
+          <a:noFill/>
+        </p:spPr>
+        <p:txBody>
+          <a:bodyPr wrap="square" lIns="0" rIns="0" tIns="0" bIns="0" anchor="ctr">
+            <a:spAutoFit/>
+          </a:bodyPr>
+          <a:lstStyle/>
+          <a:p>
+            <a:pPr algn="l"/>
+            <a:r>
+              <a:rPr sz="1900" b="1" ea="Microsoft YaHei">
+                <a:solidFill>
+                  <a:srgbClr val="8B0D18"/>
+                </a:solidFill>
+                <a:latin typeface="Microsoft YaHei"/>
+              </a:rPr>
+              <a:t>俯仰角</a:t>
+            </a:r>
+          </a:p>
+        </p:txBody>
+      </p:sp>
+      <p:sp>
+        <p:nvSpPr>
+          <p:cNvPr id="20" name="AGENT_SUMMARY_VALUE_1"/>
+          <p:cNvSpPr txBox="1"/>
+          <p:nvPr/>
+        </p:nvSpPr>
+        <p:spPr>
+          <a:xfrm>
+            <a:off x="2926080" y="2590038"/>
+            <a:ext cx="7909560" cy="898398"/>
+          </a:xfrm>
+          <a:prstGeom prst="rect">
+            <a:avLst/>
+          </a:prstGeom>
+          <a:noFill/>
+        </p:spPr>
+        <p:txBody>
+          <a:bodyPr wrap="square" lIns="0" rIns="0" tIns="0" bIns="0" anchor="ctr">
+            <a:spAutoFit/>
+          </a:bodyPr>
+          <a:lstStyle/>
+          <a:p>
+            <a:pPr algn="l"/>
+            <a:r>
+              <a:rPr sz="1800" b="0" ea="Microsoft YaHei">
+                <a:solidFill>
+                  <a:srgbClr val="1E1E1E"/>
+                </a:solidFill>
+                <a:latin typeface="Microsoft YaHei"/>
+              </a:rPr>
+              <a:t>误差随距离二次增长——远场只用于导航</a:t>
+            </a:r>
+          </a:p>
+        </p:txBody>
+      </p:sp>
+      <p:sp>
+        <p:nvSpPr>
+          <p:cNvPr id="21" name="AGENT_SUMMARY_LINE_2"/>
+          <p:cNvSpPr/>
+          <p:nvPr/>
+        </p:nvSpPr>
+        <p:spPr>
+          <a:xfrm>
+            <a:off x="868680" y="3543300"/>
+            <a:ext cx="10378440" cy="10972"/>
+          </a:xfrm>
+          <a:prstGeom prst="rect">
+            <a:avLst/>
+          </a:prstGeom>
+          <a:solidFill>
+            <a:srgbClr val="8B0D18"/>
+          </a:solidFill>
+          <a:ln>
+            <a:noFill/>
+          </a:ln>
+        </p:spPr>
+        <p:style>
+          <a:lnRef idx="1">
+            <a:schemeClr val="accent1"/>
+          </a:lnRef>
+          <a:fillRef idx="3">
+            <a:schemeClr val="accent1"/>
+          </a:fillRef>
+          <a:effectRef idx="2">
+            <a:schemeClr val="accent1"/>
+          </a:effectRef>
+          <a:fontRef idx="minor">
+            <a:schemeClr val="lt1"/>
+          </a:fontRef>
+        </p:style>
+        <p:txBody>
+          <a:bodyPr rtlCol="0" anchor="ctr"/>
+          <a:lstStyle/>
+          <a:p>
+            <a:pPr algn="ctr"/>
+          </a:p>
+        </p:txBody>
+      </p:sp>
+      <p:sp>
+        <p:nvSpPr>
+          <p:cNvPr id="22" name="AGENT_SUMMARY_LABEL_2"/>
+          <p:cNvSpPr txBox="1"/>
+          <p:nvPr/>
+        </p:nvSpPr>
+        <p:spPr>
+          <a:xfrm>
+            <a:off x="960120" y="3653028"/>
+            <a:ext cx="1828800" cy="898398"/>
+          </a:xfrm>
+          <a:prstGeom prst="rect">
+            <a:avLst/>
+          </a:prstGeom>
+          <a:noFill/>
+        </p:spPr>
+        <p:txBody>
+          <a:bodyPr wrap="square" lIns="0" rIns="0" tIns="0" bIns="0" anchor="ctr">
+            <a:spAutoFit/>
+          </a:bodyPr>
+          <a:lstStyle/>
+          <a:p>
+            <a:pPr algn="l"/>
+            <a:r>
+              <a:rPr sz="1900" b="1" ea="Microsoft YaHei">
+                <a:solidFill>
+                  <a:srgbClr val="8B0D18"/>
+                </a:solidFill>
+                <a:latin typeface="Microsoft YaHei"/>
+              </a:rPr>
+              <a:t>畸变/垄形</a:t>
+            </a:r>
+          </a:p>
+        </p:txBody>
+      </p:sp>
+      <p:sp>
+        <p:nvSpPr>
+          <p:cNvPr id="23" name="AGENT_SUMMARY_VALUE_2"/>
+          <p:cNvSpPr txBox="1"/>
+          <p:nvPr/>
+        </p:nvSpPr>
+        <p:spPr>
+          <a:xfrm>
+            <a:off x="2926080" y="3653028"/>
+            <a:ext cx="7909560" cy="898398"/>
+          </a:xfrm>
+          <a:prstGeom prst="rect">
+            <a:avLst/>
+          </a:prstGeom>
+          <a:noFill/>
+        </p:spPr>
+        <p:txBody>
+          <a:bodyPr wrap="square" lIns="0" rIns="0" tIns="0" bIns="0" anchor="ctr">
+            <a:spAutoFit/>
+          </a:bodyPr>
+          <a:lstStyle/>
+          <a:p>
+            <a:pPr algn="l"/>
+            <a:r>
+              <a:rPr sz="1800" b="0" ea="Microsoft YaHei">
+                <a:solidFill>
+                  <a:srgbClr val="1E1E1E"/>
+                </a:solidFill>
+                <a:latin typeface="Microsoft YaHei"/>
+              </a:rPr>
+              <a:t>先校正再投影；起伏交由 Kalman 滤波</a:t>
+            </a:r>
+          </a:p>
+        </p:txBody>
+      </p:sp>
+      <p:sp>
+        <p:nvSpPr>
+          <p:cNvPr id="24" name="AGENT_SUMMARY_LINE_3"/>
+          <p:cNvSpPr/>
+          <p:nvPr/>
+        </p:nvSpPr>
+        <p:spPr>
+          <a:xfrm>
+            <a:off x="868680" y="4606290"/>
+            <a:ext cx="10378440" cy="10972"/>
+          </a:xfrm>
+          <a:prstGeom prst="rect">
+            <a:avLst/>
+          </a:prstGeom>
+          <a:solidFill>
+            <a:srgbClr val="8B0D18"/>
+          </a:solidFill>
+          <a:ln>
+            <a:noFill/>
+          </a:ln>
+        </p:spPr>
+        <p:style>
+          <a:lnRef idx="1">
+            <a:schemeClr val="accent1"/>
+          </a:lnRef>
+          <a:fillRef idx="3">
+            <a:schemeClr val="accent1"/>
+          </a:fillRef>
+          <a:effectRef idx="2">
+            <a:schemeClr val="accent1"/>
+          </a:effectRef>
+          <a:fontRef idx="minor">
+            <a:schemeClr val="lt1"/>
+          </a:fontRef>
+        </p:style>
+        <p:txBody>
+          <a:bodyPr rtlCol="0" anchor="ctr"/>
+          <a:lstStyle/>
+          <a:p>
+            <a:pPr algn="ctr"/>
+          </a:p>
+        </p:txBody>
+      </p:sp>
+      <p:sp>
+        <p:nvSpPr>
+          <p:cNvPr id="25" name="AGENT_SUMMARY_LABEL_3"/>
+          <p:cNvSpPr txBox="1"/>
+          <p:nvPr/>
+        </p:nvSpPr>
+        <p:spPr>
+          <a:xfrm>
+            <a:off x="960120" y="4716018"/>
+            <a:ext cx="1828800" cy="898398"/>
+          </a:xfrm>
+          <a:prstGeom prst="rect">
+            <a:avLst/>
+          </a:prstGeom>
+          <a:noFill/>
+        </p:spPr>
+        <p:txBody>
+          <a:bodyPr wrap="square" lIns="0" rIns="0" tIns="0" bIns="0" anchor="ctr">
+            <a:spAutoFit/>
+          </a:bodyPr>
+          <a:lstStyle/>
+          <a:p>
+            <a:pPr algn="l"/>
+            <a:r>
+              <a:rPr sz="1900" b="1" ea="Microsoft YaHei">
+                <a:solidFill>
+                  <a:srgbClr val="8B0D18"/>
+                </a:solidFill>
+                <a:latin typeface="Microsoft YaHei"/>
+              </a:rPr>
+              <a:t>验收线</a:t>
+            </a:r>
+          </a:p>
+        </p:txBody>
+      </p:sp>
+      <p:sp>
+        <p:nvSpPr>
+          <p:cNvPr id="26" name="AGENT_SUMMARY_VALUE_3"/>
+          <p:cNvSpPr txBox="1"/>
+          <p:nvPr/>
+        </p:nvSpPr>
+        <p:spPr>
+          <a:xfrm>
+            <a:off x="2926080" y="4716018"/>
+            <a:ext cx="7909560" cy="898398"/>
+          </a:xfrm>
+          <a:prstGeom prst="rect">
+            <a:avLst/>
+          </a:prstGeom>
+          <a:noFill/>
+        </p:spPr>
+        <p:txBody>
+          <a:bodyPr wrap="square" lIns="0" rIns="0" tIns="0" bIns="0" anchor="ctr">
+            <a:spAutoFit/>
+          </a:bodyPr>
+          <a:lstStyle/>
+          <a:p>
+            <a:pPr algn="l"/>
+            <a:r>
+              <a:rPr sz="1800" b="0" ea="Microsoft YaHei">
+                <a:solidFill>
+                  <a:srgbClr val="1E1E1E"/>
+                </a:solidFill>
+                <a:latin typeface="Microsoft YaHei"/>
+              </a:rPr>
+              <a:t>标记点重投影误差 ≤2cm，工具链已备好</a:t>
             </a:r>
           </a:p>
         </p:txBody>
@@ -5735,7 +5678,7 @@
             <a:avLst/>
           </a:prstGeom>
           <a:solidFill>
-            <a:srgbClr val="FFFFFF"/>
+            <a:srgbClr val="8B0D18"/>
           </a:solidFill>
           <a:ln w="10160">
             <a:solidFill>
@@ -5789,9 +5732,9 @@
           <a:p>
             <a:pPr algn="ctr"/>
             <a:r>
-              <a:rPr sz="1200" b="0" ea="Microsoft YaHei">
-                <a:solidFill>
-                  <a:srgbClr val="1E1E1E"/>
+              <a:rPr sz="1200" b="1" ea="Microsoft YaHei">
+                <a:solidFill>
+                  <a:srgbClr val="FFFFFF"/>
                 </a:solidFill>
                 <a:latin typeface="Microsoft YaHei"/>
               </a:rPr>
@@ -5895,7 +5838,7 @@
             <a:avLst/>
           </a:prstGeom>
           <a:solidFill>
-            <a:srgbClr val="8B0D18"/>
+            <a:srgbClr val="FFFFFF"/>
           </a:solidFill>
           <a:ln w="10160">
             <a:solidFill>
@@ -5949,9 +5892,9 @@
           <a:p>
             <a:pPr algn="ctr"/>
             <a:r>
-              <a:rPr sz="1200" b="1" ea="Microsoft YaHei">
-                <a:solidFill>
-                  <a:srgbClr val="FFFFFF"/>
+              <a:rPr sz="1200" b="0" ea="Microsoft YaHei">
+                <a:solidFill>
+                  <a:srgbClr val="1E1E1E"/>
                 </a:solidFill>
                 <a:latin typeface="Microsoft YaHei"/>
               </a:rPr>
@@ -6060,27 +6003,27 @@
                 </a:solidFill>
                 <a:latin typeface="Microsoft YaHei"/>
               </a:rPr>
-              <a:t>后续四周：从台架到下田</a:t>
-            </a:r>
-          </a:p>
-        </p:txBody>
-      </p:sp>
-      <p:sp>
-        <p:nvSpPr>
-          <p:cNvPr id="15" name="AGENT_STEP_BOX_0"/>
+              <a:t>创新点定稿：方法为核心，装置为载体</a:t>
+            </a:r>
+          </a:p>
+        </p:txBody>
+      </p:sp>
+      <p:sp>
+        <p:nvSpPr>
+          <p:cNvPr id="15" name="AGENT_SUMMARY_LINE_0"/>
           <p:cNvSpPr/>
           <p:nvPr/>
         </p:nvSpPr>
         <p:spPr>
           <a:xfrm>
-            <a:off x="1051560" y="2743200"/>
-            <a:ext cx="2345436" cy="914400"/>
+            <a:off x="868680" y="1417320"/>
+            <a:ext cx="10378440" cy="10972"/>
           </a:xfrm>
           <a:prstGeom prst="rect">
             <a:avLst/>
           </a:prstGeom>
           <a:solidFill>
-            <a:srgbClr val="F7F7F7"/>
+            <a:srgbClr val="8B0D18"/>
           </a:solidFill>
           <a:ln>
             <a:noFill/>
@@ -6110,14 +6053,14 @@
       </p:sp>
       <p:sp>
         <p:nvSpPr>
-          <p:cNvPr id="16" name="AGENT_STEP_TEXT_0"/>
-          <p:cNvSpPr txBox="1"/>
-          <p:nvPr/>
-        </p:nvSpPr>
-        <p:spPr>
-          <a:xfrm>
-            <a:off x="1124712" y="2880360"/>
-            <a:ext cx="2199132" cy="640080"/>
+          <p:cNvPr id="16" name="AGENT_SUMMARY_LABEL_0"/>
+          <p:cNvSpPr txBox="1"/>
+          <p:nvPr/>
+        </p:nvSpPr>
+        <p:spPr>
+          <a:xfrm>
+            <a:off x="960120" y="1527048"/>
+            <a:ext cx="1828800" cy="898398"/>
           </a:xfrm>
           <a:prstGeom prst="rect">
             <a:avLst/>
@@ -6130,70 +6073,70 @@
           </a:bodyPr>
           <a:lstStyle/>
           <a:p>
-            <a:pPr algn="ctr"/>
-            <a:r>
-              <a:rPr sz="1800" b="1" ea="Microsoft YaHei">
+            <a:pPr algn="l"/>
+            <a:r>
+              <a:rPr sz="1900" b="1" ea="Microsoft YaHei">
+                <a:solidFill>
+                  <a:srgbClr val="8B0D18"/>
+                </a:solidFill>
+                <a:latin typeface="Microsoft YaHei"/>
+              </a:rPr>
+              <a:t>创新点1</a:t>
+            </a:r>
+          </a:p>
+        </p:txBody>
+      </p:sp>
+      <p:sp>
+        <p:nvSpPr>
+          <p:cNvPr id="17" name="AGENT_SUMMARY_VALUE_0"/>
+          <p:cNvSpPr txBox="1"/>
+          <p:nvPr/>
+        </p:nvSpPr>
+        <p:spPr>
+          <a:xfrm>
+            <a:off x="2926080" y="1527048"/>
+            <a:ext cx="7909560" cy="898398"/>
+          </a:xfrm>
+          <a:prstGeom prst="rect">
+            <a:avLst/>
+          </a:prstGeom>
+          <a:noFill/>
+        </p:spPr>
+        <p:txBody>
+          <a:bodyPr wrap="square" lIns="0" rIns="0" tIns="0" bIns="0" anchor="ctr">
+            <a:spAutoFit/>
+          </a:bodyPr>
+          <a:lstStyle/>
+          <a:p>
+            <a:pPr algn="l"/>
+            <a:r>
+              <a:rPr sz="1800" b="0" ea="Microsoft YaHei">
                 <a:solidFill>
                   <a:srgbClr val="1E1E1E"/>
                 </a:solidFill>
                 <a:latin typeface="Microsoft YaHei"/>
               </a:rPr>
-              <a:t>W1-W2 烧录对拍</a:t>
-            </a:r>
-          </a:p>
-        </p:txBody>
-      </p:sp>
-      <p:sp>
-        <p:nvSpPr>
-          <p:cNvPr id="17" name="AGENT_STEP_ARROW_0"/>
-          <p:cNvSpPr txBox="1"/>
-          <p:nvPr/>
-        </p:nvSpPr>
-        <p:spPr>
-          <a:xfrm>
-            <a:off x="3470148" y="2935224"/>
-            <a:ext cx="164592" cy="365760"/>
-          </a:xfrm>
-          <a:prstGeom prst="rect">
-            <a:avLst/>
-          </a:prstGeom>
-          <a:noFill/>
-        </p:spPr>
-        <p:txBody>
-          <a:bodyPr wrap="none" lIns="0" rIns="0" tIns="0" bIns="0" anchor="ctr">
-            <a:spAutoFit/>
-          </a:bodyPr>
-          <a:lstStyle/>
-          <a:p>
-            <a:pPr algn="ctr"/>
-            <a:r>
-              <a:rPr sz="2000" b="1" ea="Microsoft YaHei">
-                <a:solidFill>
-                  <a:srgbClr val="8B0D18"/>
-                </a:solidFill>
-                <a:latin typeface="Microsoft YaHei"/>
-              </a:rPr>
-              <a:t>→</a:t>
-            </a:r>
-          </a:p>
-        </p:txBody>
-      </p:sp>
-      <p:sp>
-        <p:nvSpPr>
-          <p:cNvPr id="18" name="AGENT_STEP_BOX_1"/>
+              <a:t>三刀装置 + 双墙约束主动对行方法（核心）</a:t>
+            </a:r>
+          </a:p>
+        </p:txBody>
+      </p:sp>
+      <p:sp>
+        <p:nvSpPr>
+          <p:cNvPr id="18" name="AGENT_SUMMARY_LINE_1"/>
           <p:cNvSpPr/>
           <p:nvPr/>
         </p:nvSpPr>
         <p:spPr>
           <a:xfrm>
-            <a:off x="3543300" y="2743200"/>
-            <a:ext cx="2345436" cy="914400"/>
+            <a:off x="868680" y="2480310"/>
+            <a:ext cx="10378440" cy="10972"/>
           </a:xfrm>
           <a:prstGeom prst="rect">
             <a:avLst/>
           </a:prstGeom>
           <a:solidFill>
-            <a:srgbClr val="F7F7F7"/>
+            <a:srgbClr val="8B0D18"/>
           </a:solidFill>
           <a:ln>
             <a:noFill/>
@@ -6223,14 +6166,14 @@
       </p:sp>
       <p:sp>
         <p:nvSpPr>
-          <p:cNvPr id="19" name="AGENT_STEP_TEXT_1"/>
-          <p:cNvSpPr txBox="1"/>
-          <p:nvPr/>
-        </p:nvSpPr>
-        <p:spPr>
-          <a:xfrm>
-            <a:off x="3616452" y="2880360"/>
-            <a:ext cx="2199132" cy="640080"/>
+          <p:cNvPr id="19" name="AGENT_SUMMARY_LABEL_1"/>
+          <p:cNvSpPr txBox="1"/>
+          <p:nvPr/>
+        </p:nvSpPr>
+        <p:spPr>
+          <a:xfrm>
+            <a:off x="960120" y="2590038"/>
+            <a:ext cx="1828800" cy="898398"/>
           </a:xfrm>
           <a:prstGeom prst="rect">
             <a:avLst/>
@@ -6243,70 +6186,70 @@
           </a:bodyPr>
           <a:lstStyle/>
           <a:p>
-            <a:pPr algn="ctr"/>
-            <a:r>
-              <a:rPr sz="1800" b="1" ea="Microsoft YaHei">
+            <a:pPr algn="l"/>
+            <a:r>
+              <a:rPr sz="1900" b="1" ea="Microsoft YaHei">
+                <a:solidFill>
+                  <a:srgbClr val="8B0D18"/>
+                </a:solidFill>
+                <a:latin typeface="Microsoft YaHei"/>
+              </a:rPr>
+              <a:t>创新点2</a:t>
+            </a:r>
+          </a:p>
+        </p:txBody>
+      </p:sp>
+      <p:sp>
+        <p:nvSpPr>
+          <p:cNvPr id="20" name="AGENT_SUMMARY_VALUE_1"/>
+          <p:cNvSpPr txBox="1"/>
+          <p:nvPr/>
+        </p:nvSpPr>
+        <p:spPr>
+          <a:xfrm>
+            <a:off x="2926080" y="2590038"/>
+            <a:ext cx="7909560" cy="898398"/>
+          </a:xfrm>
+          <a:prstGeom prst="rect">
+            <a:avLst/>
+          </a:prstGeom>
+          <a:noFill/>
+        </p:spPr>
+        <p:txBody>
+          <a:bodyPr wrap="square" lIns="0" rIns="0" tIns="0" bIns="0" anchor="ctr">
+            <a:spAutoFit/>
+          </a:bodyPr>
+          <a:lstStyle/>
+          <a:p>
+            <a:pPr algn="l"/>
+            <a:r>
+              <a:rPr sz="1800" b="0" ea="Microsoft YaHei">
                 <a:solidFill>
                   <a:srgbClr val="1E1E1E"/>
                 </a:solidFill>
                 <a:latin typeface="Microsoft YaHei"/>
               </a:rPr>
-              <a:t>W3-W4 链路测试</a:t>
-            </a:r>
-          </a:p>
-        </p:txBody>
-      </p:sp>
-      <p:sp>
-        <p:nvSpPr>
-          <p:cNvPr id="20" name="AGENT_STEP_ARROW_1"/>
-          <p:cNvSpPr txBox="1"/>
-          <p:nvPr/>
-        </p:nvSpPr>
-        <p:spPr>
-          <a:xfrm>
-            <a:off x="5961888" y="2935224"/>
-            <a:ext cx="164592" cy="365760"/>
-          </a:xfrm>
-          <a:prstGeom prst="rect">
-            <a:avLst/>
-          </a:prstGeom>
-          <a:noFill/>
-        </p:spPr>
-        <p:txBody>
-          <a:bodyPr wrap="none" lIns="0" rIns="0" tIns="0" bIns="0" anchor="ctr">
-            <a:spAutoFit/>
-          </a:bodyPr>
-          <a:lstStyle/>
-          <a:p>
-            <a:pPr algn="ctr"/>
-            <a:r>
-              <a:rPr sz="2000" b="1" ea="Microsoft YaHei">
-                <a:solidFill>
-                  <a:srgbClr val="8B0D18"/>
-                </a:solidFill>
-                <a:latin typeface="Microsoft YaHei"/>
-              </a:rPr>
-              <a:t>→</a:t>
-            </a:r>
-          </a:p>
-        </p:txBody>
-      </p:sp>
-      <p:sp>
-        <p:nvSpPr>
-          <p:cNvPr id="21" name="AGENT_STEP_BOX_2"/>
+              <a:t>限深仿形机构设计与刀头对比优化</a:t>
+            </a:r>
+          </a:p>
+        </p:txBody>
+      </p:sp>
+      <p:sp>
+        <p:nvSpPr>
+          <p:cNvPr id="21" name="AGENT_SUMMARY_LINE_2"/>
           <p:cNvSpPr/>
           <p:nvPr/>
         </p:nvSpPr>
         <p:spPr>
           <a:xfrm>
-            <a:off x="6035040" y="2743200"/>
-            <a:ext cx="2345436" cy="914400"/>
+            <a:off x="868680" y="3543300"/>
+            <a:ext cx="10378440" cy="10972"/>
           </a:xfrm>
           <a:prstGeom prst="rect">
             <a:avLst/>
           </a:prstGeom>
           <a:solidFill>
-            <a:srgbClr val="F7F7F7"/>
+            <a:srgbClr val="8B0D18"/>
           </a:solidFill>
           <a:ln>
             <a:noFill/>
@@ -6336,14 +6279,14 @@
       </p:sp>
       <p:sp>
         <p:nvSpPr>
-          <p:cNvPr id="22" name="AGENT_STEP_TEXT_2"/>
-          <p:cNvSpPr txBox="1"/>
-          <p:nvPr/>
-        </p:nvSpPr>
-        <p:spPr>
-          <a:xfrm>
-            <a:off x="6108192" y="2880360"/>
-            <a:ext cx="2199132" cy="640080"/>
+          <p:cNvPr id="22" name="AGENT_SUMMARY_LABEL_2"/>
+          <p:cNvSpPr txBox="1"/>
+          <p:nvPr/>
+        </p:nvSpPr>
+        <p:spPr>
+          <a:xfrm>
+            <a:off x="960120" y="3653028"/>
+            <a:ext cx="1828800" cy="898398"/>
           </a:xfrm>
           <a:prstGeom prst="rect">
             <a:avLst/>
@@ -6356,70 +6299,70 @@
           </a:bodyPr>
           <a:lstStyle/>
           <a:p>
-            <a:pPr algn="ctr"/>
-            <a:r>
-              <a:rPr sz="1800" b="1" ea="Microsoft YaHei">
+            <a:pPr algn="l"/>
+            <a:r>
+              <a:rPr sz="1900" b="1" ea="Microsoft YaHei">
+                <a:solidFill>
+                  <a:srgbClr val="8B0D18"/>
+                </a:solidFill>
+                <a:latin typeface="Microsoft YaHei"/>
+              </a:rPr>
+              <a:t>后备点3</a:t>
+            </a:r>
+          </a:p>
+        </p:txBody>
+      </p:sp>
+      <p:sp>
+        <p:nvSpPr>
+          <p:cNvPr id="23" name="AGENT_SUMMARY_VALUE_2"/>
+          <p:cNvSpPr txBox="1"/>
+          <p:nvPr/>
+        </p:nvSpPr>
+        <p:spPr>
+          <a:xfrm>
+            <a:off x="2926080" y="3653028"/>
+            <a:ext cx="7909560" cy="898398"/>
+          </a:xfrm>
+          <a:prstGeom prst="rect">
+            <a:avLst/>
+          </a:prstGeom>
+          <a:noFill/>
+        </p:spPr>
+        <p:txBody>
+          <a:bodyPr wrap="square" lIns="0" rIns="0" tIns="0" bIns="0" anchor="ctr">
+            <a:spAutoFit/>
+          </a:bodyPr>
+          <a:lstStyle/>
+          <a:p>
+            <a:pPr algn="l"/>
+            <a:r>
+              <a:rPr sz="1800" b="0" ea="Microsoft YaHei">
                 <a:solidFill>
                   <a:srgbClr val="1E1E1E"/>
                 </a:solidFill>
                 <a:latin typeface="Microsoft YaHei"/>
               </a:rPr>
-              <a:t>W5-W6 采样微调</a:t>
-            </a:r>
-          </a:p>
-        </p:txBody>
-      </p:sp>
-      <p:sp>
-        <p:nvSpPr>
-          <p:cNvPr id="23" name="AGENT_STEP_ARROW_2"/>
-          <p:cNvSpPr txBox="1"/>
-          <p:nvPr/>
-        </p:nvSpPr>
-        <p:spPr>
-          <a:xfrm>
-            <a:off x="8453628" y="2935224"/>
-            <a:ext cx="164592" cy="365760"/>
-          </a:xfrm>
-          <a:prstGeom prst="rect">
-            <a:avLst/>
-          </a:prstGeom>
-          <a:noFill/>
-        </p:spPr>
-        <p:txBody>
-          <a:bodyPr wrap="none" lIns="0" rIns="0" tIns="0" bIns="0" anchor="ctr">
-            <a:spAutoFit/>
-          </a:bodyPr>
-          <a:lstStyle/>
-          <a:p>
-            <a:pPr algn="ctr"/>
-            <a:r>
-              <a:rPr sz="2000" b="1" ea="Microsoft YaHei">
-                <a:solidFill>
-                  <a:srgbClr val="8B0D18"/>
-                </a:solidFill>
-                <a:latin typeface="Microsoft YaHei"/>
-              </a:rPr>
-              <a:t>→</a:t>
-            </a:r>
-          </a:p>
-        </p:txBody>
-      </p:sp>
-      <p:sp>
-        <p:nvSpPr>
-          <p:cNvPr id="24" name="AGENT_STEP_BOX_3"/>
+              <a:t>时延前馈补偿，视试验显著性决定升格</a:t>
+            </a:r>
+          </a:p>
+        </p:txBody>
+      </p:sp>
+      <p:sp>
+        <p:nvSpPr>
+          <p:cNvPr id="24" name="AGENT_SUMMARY_LINE_3"/>
           <p:cNvSpPr/>
           <p:nvPr/>
         </p:nvSpPr>
         <p:spPr>
           <a:xfrm>
-            <a:off x="8526780" y="2743200"/>
-            <a:ext cx="2345436" cy="914400"/>
+            <a:off x="868680" y="4606290"/>
+            <a:ext cx="10378440" cy="10972"/>
           </a:xfrm>
           <a:prstGeom prst="rect">
             <a:avLst/>
           </a:prstGeom>
           <a:solidFill>
-            <a:srgbClr val="F7F7F7"/>
+            <a:srgbClr val="8B0D18"/>
           </a:solidFill>
           <a:ln>
             <a:noFill/>
@@ -6449,14 +6392,14 @@
       </p:sp>
       <p:sp>
         <p:nvSpPr>
-          <p:cNvPr id="25" name="AGENT_STEP_TEXT_3"/>
-          <p:cNvSpPr txBox="1"/>
-          <p:nvPr/>
-        </p:nvSpPr>
-        <p:spPr>
-          <a:xfrm>
-            <a:off x="8599932" y="2880360"/>
-            <a:ext cx="2199132" cy="640080"/>
+          <p:cNvPr id="25" name="AGENT_SUMMARY_LABEL_3"/>
+          <p:cNvSpPr txBox="1"/>
+          <p:nvPr/>
+        </p:nvSpPr>
+        <p:spPr>
+          <a:xfrm>
+            <a:off x="960120" y="4716018"/>
+            <a:ext cx="1828800" cy="898398"/>
           </a:xfrm>
           <a:prstGeom prst="rect">
             <a:avLst/>
@@ -6469,51 +6412,50 @@
           </a:bodyPr>
           <a:lstStyle/>
           <a:p>
-            <a:pPr algn="ctr"/>
-            <a:r>
-              <a:rPr sz="1800" b="1" ea="Microsoft YaHei">
+            <a:pPr algn="l"/>
+            <a:r>
+              <a:rPr sz="1900" b="1" ea="Microsoft YaHei">
+                <a:solidFill>
+                  <a:srgbClr val="8B0D18"/>
+                </a:solidFill>
+                <a:latin typeface="Microsoft YaHei"/>
+              </a:rPr>
+              <a:t>证据</a:t>
+            </a:r>
+          </a:p>
+        </p:txBody>
+      </p:sp>
+      <p:sp>
+        <p:nvSpPr>
+          <p:cNvPr id="26" name="AGENT_SUMMARY_VALUE_3"/>
+          <p:cNvSpPr txBox="1"/>
+          <p:nvPr/>
+        </p:nvSpPr>
+        <p:spPr>
+          <a:xfrm>
+            <a:off x="2926080" y="4716018"/>
+            <a:ext cx="7909560" cy="898398"/>
+          </a:xfrm>
+          <a:prstGeom prst="rect">
+            <a:avLst/>
+          </a:prstGeom>
+          <a:noFill/>
+        </p:spPr>
+        <p:txBody>
+          <a:bodyPr wrap="square" lIns="0" rIns="0" tIns="0" bIns="0" anchor="ctr">
+            <a:spAutoFit/>
+          </a:bodyPr>
+          <a:lstStyle/>
+          <a:p>
+            <a:pPr algn="l"/>
+            <a:r>
+              <a:rPr sz="1800" b="0" ea="Microsoft YaHei">
                 <a:solidFill>
                   <a:srgbClr val="1E1E1E"/>
                 </a:solidFill>
                 <a:latin typeface="Microsoft YaHei"/>
               </a:rPr>
-              <a:t>W7 起田间联调</a:t>
-            </a:r>
-          </a:p>
-        </p:txBody>
-      </p:sp>
-      <p:sp>
-        <p:nvSpPr>
-          <p:cNvPr id="26" name="AGENT_BODY"/>
-          <p:cNvSpPr txBox="1"/>
-          <p:nvPr/>
-        </p:nvSpPr>
-        <p:spPr>
-          <a:xfrm>
-            <a:off x="1005840" y="4251960"/>
-            <a:ext cx="9966960" cy="1051560"/>
-          </a:xfrm>
-          <a:prstGeom prst="rect">
-            <a:avLst/>
-          </a:prstGeom>
-          <a:noFill/>
-        </p:spPr>
-        <p:txBody>
-          <a:bodyPr wrap="square" lIns="0" rIns="0" tIns="0" bIns="0" anchor="ctr">
-            <a:spAutoFit/>
-          </a:bodyPr>
-          <a:lstStyle/>
-          <a:p>
-            <a:pPr algn="l"/>
-            <a:r>
-              <a:rPr sz="1800" b="0" ea="Microsoft YaHei">
-                <a:solidFill>
-                  <a:srgbClr val="1E1E1E"/>
-                </a:solidFill>
-                <a:latin typeface="Microsoft YaHei"/>
-              </a:rPr>
-              <a:t>1. 机械收尾与整机装配并行
-2. 安全清单逐项验证后下田</a:t>
+              <a:t>主动 vs 固定刀对比试验直接验证方法</a:t>
             </a:r>
           </a:p>
         </p:txBody>
@@ -6538,6 +6480,3232 @@
       <p:grpSpPr/>
       <p:sp>
         <p:nvSpPr>
+          <p:cNvPr id="2" name="AGENT_NAV_SLOT_0"/>
+          <p:cNvSpPr/>
+          <p:nvPr/>
+        </p:nvSpPr>
+        <p:spPr>
+          <a:xfrm>
+            <a:off x="146304" y="27432"/>
+            <a:ext cx="2379268" cy="347472"/>
+          </a:xfrm>
+          <a:prstGeom prst="rect">
+            <a:avLst/>
+          </a:prstGeom>
+          <a:solidFill>
+            <a:srgbClr val="FFFFFF"/>
+          </a:solidFill>
+          <a:ln w="10160">
+            <a:solidFill>
+              <a:srgbClr val="BEBEBE"/>
+            </a:solidFill>
+          </a:ln>
+        </p:spPr>
+        <p:style>
+          <a:lnRef idx="1">
+            <a:schemeClr val="accent1"/>
+          </a:lnRef>
+          <a:fillRef idx="3">
+            <a:schemeClr val="accent1"/>
+          </a:fillRef>
+          <a:effectRef idx="2">
+            <a:schemeClr val="accent1"/>
+          </a:effectRef>
+          <a:fontRef idx="minor">
+            <a:schemeClr val="lt1"/>
+          </a:fontRef>
+        </p:style>
+        <p:txBody>
+          <a:bodyPr rtlCol="0" anchor="ctr"/>
+          <a:lstStyle/>
+          <a:p>
+            <a:pPr algn="ctr"/>
+          </a:p>
+        </p:txBody>
+      </p:sp>
+      <p:sp>
+        <p:nvSpPr>
+          <p:cNvPr id="3" name="AGENT_NAV_LABEL_0"/>
+          <p:cNvSpPr txBox="1"/>
+          <p:nvPr/>
+        </p:nvSpPr>
+        <p:spPr>
+          <a:xfrm>
+            <a:off x="146304" y="59436"/>
+            <a:ext cx="2379268" cy="228600"/>
+          </a:xfrm>
+          <a:prstGeom prst="rect">
+            <a:avLst/>
+          </a:prstGeom>
+          <a:noFill/>
+        </p:spPr>
+        <p:txBody>
+          <a:bodyPr wrap="none" lIns="0" rIns="0" tIns="0" bIns="0" anchor="ctr">
+            <a:spAutoFit/>
+          </a:bodyPr>
+          <a:lstStyle/>
+          <a:p>
+            <a:pPr algn="ctr"/>
+            <a:r>
+              <a:rPr sz="1200" b="0" ea="Microsoft YaHei">
+                <a:solidFill>
+                  <a:srgbClr val="1E1E1E"/>
+                </a:solidFill>
+                <a:latin typeface="Microsoft YaHei"/>
+              </a:rPr>
+              <a:t>研究背景</a:t>
+            </a:r>
+          </a:p>
+        </p:txBody>
+      </p:sp>
+      <p:sp>
+        <p:nvSpPr>
+          <p:cNvPr id="4" name="AGENT_NAV_SLOT_1"/>
+          <p:cNvSpPr/>
+          <p:nvPr/>
+        </p:nvSpPr>
+        <p:spPr>
+          <a:xfrm>
+            <a:off x="2525572" y="27432"/>
+            <a:ext cx="2379268" cy="347472"/>
+          </a:xfrm>
+          <a:prstGeom prst="rect">
+            <a:avLst/>
+          </a:prstGeom>
+          <a:solidFill>
+            <a:srgbClr val="FFFFFF"/>
+          </a:solidFill>
+          <a:ln w="10160">
+            <a:solidFill>
+              <a:srgbClr val="BEBEBE"/>
+            </a:solidFill>
+          </a:ln>
+        </p:spPr>
+        <p:style>
+          <a:lnRef idx="1">
+            <a:schemeClr val="accent1"/>
+          </a:lnRef>
+          <a:fillRef idx="3">
+            <a:schemeClr val="accent1"/>
+          </a:fillRef>
+          <a:effectRef idx="2">
+            <a:schemeClr val="accent1"/>
+          </a:effectRef>
+          <a:fontRef idx="minor">
+            <a:schemeClr val="lt1"/>
+          </a:fontRef>
+        </p:style>
+        <p:txBody>
+          <a:bodyPr rtlCol="0" anchor="ctr"/>
+          <a:lstStyle/>
+          <a:p>
+            <a:pPr algn="ctr"/>
+          </a:p>
+        </p:txBody>
+      </p:sp>
+      <p:sp>
+        <p:nvSpPr>
+          <p:cNvPr id="5" name="AGENT_NAV_LABEL_1"/>
+          <p:cNvSpPr txBox="1"/>
+          <p:nvPr/>
+        </p:nvSpPr>
+        <p:spPr>
+          <a:xfrm>
+            <a:off x="2525572" y="59436"/>
+            <a:ext cx="2379268" cy="228600"/>
+          </a:xfrm>
+          <a:prstGeom prst="rect">
+            <a:avLst/>
+          </a:prstGeom>
+          <a:noFill/>
+        </p:spPr>
+        <p:txBody>
+          <a:bodyPr wrap="none" lIns="0" rIns="0" tIns="0" bIns="0" anchor="ctr">
+            <a:spAutoFit/>
+          </a:bodyPr>
+          <a:lstStyle/>
+          <a:p>
+            <a:pPr algn="ctr"/>
+            <a:r>
+              <a:rPr sz="1200" b="0" ea="Microsoft YaHei">
+                <a:solidFill>
+                  <a:srgbClr val="1E1E1E"/>
+                </a:solidFill>
+                <a:latin typeface="Microsoft YaHei"/>
+              </a:rPr>
+              <a:t>总体方案</a:t>
+            </a:r>
+          </a:p>
+        </p:txBody>
+      </p:sp>
+      <p:sp>
+        <p:nvSpPr>
+          <p:cNvPr id="6" name="AGENT_NAV_SLOT_2"/>
+          <p:cNvSpPr/>
+          <p:nvPr/>
+        </p:nvSpPr>
+        <p:spPr>
+          <a:xfrm>
+            <a:off x="4904841" y="27432"/>
+            <a:ext cx="2379268" cy="347472"/>
+          </a:xfrm>
+          <a:prstGeom prst="rect">
+            <a:avLst/>
+          </a:prstGeom>
+          <a:solidFill>
+            <a:srgbClr val="FFFFFF"/>
+          </a:solidFill>
+          <a:ln w="10160">
+            <a:solidFill>
+              <a:srgbClr val="BEBEBE"/>
+            </a:solidFill>
+          </a:ln>
+        </p:spPr>
+        <p:style>
+          <a:lnRef idx="1">
+            <a:schemeClr val="accent1"/>
+          </a:lnRef>
+          <a:fillRef idx="3">
+            <a:schemeClr val="accent1"/>
+          </a:fillRef>
+          <a:effectRef idx="2">
+            <a:schemeClr val="accent1"/>
+          </a:effectRef>
+          <a:fontRef idx="minor">
+            <a:schemeClr val="lt1"/>
+          </a:fontRef>
+        </p:style>
+        <p:txBody>
+          <a:bodyPr rtlCol="0" anchor="ctr"/>
+          <a:lstStyle/>
+          <a:p>
+            <a:pPr algn="ctr"/>
+          </a:p>
+        </p:txBody>
+      </p:sp>
+      <p:sp>
+        <p:nvSpPr>
+          <p:cNvPr id="7" name="AGENT_NAV_LABEL_2"/>
+          <p:cNvSpPr txBox="1"/>
+          <p:nvPr/>
+        </p:nvSpPr>
+        <p:spPr>
+          <a:xfrm>
+            <a:off x="4904841" y="59436"/>
+            <a:ext cx="2379268" cy="228600"/>
+          </a:xfrm>
+          <a:prstGeom prst="rect">
+            <a:avLst/>
+          </a:prstGeom>
+          <a:noFill/>
+        </p:spPr>
+        <p:txBody>
+          <a:bodyPr wrap="none" lIns="0" rIns="0" tIns="0" bIns="0" anchor="ctr">
+            <a:spAutoFit/>
+          </a:bodyPr>
+          <a:lstStyle/>
+          <a:p>
+            <a:pPr algn="ctr"/>
+            <a:r>
+              <a:rPr sz="1200" b="0" ea="Microsoft YaHei">
+                <a:solidFill>
+                  <a:srgbClr val="1E1E1E"/>
+                </a:solidFill>
+                <a:latin typeface="Microsoft YaHei"/>
+              </a:rPr>
+              <a:t>理论方法</a:t>
+            </a:r>
+          </a:p>
+        </p:txBody>
+      </p:sp>
+      <p:sp>
+        <p:nvSpPr>
+          <p:cNvPr id="8" name="AGENT_NAV_SLOT_3"/>
+          <p:cNvSpPr/>
+          <p:nvPr/>
+        </p:nvSpPr>
+        <p:spPr>
+          <a:xfrm>
+            <a:off x="7284110" y="27432"/>
+            <a:ext cx="2379268" cy="347472"/>
+          </a:xfrm>
+          <a:prstGeom prst="rect">
+            <a:avLst/>
+          </a:prstGeom>
+          <a:solidFill>
+            <a:srgbClr val="8B0D18"/>
+          </a:solidFill>
+          <a:ln w="10160">
+            <a:solidFill>
+              <a:srgbClr val="BEBEBE"/>
+            </a:solidFill>
+          </a:ln>
+        </p:spPr>
+        <p:style>
+          <a:lnRef idx="1">
+            <a:schemeClr val="accent1"/>
+          </a:lnRef>
+          <a:fillRef idx="3">
+            <a:schemeClr val="accent1"/>
+          </a:fillRef>
+          <a:effectRef idx="2">
+            <a:schemeClr val="accent1"/>
+          </a:effectRef>
+          <a:fontRef idx="minor">
+            <a:schemeClr val="lt1"/>
+          </a:fontRef>
+        </p:style>
+        <p:txBody>
+          <a:bodyPr rtlCol="0" anchor="ctr"/>
+          <a:lstStyle/>
+          <a:p>
+            <a:pPr algn="ctr"/>
+          </a:p>
+        </p:txBody>
+      </p:sp>
+      <p:sp>
+        <p:nvSpPr>
+          <p:cNvPr id="9" name="AGENT_NAV_LABEL_3"/>
+          <p:cNvSpPr txBox="1"/>
+          <p:nvPr/>
+        </p:nvSpPr>
+        <p:spPr>
+          <a:xfrm>
+            <a:off x="7284110" y="59436"/>
+            <a:ext cx="2379268" cy="228600"/>
+          </a:xfrm>
+          <a:prstGeom prst="rect">
+            <a:avLst/>
+          </a:prstGeom>
+          <a:noFill/>
+        </p:spPr>
+        <p:txBody>
+          <a:bodyPr wrap="none" lIns="0" rIns="0" tIns="0" bIns="0" anchor="ctr">
+            <a:spAutoFit/>
+          </a:bodyPr>
+          <a:lstStyle/>
+          <a:p>
+            <a:pPr algn="ctr"/>
+            <a:r>
+              <a:rPr sz="1200" b="1" ea="Microsoft YaHei">
+                <a:solidFill>
+                  <a:srgbClr val="FFFFFF"/>
+                </a:solidFill>
+                <a:latin typeface="Microsoft YaHei"/>
+              </a:rPr>
+              <a:t>试验设计</a:t>
+            </a:r>
+          </a:p>
+        </p:txBody>
+      </p:sp>
+      <p:sp>
+        <p:nvSpPr>
+          <p:cNvPr id="10" name="AGENT_NAV_SLOT_4"/>
+          <p:cNvSpPr/>
+          <p:nvPr/>
+        </p:nvSpPr>
+        <p:spPr>
+          <a:xfrm>
+            <a:off x="9663379" y="27432"/>
+            <a:ext cx="2379268" cy="347472"/>
+          </a:xfrm>
+          <a:prstGeom prst="rect">
+            <a:avLst/>
+          </a:prstGeom>
+          <a:solidFill>
+            <a:srgbClr val="FFFFFF"/>
+          </a:solidFill>
+          <a:ln w="10160">
+            <a:solidFill>
+              <a:srgbClr val="BEBEBE"/>
+            </a:solidFill>
+          </a:ln>
+        </p:spPr>
+        <p:style>
+          <a:lnRef idx="1">
+            <a:schemeClr val="accent1"/>
+          </a:lnRef>
+          <a:fillRef idx="3">
+            <a:schemeClr val="accent1"/>
+          </a:fillRef>
+          <a:effectRef idx="2">
+            <a:schemeClr val="accent1"/>
+          </a:effectRef>
+          <a:fontRef idx="minor">
+            <a:schemeClr val="lt1"/>
+          </a:fontRef>
+        </p:style>
+        <p:txBody>
+          <a:bodyPr rtlCol="0" anchor="ctr"/>
+          <a:lstStyle/>
+          <a:p>
+            <a:pPr algn="ctr"/>
+          </a:p>
+        </p:txBody>
+      </p:sp>
+      <p:sp>
+        <p:nvSpPr>
+          <p:cNvPr id="11" name="AGENT_NAV_LABEL_4"/>
+          <p:cNvSpPr txBox="1"/>
+          <p:nvPr/>
+        </p:nvSpPr>
+        <p:spPr>
+          <a:xfrm>
+            <a:off x="9663379" y="59436"/>
+            <a:ext cx="2379268" cy="228600"/>
+          </a:xfrm>
+          <a:prstGeom prst="rect">
+            <a:avLst/>
+          </a:prstGeom>
+          <a:noFill/>
+        </p:spPr>
+        <p:txBody>
+          <a:bodyPr wrap="none" lIns="0" rIns="0" tIns="0" bIns="0" anchor="ctr">
+            <a:spAutoFit/>
+          </a:bodyPr>
+          <a:lstStyle/>
+          <a:p>
+            <a:pPr algn="ctr"/>
+            <a:r>
+              <a:rPr sz="1200" b="0" ea="Microsoft YaHei">
+                <a:solidFill>
+                  <a:srgbClr val="1E1E1E"/>
+                </a:solidFill>
+                <a:latin typeface="Microsoft YaHei"/>
+              </a:rPr>
+              <a:t>进度与计划</a:t>
+            </a:r>
+          </a:p>
+        </p:txBody>
+      </p:sp>
+      <p:sp>
+        <p:nvSpPr>
+          <p:cNvPr id="12" name="AGENT_FOOTER"/>
+          <p:cNvSpPr txBox="1"/>
+          <p:nvPr/>
+        </p:nvSpPr>
+        <p:spPr>
+          <a:xfrm>
+            <a:off x="320040" y="6510528"/>
+            <a:ext cx="8595360" cy="128016"/>
+          </a:xfrm>
+          <a:prstGeom prst="rect">
+            <a:avLst/>
+          </a:prstGeom>
+          <a:noFill/>
+        </p:spPr>
+        <p:txBody>
+          <a:bodyPr wrap="none" lIns="0" rIns="0" tIns="0" bIns="0" anchor="ctr">
+            <a:spAutoFit/>
+          </a:bodyPr>
+          <a:lstStyle/>
+          <a:p>
+            <a:pPr algn="l"/>
+            <a:r>
+              <a:rPr sz="800" b="0" ea="Microsoft YaHei">
+                <a:solidFill>
+                  <a:srgbClr val="696969"/>
+                </a:solidFill>
+                <a:latin typeface="Microsoft YaHei"/>
+              </a:rPr>
+              <a:t>纯视觉芍药行间除草机器人 · 组会进展汇报 · 2026-09-07</a:t>
+            </a:r>
+          </a:p>
+        </p:txBody>
+      </p:sp>
+      <p:sp>
+        <p:nvSpPr>
+          <p:cNvPr id="13" name="AGENT_PAGE_NUMBER"/>
+          <p:cNvSpPr txBox="1"/>
+          <p:nvPr/>
+        </p:nvSpPr>
+        <p:spPr>
+          <a:xfrm>
+            <a:off x="11521440" y="6501384"/>
+            <a:ext cx="256032" cy="128016"/>
+          </a:xfrm>
+          <a:prstGeom prst="rect">
+            <a:avLst/>
+          </a:prstGeom>
+          <a:noFill/>
+        </p:spPr>
+        <p:txBody>
+          <a:bodyPr wrap="none" lIns="0" rIns="0" tIns="0" bIns="0" anchor="ctr">
+            <a:spAutoFit/>
+          </a:bodyPr>
+          <a:lstStyle/>
+          <a:p>
+            <a:pPr algn="r"/>
+            <a:r>
+              <a:rPr sz="800" b="0" ea="Microsoft YaHei">
+                <a:solidFill>
+                  <a:srgbClr val="696969"/>
+                </a:solidFill>
+                <a:latin typeface="Microsoft YaHei"/>
+              </a:rPr>
+              <a:t>14</a:t>
+            </a:r>
+          </a:p>
+        </p:txBody>
+      </p:sp>
+      <p:sp>
+        <p:nvSpPr>
+          <p:cNvPr id="14" name="AGENT_TITLE"/>
+          <p:cNvSpPr txBox="1"/>
+          <p:nvPr/>
+        </p:nvSpPr>
+        <p:spPr>
+          <a:xfrm>
+            <a:off x="320040" y="539496"/>
+            <a:ext cx="11292840" cy="493776"/>
+          </a:xfrm>
+          <a:prstGeom prst="rect">
+            <a:avLst/>
+          </a:prstGeom>
+          <a:noFill/>
+        </p:spPr>
+        <p:txBody>
+          <a:bodyPr wrap="square" lIns="0" rIns="0" tIns="0" bIns="0" anchor="ctr">
+            <a:spAutoFit/>
+          </a:bodyPr>
+          <a:lstStyle/>
+          <a:p>
+            <a:pPr algn="l"/>
+            <a:r>
+              <a:rPr sz="3000" b="0" ea="Microsoft YaHei">
+                <a:solidFill>
+                  <a:srgbClr val="8B0D18"/>
+                </a:solidFill>
+                <a:latin typeface="Microsoft YaHei"/>
+              </a:rPr>
+              <a:t>三组对比试验覆盖方法、机构与工程三层</a:t>
+            </a:r>
+          </a:p>
+        </p:txBody>
+      </p:sp>
+      <p:sp>
+        <p:nvSpPr>
+          <p:cNvPr id="15" name="AGENT_COLUMN_HEAD_0"/>
+          <p:cNvSpPr txBox="1"/>
+          <p:nvPr/>
+        </p:nvSpPr>
+        <p:spPr>
+          <a:xfrm>
+            <a:off x="868680" y="1508760"/>
+            <a:ext cx="4709160" cy="320040"/>
+          </a:xfrm>
+          <a:prstGeom prst="rect">
+            <a:avLst/>
+          </a:prstGeom>
+          <a:noFill/>
+        </p:spPr>
+        <p:txBody>
+          <a:bodyPr wrap="square" lIns="0" rIns="0" tIns="0" bIns="0" anchor="ctr">
+            <a:spAutoFit/>
+          </a:bodyPr>
+          <a:lstStyle/>
+          <a:p>
+            <a:pPr algn="l"/>
+            <a:r>
+              <a:rPr sz="2100" b="1" ea="Microsoft YaHei">
+                <a:solidFill>
+                  <a:srgbClr val="8B0D18"/>
+                </a:solidFill>
+                <a:latin typeface="Microsoft YaHei"/>
+              </a:rPr>
+              <a:t>三组对比试验</a:t>
+            </a:r>
+          </a:p>
+        </p:txBody>
+      </p:sp>
+      <p:sp>
+        <p:nvSpPr>
+          <p:cNvPr id="16" name="AGENT_BODY"/>
+          <p:cNvSpPr txBox="1"/>
+          <p:nvPr/>
+        </p:nvSpPr>
+        <p:spPr>
+          <a:xfrm>
+            <a:off x="868680" y="1965960"/>
+            <a:ext cx="4709160" cy="3383280"/>
+          </a:xfrm>
+          <a:prstGeom prst="rect">
+            <a:avLst/>
+          </a:prstGeom>
+          <a:noFill/>
+        </p:spPr>
+        <p:txBody>
+          <a:bodyPr wrap="square" lIns="0" rIns="0" tIns="0" bIns="0" anchor="ctr">
+            <a:spAutoFit/>
+          </a:bodyPr>
+          <a:lstStyle/>
+          <a:p>
+            <a:pPr algn="l"/>
+            <a:r>
+              <a:rPr sz="1800" b="0" ea="Microsoft YaHei">
+                <a:solidFill>
+                  <a:srgbClr val="1E1E1E"/>
+                </a:solidFill>
+                <a:latin typeface="Microsoft YaHei"/>
+              </a:rPr>
+              <a:t>1. 方法层：主动对行 vs 固定刀（各 5 趟）
+2. 机构层：鸭掌铲 vs 弹齿（各 3 趟）
+3. 工程层：时延补偿开 vs 关（RMS 偏差）</a:t>
+            </a:r>
+          </a:p>
+        </p:txBody>
+      </p:sp>
+      <p:sp>
+        <p:nvSpPr>
+          <p:cNvPr id="17" name="AGENT_COLUMN_HEAD_1"/>
+          <p:cNvSpPr txBox="1"/>
+          <p:nvPr/>
+        </p:nvSpPr>
+        <p:spPr>
+          <a:xfrm>
+            <a:off x="6217920" y="1508760"/>
+            <a:ext cx="4709160" cy="320040"/>
+          </a:xfrm>
+          <a:prstGeom prst="rect">
+            <a:avLst/>
+          </a:prstGeom>
+          <a:noFill/>
+        </p:spPr>
+        <p:txBody>
+          <a:bodyPr wrap="square" lIns="0" rIns="0" tIns="0" bIns="0" anchor="ctr">
+            <a:spAutoFit/>
+          </a:bodyPr>
+          <a:lstStyle/>
+          <a:p>
+            <a:pPr algn="l"/>
+            <a:r>
+              <a:rPr sz="2100" b="1" ea="Microsoft YaHei">
+                <a:solidFill>
+                  <a:srgbClr val="8B0D18"/>
+                </a:solidFill>
+                <a:latin typeface="Microsoft YaHei"/>
+              </a:rPr>
+              <a:t>统一工况与统计</a:t>
+            </a:r>
+          </a:p>
+        </p:txBody>
+      </p:sp>
+      <p:sp>
+        <p:nvSpPr>
+          <p:cNvPr id="18" name="AGENT_BODY"/>
+          <p:cNvSpPr txBox="1"/>
+          <p:nvPr/>
+        </p:nvSpPr>
+        <p:spPr>
+          <a:xfrm>
+            <a:off x="6217920" y="1965960"/>
+            <a:ext cx="4709160" cy="3383280"/>
+          </a:xfrm>
+          <a:prstGeom prst="rect">
+            <a:avLst/>
+          </a:prstGeom>
+          <a:noFill/>
+        </p:spPr>
+        <p:txBody>
+          <a:bodyPr wrap="square" lIns="0" rIns="0" tIns="0" bIns="0" anchor="ctr">
+            <a:spAutoFit/>
+          </a:bodyPr>
+          <a:lstStyle/>
+          <a:p>
+            <a:pPr algn="l"/>
+            <a:r>
+              <a:rPr sz="1800" b="0" ea="Microsoft YaHei">
+                <a:solidFill>
+                  <a:srgbClr val="1E1E1E"/>
+                </a:solidFill>
+                <a:latin typeface="Microsoft YaHei"/>
+              </a:rPr>
+              <a:t>1. 0.5km/h、耕深 3cm、20m 试验段
+2. 样方前后拍照，数据全部入 CSV
+3. 均值±标准差 + 单因素方差分析
+4. 结论边界：坡度≤15° 壤土芍药田</a:t>
+            </a:r>
+          </a:p>
+        </p:txBody>
+      </p:sp>
+    </p:spTree>
+  </p:cSld>
+  <p:clrMapOvr>
+    <a:masterClrMapping/>
+  </p:clrMapOvr>
+</p:sld>
+</file>
+
+<file path=ppt/slides/slide15.xml><?xml version="1.0" encoding="utf-8"?>
+<p:sld xmlns:a="http://schemas.openxmlformats.org/drawingml/2006/main" xmlns:p="http://schemas.openxmlformats.org/presentationml/2006/main" xmlns:r="http://schemas.openxmlformats.org/officeDocument/2006/relationships">
+  <p:cSld>
+    <p:spTree>
+      <p:nvGrpSpPr>
+        <p:cNvPr id="1" name=""/>
+        <p:cNvGrpSpPr/>
+        <p:nvPr/>
+      </p:nvGrpSpPr>
+      <p:grpSpPr/>
+      <p:sp>
+        <p:nvSpPr>
+          <p:cNvPr id="2" name="AGENT_NAV_SLOT_0"/>
+          <p:cNvSpPr/>
+          <p:nvPr/>
+        </p:nvSpPr>
+        <p:spPr>
+          <a:xfrm>
+            <a:off x="146304" y="27432"/>
+            <a:ext cx="2379268" cy="347472"/>
+          </a:xfrm>
+          <a:prstGeom prst="rect">
+            <a:avLst/>
+          </a:prstGeom>
+          <a:solidFill>
+            <a:srgbClr val="FFFFFF"/>
+          </a:solidFill>
+          <a:ln w="10160">
+            <a:solidFill>
+              <a:srgbClr val="BEBEBE"/>
+            </a:solidFill>
+          </a:ln>
+        </p:spPr>
+        <p:style>
+          <a:lnRef idx="1">
+            <a:schemeClr val="accent1"/>
+          </a:lnRef>
+          <a:fillRef idx="3">
+            <a:schemeClr val="accent1"/>
+          </a:fillRef>
+          <a:effectRef idx="2">
+            <a:schemeClr val="accent1"/>
+          </a:effectRef>
+          <a:fontRef idx="minor">
+            <a:schemeClr val="lt1"/>
+          </a:fontRef>
+        </p:style>
+        <p:txBody>
+          <a:bodyPr rtlCol="0" anchor="ctr"/>
+          <a:lstStyle/>
+          <a:p>
+            <a:pPr algn="ctr"/>
+          </a:p>
+        </p:txBody>
+      </p:sp>
+      <p:sp>
+        <p:nvSpPr>
+          <p:cNvPr id="3" name="AGENT_NAV_LABEL_0"/>
+          <p:cNvSpPr txBox="1"/>
+          <p:nvPr/>
+        </p:nvSpPr>
+        <p:spPr>
+          <a:xfrm>
+            <a:off x="146304" y="59436"/>
+            <a:ext cx="2379268" cy="228600"/>
+          </a:xfrm>
+          <a:prstGeom prst="rect">
+            <a:avLst/>
+          </a:prstGeom>
+          <a:noFill/>
+        </p:spPr>
+        <p:txBody>
+          <a:bodyPr wrap="none" lIns="0" rIns="0" tIns="0" bIns="0" anchor="ctr">
+            <a:spAutoFit/>
+          </a:bodyPr>
+          <a:lstStyle/>
+          <a:p>
+            <a:pPr algn="ctr"/>
+            <a:r>
+              <a:rPr sz="1200" b="0" ea="Microsoft YaHei">
+                <a:solidFill>
+                  <a:srgbClr val="1E1E1E"/>
+                </a:solidFill>
+                <a:latin typeface="Microsoft YaHei"/>
+              </a:rPr>
+              <a:t>研究背景</a:t>
+            </a:r>
+          </a:p>
+        </p:txBody>
+      </p:sp>
+      <p:sp>
+        <p:nvSpPr>
+          <p:cNvPr id="4" name="AGENT_NAV_SLOT_1"/>
+          <p:cNvSpPr/>
+          <p:nvPr/>
+        </p:nvSpPr>
+        <p:spPr>
+          <a:xfrm>
+            <a:off x="2525572" y="27432"/>
+            <a:ext cx="2379268" cy="347472"/>
+          </a:xfrm>
+          <a:prstGeom prst="rect">
+            <a:avLst/>
+          </a:prstGeom>
+          <a:solidFill>
+            <a:srgbClr val="FFFFFF"/>
+          </a:solidFill>
+          <a:ln w="10160">
+            <a:solidFill>
+              <a:srgbClr val="BEBEBE"/>
+            </a:solidFill>
+          </a:ln>
+        </p:spPr>
+        <p:style>
+          <a:lnRef idx="1">
+            <a:schemeClr val="accent1"/>
+          </a:lnRef>
+          <a:fillRef idx="3">
+            <a:schemeClr val="accent1"/>
+          </a:fillRef>
+          <a:effectRef idx="2">
+            <a:schemeClr val="accent1"/>
+          </a:effectRef>
+          <a:fontRef idx="minor">
+            <a:schemeClr val="lt1"/>
+          </a:fontRef>
+        </p:style>
+        <p:txBody>
+          <a:bodyPr rtlCol="0" anchor="ctr"/>
+          <a:lstStyle/>
+          <a:p>
+            <a:pPr algn="ctr"/>
+          </a:p>
+        </p:txBody>
+      </p:sp>
+      <p:sp>
+        <p:nvSpPr>
+          <p:cNvPr id="5" name="AGENT_NAV_LABEL_1"/>
+          <p:cNvSpPr txBox="1"/>
+          <p:nvPr/>
+        </p:nvSpPr>
+        <p:spPr>
+          <a:xfrm>
+            <a:off x="2525572" y="59436"/>
+            <a:ext cx="2379268" cy="228600"/>
+          </a:xfrm>
+          <a:prstGeom prst="rect">
+            <a:avLst/>
+          </a:prstGeom>
+          <a:noFill/>
+        </p:spPr>
+        <p:txBody>
+          <a:bodyPr wrap="none" lIns="0" rIns="0" tIns="0" bIns="0" anchor="ctr">
+            <a:spAutoFit/>
+          </a:bodyPr>
+          <a:lstStyle/>
+          <a:p>
+            <a:pPr algn="ctr"/>
+            <a:r>
+              <a:rPr sz="1200" b="0" ea="Microsoft YaHei">
+                <a:solidFill>
+                  <a:srgbClr val="1E1E1E"/>
+                </a:solidFill>
+                <a:latin typeface="Microsoft YaHei"/>
+              </a:rPr>
+              <a:t>总体方案</a:t>
+            </a:r>
+          </a:p>
+        </p:txBody>
+      </p:sp>
+      <p:sp>
+        <p:nvSpPr>
+          <p:cNvPr id="6" name="AGENT_NAV_SLOT_2"/>
+          <p:cNvSpPr/>
+          <p:nvPr/>
+        </p:nvSpPr>
+        <p:spPr>
+          <a:xfrm>
+            <a:off x="4904841" y="27432"/>
+            <a:ext cx="2379268" cy="347472"/>
+          </a:xfrm>
+          <a:prstGeom prst="rect">
+            <a:avLst/>
+          </a:prstGeom>
+          <a:solidFill>
+            <a:srgbClr val="FFFFFF"/>
+          </a:solidFill>
+          <a:ln w="10160">
+            <a:solidFill>
+              <a:srgbClr val="BEBEBE"/>
+            </a:solidFill>
+          </a:ln>
+        </p:spPr>
+        <p:style>
+          <a:lnRef idx="1">
+            <a:schemeClr val="accent1"/>
+          </a:lnRef>
+          <a:fillRef idx="3">
+            <a:schemeClr val="accent1"/>
+          </a:fillRef>
+          <a:effectRef idx="2">
+            <a:schemeClr val="accent1"/>
+          </a:effectRef>
+          <a:fontRef idx="minor">
+            <a:schemeClr val="lt1"/>
+          </a:fontRef>
+        </p:style>
+        <p:txBody>
+          <a:bodyPr rtlCol="0" anchor="ctr"/>
+          <a:lstStyle/>
+          <a:p>
+            <a:pPr algn="ctr"/>
+          </a:p>
+        </p:txBody>
+      </p:sp>
+      <p:sp>
+        <p:nvSpPr>
+          <p:cNvPr id="7" name="AGENT_NAV_LABEL_2"/>
+          <p:cNvSpPr txBox="1"/>
+          <p:nvPr/>
+        </p:nvSpPr>
+        <p:spPr>
+          <a:xfrm>
+            <a:off x="4904841" y="59436"/>
+            <a:ext cx="2379268" cy="228600"/>
+          </a:xfrm>
+          <a:prstGeom prst="rect">
+            <a:avLst/>
+          </a:prstGeom>
+          <a:noFill/>
+        </p:spPr>
+        <p:txBody>
+          <a:bodyPr wrap="none" lIns="0" rIns="0" tIns="0" bIns="0" anchor="ctr">
+            <a:spAutoFit/>
+          </a:bodyPr>
+          <a:lstStyle/>
+          <a:p>
+            <a:pPr algn="ctr"/>
+            <a:r>
+              <a:rPr sz="1200" b="0" ea="Microsoft YaHei">
+                <a:solidFill>
+                  <a:srgbClr val="1E1E1E"/>
+                </a:solidFill>
+                <a:latin typeface="Microsoft YaHei"/>
+              </a:rPr>
+              <a:t>理论方法</a:t>
+            </a:r>
+          </a:p>
+        </p:txBody>
+      </p:sp>
+      <p:sp>
+        <p:nvSpPr>
+          <p:cNvPr id="8" name="AGENT_NAV_SLOT_3"/>
+          <p:cNvSpPr/>
+          <p:nvPr/>
+        </p:nvSpPr>
+        <p:spPr>
+          <a:xfrm>
+            <a:off x="7284110" y="27432"/>
+            <a:ext cx="2379268" cy="347472"/>
+          </a:xfrm>
+          <a:prstGeom prst="rect">
+            <a:avLst/>
+          </a:prstGeom>
+          <a:solidFill>
+            <a:srgbClr val="FFFFFF"/>
+          </a:solidFill>
+          <a:ln w="10160">
+            <a:solidFill>
+              <a:srgbClr val="BEBEBE"/>
+            </a:solidFill>
+          </a:ln>
+        </p:spPr>
+        <p:style>
+          <a:lnRef idx="1">
+            <a:schemeClr val="accent1"/>
+          </a:lnRef>
+          <a:fillRef idx="3">
+            <a:schemeClr val="accent1"/>
+          </a:fillRef>
+          <a:effectRef idx="2">
+            <a:schemeClr val="accent1"/>
+          </a:effectRef>
+          <a:fontRef idx="minor">
+            <a:schemeClr val="lt1"/>
+          </a:fontRef>
+        </p:style>
+        <p:txBody>
+          <a:bodyPr rtlCol="0" anchor="ctr"/>
+          <a:lstStyle/>
+          <a:p>
+            <a:pPr algn="ctr"/>
+          </a:p>
+        </p:txBody>
+      </p:sp>
+      <p:sp>
+        <p:nvSpPr>
+          <p:cNvPr id="9" name="AGENT_NAV_LABEL_3"/>
+          <p:cNvSpPr txBox="1"/>
+          <p:nvPr/>
+        </p:nvSpPr>
+        <p:spPr>
+          <a:xfrm>
+            <a:off x="7284110" y="59436"/>
+            <a:ext cx="2379268" cy="228600"/>
+          </a:xfrm>
+          <a:prstGeom prst="rect">
+            <a:avLst/>
+          </a:prstGeom>
+          <a:noFill/>
+        </p:spPr>
+        <p:txBody>
+          <a:bodyPr wrap="none" lIns="0" rIns="0" tIns="0" bIns="0" anchor="ctr">
+            <a:spAutoFit/>
+          </a:bodyPr>
+          <a:lstStyle/>
+          <a:p>
+            <a:pPr algn="ctr"/>
+            <a:r>
+              <a:rPr sz="1200" b="0" ea="Microsoft YaHei">
+                <a:solidFill>
+                  <a:srgbClr val="1E1E1E"/>
+                </a:solidFill>
+                <a:latin typeface="Microsoft YaHei"/>
+              </a:rPr>
+              <a:t>试验设计</a:t>
+            </a:r>
+          </a:p>
+        </p:txBody>
+      </p:sp>
+      <p:sp>
+        <p:nvSpPr>
+          <p:cNvPr id="10" name="AGENT_NAV_SLOT_4"/>
+          <p:cNvSpPr/>
+          <p:nvPr/>
+        </p:nvSpPr>
+        <p:spPr>
+          <a:xfrm>
+            <a:off x="9663379" y="27432"/>
+            <a:ext cx="2379268" cy="347472"/>
+          </a:xfrm>
+          <a:prstGeom prst="rect">
+            <a:avLst/>
+          </a:prstGeom>
+          <a:solidFill>
+            <a:srgbClr val="8B0D18"/>
+          </a:solidFill>
+          <a:ln w="10160">
+            <a:solidFill>
+              <a:srgbClr val="BEBEBE"/>
+            </a:solidFill>
+          </a:ln>
+        </p:spPr>
+        <p:style>
+          <a:lnRef idx="1">
+            <a:schemeClr val="accent1"/>
+          </a:lnRef>
+          <a:fillRef idx="3">
+            <a:schemeClr val="accent1"/>
+          </a:fillRef>
+          <a:effectRef idx="2">
+            <a:schemeClr val="accent1"/>
+          </a:effectRef>
+          <a:fontRef idx="minor">
+            <a:schemeClr val="lt1"/>
+          </a:fontRef>
+        </p:style>
+        <p:txBody>
+          <a:bodyPr rtlCol="0" anchor="ctr"/>
+          <a:lstStyle/>
+          <a:p>
+            <a:pPr algn="ctr"/>
+          </a:p>
+        </p:txBody>
+      </p:sp>
+      <p:sp>
+        <p:nvSpPr>
+          <p:cNvPr id="11" name="AGENT_NAV_LABEL_4"/>
+          <p:cNvSpPr txBox="1"/>
+          <p:nvPr/>
+        </p:nvSpPr>
+        <p:spPr>
+          <a:xfrm>
+            <a:off x="9663379" y="59436"/>
+            <a:ext cx="2379268" cy="228600"/>
+          </a:xfrm>
+          <a:prstGeom prst="rect">
+            <a:avLst/>
+          </a:prstGeom>
+          <a:noFill/>
+        </p:spPr>
+        <p:txBody>
+          <a:bodyPr wrap="none" lIns="0" rIns="0" tIns="0" bIns="0" anchor="ctr">
+            <a:spAutoFit/>
+          </a:bodyPr>
+          <a:lstStyle/>
+          <a:p>
+            <a:pPr algn="ctr"/>
+            <a:r>
+              <a:rPr sz="1200" b="1" ea="Microsoft YaHei">
+                <a:solidFill>
+                  <a:srgbClr val="FFFFFF"/>
+                </a:solidFill>
+                <a:latin typeface="Microsoft YaHei"/>
+              </a:rPr>
+              <a:t>进度与计划</a:t>
+            </a:r>
+          </a:p>
+        </p:txBody>
+      </p:sp>
+      <p:sp>
+        <p:nvSpPr>
+          <p:cNvPr id="12" name="AGENT_FOOTER"/>
+          <p:cNvSpPr txBox="1"/>
+          <p:nvPr/>
+        </p:nvSpPr>
+        <p:spPr>
+          <a:xfrm>
+            <a:off x="320040" y="6510528"/>
+            <a:ext cx="8595360" cy="128016"/>
+          </a:xfrm>
+          <a:prstGeom prst="rect">
+            <a:avLst/>
+          </a:prstGeom>
+          <a:noFill/>
+        </p:spPr>
+        <p:txBody>
+          <a:bodyPr wrap="none" lIns="0" rIns="0" tIns="0" bIns="0" anchor="ctr">
+            <a:spAutoFit/>
+          </a:bodyPr>
+          <a:lstStyle/>
+          <a:p>
+            <a:pPr algn="l"/>
+            <a:r>
+              <a:rPr sz="800" b="0" ea="Microsoft YaHei">
+                <a:solidFill>
+                  <a:srgbClr val="696969"/>
+                </a:solidFill>
+                <a:latin typeface="Microsoft YaHei"/>
+              </a:rPr>
+              <a:t>纯视觉芍药行间除草机器人 · 组会进展汇报 · 2026-09-07</a:t>
+            </a:r>
+          </a:p>
+        </p:txBody>
+      </p:sp>
+      <p:sp>
+        <p:nvSpPr>
+          <p:cNvPr id="13" name="AGENT_PAGE_NUMBER"/>
+          <p:cNvSpPr txBox="1"/>
+          <p:nvPr/>
+        </p:nvSpPr>
+        <p:spPr>
+          <a:xfrm>
+            <a:off x="11521440" y="6501384"/>
+            <a:ext cx="256032" cy="128016"/>
+          </a:xfrm>
+          <a:prstGeom prst="rect">
+            <a:avLst/>
+          </a:prstGeom>
+          <a:noFill/>
+        </p:spPr>
+        <p:txBody>
+          <a:bodyPr wrap="none" lIns="0" rIns="0" tIns="0" bIns="0" anchor="ctr">
+            <a:spAutoFit/>
+          </a:bodyPr>
+          <a:lstStyle/>
+          <a:p>
+            <a:pPr algn="r"/>
+            <a:r>
+              <a:rPr sz="800" b="0" ea="Microsoft YaHei">
+                <a:solidFill>
+                  <a:srgbClr val="696969"/>
+                </a:solidFill>
+                <a:latin typeface="Microsoft YaHei"/>
+              </a:rPr>
+              <a:t>15</a:t>
+            </a:r>
+          </a:p>
+        </p:txBody>
+      </p:sp>
+      <p:sp>
+        <p:nvSpPr>
+          <p:cNvPr id="14" name="AGENT_TITLE"/>
+          <p:cNvSpPr txBox="1"/>
+          <p:nvPr/>
+        </p:nvSpPr>
+        <p:spPr>
+          <a:xfrm>
+            <a:off x="320040" y="539496"/>
+            <a:ext cx="11292840" cy="493776"/>
+          </a:xfrm>
+          <a:prstGeom prst="rect">
+            <a:avLst/>
+          </a:prstGeom>
+          <a:noFill/>
+        </p:spPr>
+        <p:txBody>
+          <a:bodyPr wrap="square" lIns="0" rIns="0" tIns="0" bIns="0" anchor="ctr">
+            <a:spAutoFit/>
+          </a:bodyPr>
+          <a:lstStyle/>
+          <a:p>
+            <a:pPr algn="l"/>
+            <a:r>
+              <a:rPr sz="3000" b="0" ea="Microsoft YaHei">
+                <a:solidFill>
+                  <a:srgbClr val="8B0D18"/>
+                </a:solidFill>
+                <a:latin typeface="Microsoft YaHei"/>
+              </a:rPr>
+              <a:t>代码与固件侧交付已全部完成</a:t>
+            </a:r>
+          </a:p>
+        </p:txBody>
+      </p:sp>
+      <p:sp>
+        <p:nvSpPr>
+          <p:cNvPr id="15" name="AGENT_SUMMARY_LINE_0"/>
+          <p:cNvSpPr/>
+          <p:nvPr/>
+        </p:nvSpPr>
+        <p:spPr>
+          <a:xfrm>
+            <a:off x="868680" y="1417320"/>
+            <a:ext cx="10378440" cy="10972"/>
+          </a:xfrm>
+          <a:prstGeom prst="rect">
+            <a:avLst/>
+          </a:prstGeom>
+          <a:solidFill>
+            <a:srgbClr val="8B0D18"/>
+          </a:solidFill>
+          <a:ln>
+            <a:noFill/>
+          </a:ln>
+        </p:spPr>
+        <p:style>
+          <a:lnRef idx="1">
+            <a:schemeClr val="accent1"/>
+          </a:lnRef>
+          <a:fillRef idx="3">
+            <a:schemeClr val="accent1"/>
+          </a:fillRef>
+          <a:effectRef idx="2">
+            <a:schemeClr val="accent1"/>
+          </a:effectRef>
+          <a:fontRef idx="minor">
+            <a:schemeClr val="lt1"/>
+          </a:fontRef>
+        </p:style>
+        <p:txBody>
+          <a:bodyPr rtlCol="0" anchor="ctr"/>
+          <a:lstStyle/>
+          <a:p>
+            <a:pPr algn="ctr"/>
+          </a:p>
+        </p:txBody>
+      </p:sp>
+      <p:sp>
+        <p:nvSpPr>
+          <p:cNvPr id="16" name="AGENT_SUMMARY_LABEL_0"/>
+          <p:cNvSpPr txBox="1"/>
+          <p:nvPr/>
+        </p:nvSpPr>
+        <p:spPr>
+          <a:xfrm>
+            <a:off x="960120" y="1527048"/>
+            <a:ext cx="1828800" cy="898398"/>
+          </a:xfrm>
+          <a:prstGeom prst="rect">
+            <a:avLst/>
+          </a:prstGeom>
+          <a:noFill/>
+        </p:spPr>
+        <p:txBody>
+          <a:bodyPr wrap="square" lIns="0" rIns="0" tIns="0" bIns="0" anchor="ctr">
+            <a:spAutoFit/>
+          </a:bodyPr>
+          <a:lstStyle/>
+          <a:p>
+            <a:pPr algn="l"/>
+            <a:r>
+              <a:rPr sz="1900" b="1" ea="Microsoft YaHei">
+                <a:solidFill>
+                  <a:srgbClr val="8B0D18"/>
+                </a:solidFill>
+                <a:latin typeface="Microsoft YaHei"/>
+              </a:rPr>
+              <a:t>算法</a:t>
+            </a:r>
+          </a:p>
+        </p:txBody>
+      </p:sp>
+      <p:sp>
+        <p:nvSpPr>
+          <p:cNvPr id="17" name="AGENT_SUMMARY_VALUE_0"/>
+          <p:cNvSpPr txBox="1"/>
+          <p:nvPr/>
+        </p:nvSpPr>
+        <p:spPr>
+          <a:xfrm>
+            <a:off x="2926080" y="1527048"/>
+            <a:ext cx="7909560" cy="898398"/>
+          </a:xfrm>
+          <a:prstGeom prst="rect">
+            <a:avLst/>
+          </a:prstGeom>
+          <a:noFill/>
+        </p:spPr>
+        <p:txBody>
+          <a:bodyPr wrap="square" lIns="0" rIns="0" tIns="0" bIns="0" anchor="ctr">
+            <a:spAutoFit/>
+          </a:bodyPr>
+          <a:lstStyle/>
+          <a:p>
+            <a:pPr algn="l"/>
+            <a:r>
+              <a:rPr sz="1800" b="0" ea="Microsoft YaHei">
+                <a:solidFill>
+                  <a:srgbClr val="1E1E1E"/>
+                </a:solidFill>
+                <a:latin typeface="Microsoft YaHei"/>
+              </a:rPr>
+              <a:t>感知/控制/状态机/协议全链路，35 项测试通过</a:t>
+            </a:r>
+          </a:p>
+        </p:txBody>
+      </p:sp>
+      <p:sp>
+        <p:nvSpPr>
+          <p:cNvPr id="18" name="AGENT_SUMMARY_LINE_1"/>
+          <p:cNvSpPr/>
+          <p:nvPr/>
+        </p:nvSpPr>
+        <p:spPr>
+          <a:xfrm>
+            <a:off x="868680" y="2480310"/>
+            <a:ext cx="10378440" cy="10972"/>
+          </a:xfrm>
+          <a:prstGeom prst="rect">
+            <a:avLst/>
+          </a:prstGeom>
+          <a:solidFill>
+            <a:srgbClr val="8B0D18"/>
+          </a:solidFill>
+          <a:ln>
+            <a:noFill/>
+          </a:ln>
+        </p:spPr>
+        <p:style>
+          <a:lnRef idx="1">
+            <a:schemeClr val="accent1"/>
+          </a:lnRef>
+          <a:fillRef idx="3">
+            <a:schemeClr val="accent1"/>
+          </a:fillRef>
+          <a:effectRef idx="2">
+            <a:schemeClr val="accent1"/>
+          </a:effectRef>
+          <a:fontRef idx="minor">
+            <a:schemeClr val="lt1"/>
+          </a:fontRef>
+        </p:style>
+        <p:txBody>
+          <a:bodyPr rtlCol="0" anchor="ctr"/>
+          <a:lstStyle/>
+          <a:p>
+            <a:pPr algn="ctr"/>
+          </a:p>
+        </p:txBody>
+      </p:sp>
+      <p:sp>
+        <p:nvSpPr>
+          <p:cNvPr id="19" name="AGENT_SUMMARY_LABEL_1"/>
+          <p:cNvSpPr txBox="1"/>
+          <p:nvPr/>
+        </p:nvSpPr>
+        <p:spPr>
+          <a:xfrm>
+            <a:off x="960120" y="2590038"/>
+            <a:ext cx="1828800" cy="898398"/>
+          </a:xfrm>
+          <a:prstGeom prst="rect">
+            <a:avLst/>
+          </a:prstGeom>
+          <a:noFill/>
+        </p:spPr>
+        <p:txBody>
+          <a:bodyPr wrap="square" lIns="0" rIns="0" tIns="0" bIns="0" anchor="ctr">
+            <a:spAutoFit/>
+          </a:bodyPr>
+          <a:lstStyle/>
+          <a:p>
+            <a:pPr algn="l"/>
+            <a:r>
+              <a:rPr sz="1900" b="1" ea="Microsoft YaHei">
+                <a:solidFill>
+                  <a:srgbClr val="8B0D18"/>
+                </a:solidFill>
+                <a:latin typeface="Microsoft YaHei"/>
+              </a:rPr>
+              <a:t>固件</a:t>
+            </a:r>
+          </a:p>
+        </p:txBody>
+      </p:sp>
+      <p:sp>
+        <p:nvSpPr>
+          <p:cNvPr id="20" name="AGENT_SUMMARY_VALUE_1"/>
+          <p:cNvSpPr txBox="1"/>
+          <p:nvPr/>
+        </p:nvSpPr>
+        <p:spPr>
+          <a:xfrm>
+            <a:off x="2926080" y="2590038"/>
+            <a:ext cx="7909560" cy="898398"/>
+          </a:xfrm>
+          <a:prstGeom prst="rect">
+            <a:avLst/>
+          </a:prstGeom>
+          <a:noFill/>
+        </p:spPr>
+        <p:txBody>
+          <a:bodyPr wrap="square" lIns="0" rIns="0" tIns="0" bIns="0" anchor="ctr">
+            <a:spAutoFit/>
+          </a:bodyPr>
+          <a:lstStyle/>
+          <a:p>
+            <a:pPr algn="l"/>
+            <a:r>
+              <a:rPr sz="1800" b="0" ea="Microsoft YaHei">
+                <a:solidFill>
+                  <a:srgbClr val="1E1E1E"/>
+                </a:solidFill>
+                <a:latin typeface="Microsoft YaHei"/>
+              </a:rPr>
+              <a:t>双指令源+三级看门狗，Keil 编译 0 错误</a:t>
+            </a:r>
+          </a:p>
+        </p:txBody>
+      </p:sp>
+      <p:sp>
+        <p:nvSpPr>
+          <p:cNvPr id="21" name="AGENT_SUMMARY_LINE_2"/>
+          <p:cNvSpPr/>
+          <p:nvPr/>
+        </p:nvSpPr>
+        <p:spPr>
+          <a:xfrm>
+            <a:off x="868680" y="3543300"/>
+            <a:ext cx="10378440" cy="10972"/>
+          </a:xfrm>
+          <a:prstGeom prst="rect">
+            <a:avLst/>
+          </a:prstGeom>
+          <a:solidFill>
+            <a:srgbClr val="8B0D18"/>
+          </a:solidFill>
+          <a:ln>
+            <a:noFill/>
+          </a:ln>
+        </p:spPr>
+        <p:style>
+          <a:lnRef idx="1">
+            <a:schemeClr val="accent1"/>
+          </a:lnRef>
+          <a:fillRef idx="3">
+            <a:schemeClr val="accent1"/>
+          </a:fillRef>
+          <a:effectRef idx="2">
+            <a:schemeClr val="accent1"/>
+          </a:effectRef>
+          <a:fontRef idx="minor">
+            <a:schemeClr val="lt1"/>
+          </a:fontRef>
+        </p:style>
+        <p:txBody>
+          <a:bodyPr rtlCol="0" anchor="ctr"/>
+          <a:lstStyle/>
+          <a:p>
+            <a:pPr algn="ctr"/>
+          </a:p>
+        </p:txBody>
+      </p:sp>
+      <p:sp>
+        <p:nvSpPr>
+          <p:cNvPr id="22" name="AGENT_SUMMARY_LABEL_2"/>
+          <p:cNvSpPr txBox="1"/>
+          <p:nvPr/>
+        </p:nvSpPr>
+        <p:spPr>
+          <a:xfrm>
+            <a:off x="960120" y="3653028"/>
+            <a:ext cx="1828800" cy="898398"/>
+          </a:xfrm>
+          <a:prstGeom prst="rect">
+            <a:avLst/>
+          </a:prstGeom>
+          <a:noFill/>
+        </p:spPr>
+        <p:txBody>
+          <a:bodyPr wrap="square" lIns="0" rIns="0" tIns="0" bIns="0" anchor="ctr">
+            <a:spAutoFit/>
+          </a:bodyPr>
+          <a:lstStyle/>
+          <a:p>
+            <a:pPr algn="l"/>
+            <a:r>
+              <a:rPr sz="1900" b="1" ea="Microsoft YaHei">
+                <a:solidFill>
+                  <a:srgbClr val="8B0D18"/>
+                </a:solidFill>
+                <a:latin typeface="Microsoft YaHei"/>
+              </a:rPr>
+              <a:t>安全</a:t>
+            </a:r>
+          </a:p>
+        </p:txBody>
+      </p:sp>
+      <p:sp>
+        <p:nvSpPr>
+          <p:cNvPr id="23" name="AGENT_SUMMARY_VALUE_2"/>
+          <p:cNvSpPr txBox="1"/>
+          <p:nvPr/>
+        </p:nvSpPr>
+        <p:spPr>
+          <a:xfrm>
+            <a:off x="2926080" y="3653028"/>
+            <a:ext cx="7909560" cy="898398"/>
+          </a:xfrm>
+          <a:prstGeom prst="rect">
+            <a:avLst/>
+          </a:prstGeom>
+          <a:noFill/>
+        </p:spPr>
+        <p:txBody>
+          <a:bodyPr wrap="square" lIns="0" rIns="0" tIns="0" bIns="0" anchor="ctr">
+            <a:spAutoFit/>
+          </a:bodyPr>
+          <a:lstStyle/>
+          <a:p>
+            <a:pPr algn="l"/>
+            <a:r>
+              <a:rPr sz="1800" b="0" ea="Microsoft YaHei">
+                <a:solidFill>
+                  <a:srgbClr val="1E1E1E"/>
+                </a:solidFill>
+                <a:latin typeface="Microsoft YaHei"/>
+              </a:rPr>
+              <a:t>驱动门控接入真实路径，急停帧显式下发</a:t>
+            </a:r>
+          </a:p>
+        </p:txBody>
+      </p:sp>
+      <p:sp>
+        <p:nvSpPr>
+          <p:cNvPr id="24" name="AGENT_SUMMARY_LINE_3"/>
+          <p:cNvSpPr/>
+          <p:nvPr/>
+        </p:nvSpPr>
+        <p:spPr>
+          <a:xfrm>
+            <a:off x="868680" y="4606290"/>
+            <a:ext cx="10378440" cy="10972"/>
+          </a:xfrm>
+          <a:prstGeom prst="rect">
+            <a:avLst/>
+          </a:prstGeom>
+          <a:solidFill>
+            <a:srgbClr val="8B0D18"/>
+          </a:solidFill>
+          <a:ln>
+            <a:noFill/>
+          </a:ln>
+        </p:spPr>
+        <p:style>
+          <a:lnRef idx="1">
+            <a:schemeClr val="accent1"/>
+          </a:lnRef>
+          <a:fillRef idx="3">
+            <a:schemeClr val="accent1"/>
+          </a:fillRef>
+          <a:effectRef idx="2">
+            <a:schemeClr val="accent1"/>
+          </a:effectRef>
+          <a:fontRef idx="minor">
+            <a:schemeClr val="lt1"/>
+          </a:fontRef>
+        </p:style>
+        <p:txBody>
+          <a:bodyPr rtlCol="0" anchor="ctr"/>
+          <a:lstStyle/>
+          <a:p>
+            <a:pPr algn="ctr"/>
+          </a:p>
+        </p:txBody>
+      </p:sp>
+      <p:sp>
+        <p:nvSpPr>
+          <p:cNvPr id="25" name="AGENT_SUMMARY_LABEL_3"/>
+          <p:cNvSpPr txBox="1"/>
+          <p:nvPr/>
+        </p:nvSpPr>
+        <p:spPr>
+          <a:xfrm>
+            <a:off x="960120" y="4716018"/>
+            <a:ext cx="1828800" cy="898398"/>
+          </a:xfrm>
+          <a:prstGeom prst="rect">
+            <a:avLst/>
+          </a:prstGeom>
+          <a:noFill/>
+        </p:spPr>
+        <p:txBody>
+          <a:bodyPr wrap="square" lIns="0" rIns="0" tIns="0" bIns="0" anchor="ctr">
+            <a:spAutoFit/>
+          </a:bodyPr>
+          <a:lstStyle/>
+          <a:p>
+            <a:pPr algn="l"/>
+            <a:r>
+              <a:rPr sz="1900" b="1" ea="Microsoft YaHei">
+                <a:solidFill>
+                  <a:srgbClr val="8B0D18"/>
+                </a:solidFill>
+                <a:latin typeface="Microsoft YaHei"/>
+              </a:rPr>
+              <a:t>评审</a:t>
+            </a:r>
+          </a:p>
+        </p:txBody>
+      </p:sp>
+      <p:sp>
+        <p:nvSpPr>
+          <p:cNvPr id="26" name="AGENT_SUMMARY_VALUE_3"/>
+          <p:cNvSpPr txBox="1"/>
+          <p:nvPr/>
+        </p:nvSpPr>
+        <p:spPr>
+          <a:xfrm>
+            <a:off x="2926080" y="4716018"/>
+            <a:ext cx="7909560" cy="898398"/>
+          </a:xfrm>
+          <a:prstGeom prst="rect">
+            <a:avLst/>
+          </a:prstGeom>
+          <a:noFill/>
+        </p:spPr>
+        <p:txBody>
+          <a:bodyPr wrap="square" lIns="0" rIns="0" tIns="0" bIns="0" anchor="ctr">
+            <a:spAutoFit/>
+          </a:bodyPr>
+          <a:lstStyle/>
+          <a:p>
+            <a:pPr algn="l"/>
+            <a:r>
+              <a:rPr sz="1800" b="0" ea="Microsoft YaHei">
+                <a:solidFill>
+                  <a:srgbClr val="1E1E1E"/>
+                </a:solidFill>
+                <a:latin typeface="Microsoft YaHei"/>
+              </a:rPr>
+              <a:t>外部 12 条意见逐条采纳/驳回并留档</a:t>
+            </a:r>
+          </a:p>
+        </p:txBody>
+      </p:sp>
+    </p:spTree>
+  </p:cSld>
+  <p:clrMapOvr>
+    <a:masterClrMapping/>
+  </p:clrMapOvr>
+</p:sld>
+</file>
+
+<file path=ppt/slides/slide16.xml><?xml version="1.0" encoding="utf-8"?>
+<p:sld xmlns:a="http://schemas.openxmlformats.org/drawingml/2006/main" xmlns:p="http://schemas.openxmlformats.org/presentationml/2006/main" xmlns:r="http://schemas.openxmlformats.org/officeDocument/2006/relationships">
+  <p:cSld>
+    <p:spTree>
+      <p:nvGrpSpPr>
+        <p:cNvPr id="1" name=""/>
+        <p:cNvGrpSpPr/>
+        <p:nvPr/>
+      </p:nvGrpSpPr>
+      <p:grpSpPr/>
+      <p:sp>
+        <p:nvSpPr>
+          <p:cNvPr id="2" name="AGENT_NAV_SLOT_0"/>
+          <p:cNvSpPr/>
+          <p:nvPr/>
+        </p:nvSpPr>
+        <p:spPr>
+          <a:xfrm>
+            <a:off x="146304" y="27432"/>
+            <a:ext cx="2379268" cy="347472"/>
+          </a:xfrm>
+          <a:prstGeom prst="rect">
+            <a:avLst/>
+          </a:prstGeom>
+          <a:solidFill>
+            <a:srgbClr val="FFFFFF"/>
+          </a:solidFill>
+          <a:ln w="10160">
+            <a:solidFill>
+              <a:srgbClr val="BEBEBE"/>
+            </a:solidFill>
+          </a:ln>
+        </p:spPr>
+        <p:style>
+          <a:lnRef idx="1">
+            <a:schemeClr val="accent1"/>
+          </a:lnRef>
+          <a:fillRef idx="3">
+            <a:schemeClr val="accent1"/>
+          </a:fillRef>
+          <a:effectRef idx="2">
+            <a:schemeClr val="accent1"/>
+          </a:effectRef>
+          <a:fontRef idx="minor">
+            <a:schemeClr val="lt1"/>
+          </a:fontRef>
+        </p:style>
+        <p:txBody>
+          <a:bodyPr rtlCol="0" anchor="ctr"/>
+          <a:lstStyle/>
+          <a:p>
+            <a:pPr algn="ctr"/>
+          </a:p>
+        </p:txBody>
+      </p:sp>
+      <p:sp>
+        <p:nvSpPr>
+          <p:cNvPr id="3" name="AGENT_NAV_LABEL_0"/>
+          <p:cNvSpPr txBox="1"/>
+          <p:nvPr/>
+        </p:nvSpPr>
+        <p:spPr>
+          <a:xfrm>
+            <a:off x="146304" y="59436"/>
+            <a:ext cx="2379268" cy="228600"/>
+          </a:xfrm>
+          <a:prstGeom prst="rect">
+            <a:avLst/>
+          </a:prstGeom>
+          <a:noFill/>
+        </p:spPr>
+        <p:txBody>
+          <a:bodyPr wrap="none" lIns="0" rIns="0" tIns="0" bIns="0" anchor="ctr">
+            <a:spAutoFit/>
+          </a:bodyPr>
+          <a:lstStyle/>
+          <a:p>
+            <a:pPr algn="ctr"/>
+            <a:r>
+              <a:rPr sz="1200" b="0" ea="Microsoft YaHei">
+                <a:solidFill>
+                  <a:srgbClr val="1E1E1E"/>
+                </a:solidFill>
+                <a:latin typeface="Microsoft YaHei"/>
+              </a:rPr>
+              <a:t>研究背景</a:t>
+            </a:r>
+          </a:p>
+        </p:txBody>
+      </p:sp>
+      <p:sp>
+        <p:nvSpPr>
+          <p:cNvPr id="4" name="AGENT_NAV_SLOT_1"/>
+          <p:cNvSpPr/>
+          <p:nvPr/>
+        </p:nvSpPr>
+        <p:spPr>
+          <a:xfrm>
+            <a:off x="2525572" y="27432"/>
+            <a:ext cx="2379268" cy="347472"/>
+          </a:xfrm>
+          <a:prstGeom prst="rect">
+            <a:avLst/>
+          </a:prstGeom>
+          <a:solidFill>
+            <a:srgbClr val="FFFFFF"/>
+          </a:solidFill>
+          <a:ln w="10160">
+            <a:solidFill>
+              <a:srgbClr val="BEBEBE"/>
+            </a:solidFill>
+          </a:ln>
+        </p:spPr>
+        <p:style>
+          <a:lnRef idx="1">
+            <a:schemeClr val="accent1"/>
+          </a:lnRef>
+          <a:fillRef idx="3">
+            <a:schemeClr val="accent1"/>
+          </a:fillRef>
+          <a:effectRef idx="2">
+            <a:schemeClr val="accent1"/>
+          </a:effectRef>
+          <a:fontRef idx="minor">
+            <a:schemeClr val="lt1"/>
+          </a:fontRef>
+        </p:style>
+        <p:txBody>
+          <a:bodyPr rtlCol="0" anchor="ctr"/>
+          <a:lstStyle/>
+          <a:p>
+            <a:pPr algn="ctr"/>
+          </a:p>
+        </p:txBody>
+      </p:sp>
+      <p:sp>
+        <p:nvSpPr>
+          <p:cNvPr id="5" name="AGENT_NAV_LABEL_1"/>
+          <p:cNvSpPr txBox="1"/>
+          <p:nvPr/>
+        </p:nvSpPr>
+        <p:spPr>
+          <a:xfrm>
+            <a:off x="2525572" y="59436"/>
+            <a:ext cx="2379268" cy="228600"/>
+          </a:xfrm>
+          <a:prstGeom prst="rect">
+            <a:avLst/>
+          </a:prstGeom>
+          <a:noFill/>
+        </p:spPr>
+        <p:txBody>
+          <a:bodyPr wrap="none" lIns="0" rIns="0" tIns="0" bIns="0" anchor="ctr">
+            <a:spAutoFit/>
+          </a:bodyPr>
+          <a:lstStyle/>
+          <a:p>
+            <a:pPr algn="ctr"/>
+            <a:r>
+              <a:rPr sz="1200" b="0" ea="Microsoft YaHei">
+                <a:solidFill>
+                  <a:srgbClr val="1E1E1E"/>
+                </a:solidFill>
+                <a:latin typeface="Microsoft YaHei"/>
+              </a:rPr>
+              <a:t>总体方案</a:t>
+            </a:r>
+          </a:p>
+        </p:txBody>
+      </p:sp>
+      <p:sp>
+        <p:nvSpPr>
+          <p:cNvPr id="6" name="AGENT_NAV_SLOT_2"/>
+          <p:cNvSpPr/>
+          <p:nvPr/>
+        </p:nvSpPr>
+        <p:spPr>
+          <a:xfrm>
+            <a:off x="4904841" y="27432"/>
+            <a:ext cx="2379268" cy="347472"/>
+          </a:xfrm>
+          <a:prstGeom prst="rect">
+            <a:avLst/>
+          </a:prstGeom>
+          <a:solidFill>
+            <a:srgbClr val="FFFFFF"/>
+          </a:solidFill>
+          <a:ln w="10160">
+            <a:solidFill>
+              <a:srgbClr val="BEBEBE"/>
+            </a:solidFill>
+          </a:ln>
+        </p:spPr>
+        <p:style>
+          <a:lnRef idx="1">
+            <a:schemeClr val="accent1"/>
+          </a:lnRef>
+          <a:fillRef idx="3">
+            <a:schemeClr val="accent1"/>
+          </a:fillRef>
+          <a:effectRef idx="2">
+            <a:schemeClr val="accent1"/>
+          </a:effectRef>
+          <a:fontRef idx="minor">
+            <a:schemeClr val="lt1"/>
+          </a:fontRef>
+        </p:style>
+        <p:txBody>
+          <a:bodyPr rtlCol="0" anchor="ctr"/>
+          <a:lstStyle/>
+          <a:p>
+            <a:pPr algn="ctr"/>
+          </a:p>
+        </p:txBody>
+      </p:sp>
+      <p:sp>
+        <p:nvSpPr>
+          <p:cNvPr id="7" name="AGENT_NAV_LABEL_2"/>
+          <p:cNvSpPr txBox="1"/>
+          <p:nvPr/>
+        </p:nvSpPr>
+        <p:spPr>
+          <a:xfrm>
+            <a:off x="4904841" y="59436"/>
+            <a:ext cx="2379268" cy="228600"/>
+          </a:xfrm>
+          <a:prstGeom prst="rect">
+            <a:avLst/>
+          </a:prstGeom>
+          <a:noFill/>
+        </p:spPr>
+        <p:txBody>
+          <a:bodyPr wrap="none" lIns="0" rIns="0" tIns="0" bIns="0" anchor="ctr">
+            <a:spAutoFit/>
+          </a:bodyPr>
+          <a:lstStyle/>
+          <a:p>
+            <a:pPr algn="ctr"/>
+            <a:r>
+              <a:rPr sz="1200" b="0" ea="Microsoft YaHei">
+                <a:solidFill>
+                  <a:srgbClr val="1E1E1E"/>
+                </a:solidFill>
+                <a:latin typeface="Microsoft YaHei"/>
+              </a:rPr>
+              <a:t>理论方法</a:t>
+            </a:r>
+          </a:p>
+        </p:txBody>
+      </p:sp>
+      <p:sp>
+        <p:nvSpPr>
+          <p:cNvPr id="8" name="AGENT_NAV_SLOT_3"/>
+          <p:cNvSpPr/>
+          <p:nvPr/>
+        </p:nvSpPr>
+        <p:spPr>
+          <a:xfrm>
+            <a:off x="7284110" y="27432"/>
+            <a:ext cx="2379268" cy="347472"/>
+          </a:xfrm>
+          <a:prstGeom prst="rect">
+            <a:avLst/>
+          </a:prstGeom>
+          <a:solidFill>
+            <a:srgbClr val="FFFFFF"/>
+          </a:solidFill>
+          <a:ln w="10160">
+            <a:solidFill>
+              <a:srgbClr val="BEBEBE"/>
+            </a:solidFill>
+          </a:ln>
+        </p:spPr>
+        <p:style>
+          <a:lnRef idx="1">
+            <a:schemeClr val="accent1"/>
+          </a:lnRef>
+          <a:fillRef idx="3">
+            <a:schemeClr val="accent1"/>
+          </a:fillRef>
+          <a:effectRef idx="2">
+            <a:schemeClr val="accent1"/>
+          </a:effectRef>
+          <a:fontRef idx="minor">
+            <a:schemeClr val="lt1"/>
+          </a:fontRef>
+        </p:style>
+        <p:txBody>
+          <a:bodyPr rtlCol="0" anchor="ctr"/>
+          <a:lstStyle/>
+          <a:p>
+            <a:pPr algn="ctr"/>
+          </a:p>
+        </p:txBody>
+      </p:sp>
+      <p:sp>
+        <p:nvSpPr>
+          <p:cNvPr id="9" name="AGENT_NAV_LABEL_3"/>
+          <p:cNvSpPr txBox="1"/>
+          <p:nvPr/>
+        </p:nvSpPr>
+        <p:spPr>
+          <a:xfrm>
+            <a:off x="7284110" y="59436"/>
+            <a:ext cx="2379268" cy="228600"/>
+          </a:xfrm>
+          <a:prstGeom prst="rect">
+            <a:avLst/>
+          </a:prstGeom>
+          <a:noFill/>
+        </p:spPr>
+        <p:txBody>
+          <a:bodyPr wrap="none" lIns="0" rIns="0" tIns="0" bIns="0" anchor="ctr">
+            <a:spAutoFit/>
+          </a:bodyPr>
+          <a:lstStyle/>
+          <a:p>
+            <a:pPr algn="ctr"/>
+            <a:r>
+              <a:rPr sz="1200" b="0" ea="Microsoft YaHei">
+                <a:solidFill>
+                  <a:srgbClr val="1E1E1E"/>
+                </a:solidFill>
+                <a:latin typeface="Microsoft YaHei"/>
+              </a:rPr>
+              <a:t>试验设计</a:t>
+            </a:r>
+          </a:p>
+        </p:txBody>
+      </p:sp>
+      <p:sp>
+        <p:nvSpPr>
+          <p:cNvPr id="10" name="AGENT_NAV_SLOT_4"/>
+          <p:cNvSpPr/>
+          <p:nvPr/>
+        </p:nvSpPr>
+        <p:spPr>
+          <a:xfrm>
+            <a:off x="9663379" y="27432"/>
+            <a:ext cx="2379268" cy="347472"/>
+          </a:xfrm>
+          <a:prstGeom prst="rect">
+            <a:avLst/>
+          </a:prstGeom>
+          <a:solidFill>
+            <a:srgbClr val="8B0D18"/>
+          </a:solidFill>
+          <a:ln w="10160">
+            <a:solidFill>
+              <a:srgbClr val="BEBEBE"/>
+            </a:solidFill>
+          </a:ln>
+        </p:spPr>
+        <p:style>
+          <a:lnRef idx="1">
+            <a:schemeClr val="accent1"/>
+          </a:lnRef>
+          <a:fillRef idx="3">
+            <a:schemeClr val="accent1"/>
+          </a:fillRef>
+          <a:effectRef idx="2">
+            <a:schemeClr val="accent1"/>
+          </a:effectRef>
+          <a:fontRef idx="minor">
+            <a:schemeClr val="lt1"/>
+          </a:fontRef>
+        </p:style>
+        <p:txBody>
+          <a:bodyPr rtlCol="0" anchor="ctr"/>
+          <a:lstStyle/>
+          <a:p>
+            <a:pPr algn="ctr"/>
+          </a:p>
+        </p:txBody>
+      </p:sp>
+      <p:sp>
+        <p:nvSpPr>
+          <p:cNvPr id="11" name="AGENT_NAV_LABEL_4"/>
+          <p:cNvSpPr txBox="1"/>
+          <p:nvPr/>
+        </p:nvSpPr>
+        <p:spPr>
+          <a:xfrm>
+            <a:off x="9663379" y="59436"/>
+            <a:ext cx="2379268" cy="228600"/>
+          </a:xfrm>
+          <a:prstGeom prst="rect">
+            <a:avLst/>
+          </a:prstGeom>
+          <a:noFill/>
+        </p:spPr>
+        <p:txBody>
+          <a:bodyPr wrap="none" lIns="0" rIns="0" tIns="0" bIns="0" anchor="ctr">
+            <a:spAutoFit/>
+          </a:bodyPr>
+          <a:lstStyle/>
+          <a:p>
+            <a:pPr algn="ctr"/>
+            <a:r>
+              <a:rPr sz="1200" b="1" ea="Microsoft YaHei">
+                <a:solidFill>
+                  <a:srgbClr val="FFFFFF"/>
+                </a:solidFill>
+                <a:latin typeface="Microsoft YaHei"/>
+              </a:rPr>
+              <a:t>进度与计划</a:t>
+            </a:r>
+          </a:p>
+        </p:txBody>
+      </p:sp>
+      <p:sp>
+        <p:nvSpPr>
+          <p:cNvPr id="12" name="AGENT_FOOTER"/>
+          <p:cNvSpPr txBox="1"/>
+          <p:nvPr/>
+        </p:nvSpPr>
+        <p:spPr>
+          <a:xfrm>
+            <a:off x="320040" y="6510528"/>
+            <a:ext cx="8595360" cy="128016"/>
+          </a:xfrm>
+          <a:prstGeom prst="rect">
+            <a:avLst/>
+          </a:prstGeom>
+          <a:noFill/>
+        </p:spPr>
+        <p:txBody>
+          <a:bodyPr wrap="none" lIns="0" rIns="0" tIns="0" bIns="0" anchor="ctr">
+            <a:spAutoFit/>
+          </a:bodyPr>
+          <a:lstStyle/>
+          <a:p>
+            <a:pPr algn="l"/>
+            <a:r>
+              <a:rPr sz="800" b="0" ea="Microsoft YaHei">
+                <a:solidFill>
+                  <a:srgbClr val="696969"/>
+                </a:solidFill>
+                <a:latin typeface="Microsoft YaHei"/>
+              </a:rPr>
+              <a:t>纯视觉芍药行间除草机器人 · 组会进展汇报 · 2026-09-07</a:t>
+            </a:r>
+          </a:p>
+        </p:txBody>
+      </p:sp>
+      <p:sp>
+        <p:nvSpPr>
+          <p:cNvPr id="13" name="AGENT_PAGE_NUMBER"/>
+          <p:cNvSpPr txBox="1"/>
+          <p:nvPr/>
+        </p:nvSpPr>
+        <p:spPr>
+          <a:xfrm>
+            <a:off x="11521440" y="6501384"/>
+            <a:ext cx="256032" cy="128016"/>
+          </a:xfrm>
+          <a:prstGeom prst="rect">
+            <a:avLst/>
+          </a:prstGeom>
+          <a:noFill/>
+        </p:spPr>
+        <p:txBody>
+          <a:bodyPr wrap="none" lIns="0" rIns="0" tIns="0" bIns="0" anchor="ctr">
+            <a:spAutoFit/>
+          </a:bodyPr>
+          <a:lstStyle/>
+          <a:p>
+            <a:pPr algn="r"/>
+            <a:r>
+              <a:rPr sz="800" b="0" ea="Microsoft YaHei">
+                <a:solidFill>
+                  <a:srgbClr val="696969"/>
+                </a:solidFill>
+                <a:latin typeface="Microsoft YaHei"/>
+              </a:rPr>
+              <a:t>16</a:t>
+            </a:r>
+          </a:p>
+        </p:txBody>
+      </p:sp>
+      <p:sp>
+        <p:nvSpPr>
+          <p:cNvPr id="14" name="AGENT_TITLE"/>
+          <p:cNvSpPr txBox="1"/>
+          <p:nvPr/>
+        </p:nvSpPr>
+        <p:spPr>
+          <a:xfrm>
+            <a:off x="320040" y="539496"/>
+            <a:ext cx="11292840" cy="493776"/>
+          </a:xfrm>
+          <a:prstGeom prst="rect">
+            <a:avLst/>
+          </a:prstGeom>
+          <a:noFill/>
+        </p:spPr>
+        <p:txBody>
+          <a:bodyPr wrap="square" lIns="0" rIns="0" tIns="0" bIns="0" anchor="ctr">
+            <a:spAutoFit/>
+          </a:bodyPr>
+          <a:lstStyle/>
+          <a:p>
+            <a:pPr algn="l"/>
+            <a:r>
+              <a:rPr sz="3000" b="0" ea="Microsoft YaHei">
+                <a:solidFill>
+                  <a:srgbClr val="8B0D18"/>
+                </a:solidFill>
+                <a:latin typeface="Microsoft YaHei"/>
+              </a:rPr>
+              <a:t>当前瓶颈在实物侧，不在算法侧</a:t>
+            </a:r>
+          </a:p>
+        </p:txBody>
+      </p:sp>
+      <p:sp>
+        <p:nvSpPr>
+          <p:cNvPr id="15" name="AGENT_TEXT_PANEL"/>
+          <p:cNvSpPr/>
+          <p:nvPr/>
+        </p:nvSpPr>
+        <p:spPr>
+          <a:xfrm>
+            <a:off x="685800" y="1417320"/>
+            <a:ext cx="10835640" cy="4434840"/>
+          </a:xfrm>
+          <a:prstGeom prst="roundRect">
+            <a:avLst/>
+          </a:prstGeom>
+          <a:solidFill>
+            <a:srgbClr val="FFFFFF"/>
+          </a:solidFill>
+          <a:ln w="10160">
+            <a:solidFill>
+              <a:srgbClr val="BEBEBE"/>
+            </a:solidFill>
+          </a:ln>
+        </p:spPr>
+        <p:style>
+          <a:lnRef idx="1">
+            <a:schemeClr val="accent1"/>
+          </a:lnRef>
+          <a:fillRef idx="3">
+            <a:schemeClr val="accent1"/>
+          </a:fillRef>
+          <a:effectRef idx="2">
+            <a:schemeClr val="accent1"/>
+          </a:effectRef>
+          <a:fontRef idx="minor">
+            <a:schemeClr val="lt1"/>
+          </a:fontRef>
+        </p:style>
+        <p:txBody>
+          <a:bodyPr rtlCol="0" anchor="ctr"/>
+          <a:lstStyle/>
+          <a:p>
+            <a:pPr algn="ctr"/>
+          </a:p>
+        </p:txBody>
+      </p:sp>
+      <p:sp>
+        <p:nvSpPr>
+          <p:cNvPr id="16" name="AGENT_BODY"/>
+          <p:cNvSpPr txBox="1"/>
+          <p:nvPr/>
+        </p:nvSpPr>
+        <p:spPr>
+          <a:xfrm>
+            <a:off x="960120" y="1664208"/>
+            <a:ext cx="10287000" cy="3931920"/>
+          </a:xfrm>
+          <a:prstGeom prst="rect">
+            <a:avLst/>
+          </a:prstGeom>
+          <a:noFill/>
+        </p:spPr>
+        <p:txBody>
+          <a:bodyPr wrap="square" lIns="0" rIns="0" tIns="0" bIns="0" anchor="ctr">
+            <a:spAutoFit/>
+          </a:bodyPr>
+          <a:lstStyle/>
+          <a:p>
+            <a:pPr algn="l"/>
+            <a:r>
+              <a:rPr sz="2000" b="0" ea="Microsoft YaHei">
+                <a:solidFill>
+                  <a:srgbClr val="1E1E1E"/>
+                </a:solidFill>
+                <a:latin typeface="Microsoft YaHei"/>
+              </a:rPr>
+              <a:t>1. 待办：固件烧录、串口对拍、接线与三项系数标定
+2. 待购：RDK X5 网关、CP2102×2、TB6600、CPE 网桥一对
+3. 域差异风险已实测：夏季模型在当前田况过分割
+4. 对策：10 月中前补采 200-300 张秋季样本并微调
+5. 采集清单已定稿：光照×行况×视角矩阵，含密度分级标准</a:t>
+            </a:r>
+          </a:p>
+        </p:txBody>
+      </p:sp>
+    </p:spTree>
+  </p:cSld>
+  <p:clrMapOvr>
+    <a:masterClrMapping/>
+  </p:clrMapOvr>
+</p:sld>
+</file>
+
+<file path=ppt/slides/slide17.xml><?xml version="1.0" encoding="utf-8"?>
+<p:sld xmlns:a="http://schemas.openxmlformats.org/drawingml/2006/main" xmlns:p="http://schemas.openxmlformats.org/presentationml/2006/main" xmlns:r="http://schemas.openxmlformats.org/officeDocument/2006/relationships">
+  <p:cSld>
+    <p:spTree>
+      <p:nvGrpSpPr>
+        <p:cNvPr id="1" name=""/>
+        <p:cNvGrpSpPr/>
+        <p:nvPr/>
+      </p:nvGrpSpPr>
+      <p:grpSpPr/>
+      <p:sp>
+        <p:nvSpPr>
+          <p:cNvPr id="2" name="AGENT_NAV_SLOT_0"/>
+          <p:cNvSpPr/>
+          <p:nvPr/>
+        </p:nvSpPr>
+        <p:spPr>
+          <a:xfrm>
+            <a:off x="146304" y="27432"/>
+            <a:ext cx="2379268" cy="347472"/>
+          </a:xfrm>
+          <a:prstGeom prst="rect">
+            <a:avLst/>
+          </a:prstGeom>
+          <a:solidFill>
+            <a:srgbClr val="FFFFFF"/>
+          </a:solidFill>
+          <a:ln w="10160">
+            <a:solidFill>
+              <a:srgbClr val="BEBEBE"/>
+            </a:solidFill>
+          </a:ln>
+        </p:spPr>
+        <p:style>
+          <a:lnRef idx="1">
+            <a:schemeClr val="accent1"/>
+          </a:lnRef>
+          <a:fillRef idx="3">
+            <a:schemeClr val="accent1"/>
+          </a:fillRef>
+          <a:effectRef idx="2">
+            <a:schemeClr val="accent1"/>
+          </a:effectRef>
+          <a:fontRef idx="minor">
+            <a:schemeClr val="lt1"/>
+          </a:fontRef>
+        </p:style>
+        <p:txBody>
+          <a:bodyPr rtlCol="0" anchor="ctr"/>
+          <a:lstStyle/>
+          <a:p>
+            <a:pPr algn="ctr"/>
+          </a:p>
+        </p:txBody>
+      </p:sp>
+      <p:sp>
+        <p:nvSpPr>
+          <p:cNvPr id="3" name="AGENT_NAV_LABEL_0"/>
+          <p:cNvSpPr txBox="1"/>
+          <p:nvPr/>
+        </p:nvSpPr>
+        <p:spPr>
+          <a:xfrm>
+            <a:off x="146304" y="59436"/>
+            <a:ext cx="2379268" cy="228600"/>
+          </a:xfrm>
+          <a:prstGeom prst="rect">
+            <a:avLst/>
+          </a:prstGeom>
+          <a:noFill/>
+        </p:spPr>
+        <p:txBody>
+          <a:bodyPr wrap="none" lIns="0" rIns="0" tIns="0" bIns="0" anchor="ctr">
+            <a:spAutoFit/>
+          </a:bodyPr>
+          <a:lstStyle/>
+          <a:p>
+            <a:pPr algn="ctr"/>
+            <a:r>
+              <a:rPr sz="1200" b="0" ea="Microsoft YaHei">
+                <a:solidFill>
+                  <a:srgbClr val="1E1E1E"/>
+                </a:solidFill>
+                <a:latin typeface="Microsoft YaHei"/>
+              </a:rPr>
+              <a:t>研究背景</a:t>
+            </a:r>
+          </a:p>
+        </p:txBody>
+      </p:sp>
+      <p:sp>
+        <p:nvSpPr>
+          <p:cNvPr id="4" name="AGENT_NAV_SLOT_1"/>
+          <p:cNvSpPr/>
+          <p:nvPr/>
+        </p:nvSpPr>
+        <p:spPr>
+          <a:xfrm>
+            <a:off x="2525572" y="27432"/>
+            <a:ext cx="2379268" cy="347472"/>
+          </a:xfrm>
+          <a:prstGeom prst="rect">
+            <a:avLst/>
+          </a:prstGeom>
+          <a:solidFill>
+            <a:srgbClr val="FFFFFF"/>
+          </a:solidFill>
+          <a:ln w="10160">
+            <a:solidFill>
+              <a:srgbClr val="BEBEBE"/>
+            </a:solidFill>
+          </a:ln>
+        </p:spPr>
+        <p:style>
+          <a:lnRef idx="1">
+            <a:schemeClr val="accent1"/>
+          </a:lnRef>
+          <a:fillRef idx="3">
+            <a:schemeClr val="accent1"/>
+          </a:fillRef>
+          <a:effectRef idx="2">
+            <a:schemeClr val="accent1"/>
+          </a:effectRef>
+          <a:fontRef idx="minor">
+            <a:schemeClr val="lt1"/>
+          </a:fontRef>
+        </p:style>
+        <p:txBody>
+          <a:bodyPr rtlCol="0" anchor="ctr"/>
+          <a:lstStyle/>
+          <a:p>
+            <a:pPr algn="ctr"/>
+          </a:p>
+        </p:txBody>
+      </p:sp>
+      <p:sp>
+        <p:nvSpPr>
+          <p:cNvPr id="5" name="AGENT_NAV_LABEL_1"/>
+          <p:cNvSpPr txBox="1"/>
+          <p:nvPr/>
+        </p:nvSpPr>
+        <p:spPr>
+          <a:xfrm>
+            <a:off x="2525572" y="59436"/>
+            <a:ext cx="2379268" cy="228600"/>
+          </a:xfrm>
+          <a:prstGeom prst="rect">
+            <a:avLst/>
+          </a:prstGeom>
+          <a:noFill/>
+        </p:spPr>
+        <p:txBody>
+          <a:bodyPr wrap="none" lIns="0" rIns="0" tIns="0" bIns="0" anchor="ctr">
+            <a:spAutoFit/>
+          </a:bodyPr>
+          <a:lstStyle/>
+          <a:p>
+            <a:pPr algn="ctr"/>
+            <a:r>
+              <a:rPr sz="1200" b="0" ea="Microsoft YaHei">
+                <a:solidFill>
+                  <a:srgbClr val="1E1E1E"/>
+                </a:solidFill>
+                <a:latin typeface="Microsoft YaHei"/>
+              </a:rPr>
+              <a:t>总体方案</a:t>
+            </a:r>
+          </a:p>
+        </p:txBody>
+      </p:sp>
+      <p:sp>
+        <p:nvSpPr>
+          <p:cNvPr id="6" name="AGENT_NAV_SLOT_2"/>
+          <p:cNvSpPr/>
+          <p:nvPr/>
+        </p:nvSpPr>
+        <p:spPr>
+          <a:xfrm>
+            <a:off x="4904841" y="27432"/>
+            <a:ext cx="2379268" cy="347472"/>
+          </a:xfrm>
+          <a:prstGeom prst="rect">
+            <a:avLst/>
+          </a:prstGeom>
+          <a:solidFill>
+            <a:srgbClr val="FFFFFF"/>
+          </a:solidFill>
+          <a:ln w="10160">
+            <a:solidFill>
+              <a:srgbClr val="BEBEBE"/>
+            </a:solidFill>
+          </a:ln>
+        </p:spPr>
+        <p:style>
+          <a:lnRef idx="1">
+            <a:schemeClr val="accent1"/>
+          </a:lnRef>
+          <a:fillRef idx="3">
+            <a:schemeClr val="accent1"/>
+          </a:fillRef>
+          <a:effectRef idx="2">
+            <a:schemeClr val="accent1"/>
+          </a:effectRef>
+          <a:fontRef idx="minor">
+            <a:schemeClr val="lt1"/>
+          </a:fontRef>
+        </p:style>
+        <p:txBody>
+          <a:bodyPr rtlCol="0" anchor="ctr"/>
+          <a:lstStyle/>
+          <a:p>
+            <a:pPr algn="ctr"/>
+          </a:p>
+        </p:txBody>
+      </p:sp>
+      <p:sp>
+        <p:nvSpPr>
+          <p:cNvPr id="7" name="AGENT_NAV_LABEL_2"/>
+          <p:cNvSpPr txBox="1"/>
+          <p:nvPr/>
+        </p:nvSpPr>
+        <p:spPr>
+          <a:xfrm>
+            <a:off x="4904841" y="59436"/>
+            <a:ext cx="2379268" cy="228600"/>
+          </a:xfrm>
+          <a:prstGeom prst="rect">
+            <a:avLst/>
+          </a:prstGeom>
+          <a:noFill/>
+        </p:spPr>
+        <p:txBody>
+          <a:bodyPr wrap="none" lIns="0" rIns="0" tIns="0" bIns="0" anchor="ctr">
+            <a:spAutoFit/>
+          </a:bodyPr>
+          <a:lstStyle/>
+          <a:p>
+            <a:pPr algn="ctr"/>
+            <a:r>
+              <a:rPr sz="1200" b="0" ea="Microsoft YaHei">
+                <a:solidFill>
+                  <a:srgbClr val="1E1E1E"/>
+                </a:solidFill>
+                <a:latin typeface="Microsoft YaHei"/>
+              </a:rPr>
+              <a:t>理论方法</a:t>
+            </a:r>
+          </a:p>
+        </p:txBody>
+      </p:sp>
+      <p:sp>
+        <p:nvSpPr>
+          <p:cNvPr id="8" name="AGENT_NAV_SLOT_3"/>
+          <p:cNvSpPr/>
+          <p:nvPr/>
+        </p:nvSpPr>
+        <p:spPr>
+          <a:xfrm>
+            <a:off x="7284110" y="27432"/>
+            <a:ext cx="2379268" cy="347472"/>
+          </a:xfrm>
+          <a:prstGeom prst="rect">
+            <a:avLst/>
+          </a:prstGeom>
+          <a:solidFill>
+            <a:srgbClr val="FFFFFF"/>
+          </a:solidFill>
+          <a:ln w="10160">
+            <a:solidFill>
+              <a:srgbClr val="BEBEBE"/>
+            </a:solidFill>
+          </a:ln>
+        </p:spPr>
+        <p:style>
+          <a:lnRef idx="1">
+            <a:schemeClr val="accent1"/>
+          </a:lnRef>
+          <a:fillRef idx="3">
+            <a:schemeClr val="accent1"/>
+          </a:fillRef>
+          <a:effectRef idx="2">
+            <a:schemeClr val="accent1"/>
+          </a:effectRef>
+          <a:fontRef idx="minor">
+            <a:schemeClr val="lt1"/>
+          </a:fontRef>
+        </p:style>
+        <p:txBody>
+          <a:bodyPr rtlCol="0" anchor="ctr"/>
+          <a:lstStyle/>
+          <a:p>
+            <a:pPr algn="ctr"/>
+          </a:p>
+        </p:txBody>
+      </p:sp>
+      <p:sp>
+        <p:nvSpPr>
+          <p:cNvPr id="9" name="AGENT_NAV_LABEL_3"/>
+          <p:cNvSpPr txBox="1"/>
+          <p:nvPr/>
+        </p:nvSpPr>
+        <p:spPr>
+          <a:xfrm>
+            <a:off x="7284110" y="59436"/>
+            <a:ext cx="2379268" cy="228600"/>
+          </a:xfrm>
+          <a:prstGeom prst="rect">
+            <a:avLst/>
+          </a:prstGeom>
+          <a:noFill/>
+        </p:spPr>
+        <p:txBody>
+          <a:bodyPr wrap="none" lIns="0" rIns="0" tIns="0" bIns="0" anchor="ctr">
+            <a:spAutoFit/>
+          </a:bodyPr>
+          <a:lstStyle/>
+          <a:p>
+            <a:pPr algn="ctr"/>
+            <a:r>
+              <a:rPr sz="1200" b="0" ea="Microsoft YaHei">
+                <a:solidFill>
+                  <a:srgbClr val="1E1E1E"/>
+                </a:solidFill>
+                <a:latin typeface="Microsoft YaHei"/>
+              </a:rPr>
+              <a:t>试验设计</a:t>
+            </a:r>
+          </a:p>
+        </p:txBody>
+      </p:sp>
+      <p:sp>
+        <p:nvSpPr>
+          <p:cNvPr id="10" name="AGENT_NAV_SLOT_4"/>
+          <p:cNvSpPr/>
+          <p:nvPr/>
+        </p:nvSpPr>
+        <p:spPr>
+          <a:xfrm>
+            <a:off x="9663379" y="27432"/>
+            <a:ext cx="2379268" cy="347472"/>
+          </a:xfrm>
+          <a:prstGeom prst="rect">
+            <a:avLst/>
+          </a:prstGeom>
+          <a:solidFill>
+            <a:srgbClr val="8B0D18"/>
+          </a:solidFill>
+          <a:ln w="10160">
+            <a:solidFill>
+              <a:srgbClr val="BEBEBE"/>
+            </a:solidFill>
+          </a:ln>
+        </p:spPr>
+        <p:style>
+          <a:lnRef idx="1">
+            <a:schemeClr val="accent1"/>
+          </a:lnRef>
+          <a:fillRef idx="3">
+            <a:schemeClr val="accent1"/>
+          </a:fillRef>
+          <a:effectRef idx="2">
+            <a:schemeClr val="accent1"/>
+          </a:effectRef>
+          <a:fontRef idx="minor">
+            <a:schemeClr val="lt1"/>
+          </a:fontRef>
+        </p:style>
+        <p:txBody>
+          <a:bodyPr rtlCol="0" anchor="ctr"/>
+          <a:lstStyle/>
+          <a:p>
+            <a:pPr algn="ctr"/>
+          </a:p>
+        </p:txBody>
+      </p:sp>
+      <p:sp>
+        <p:nvSpPr>
+          <p:cNvPr id="11" name="AGENT_NAV_LABEL_4"/>
+          <p:cNvSpPr txBox="1"/>
+          <p:nvPr/>
+        </p:nvSpPr>
+        <p:spPr>
+          <a:xfrm>
+            <a:off x="9663379" y="59436"/>
+            <a:ext cx="2379268" cy="228600"/>
+          </a:xfrm>
+          <a:prstGeom prst="rect">
+            <a:avLst/>
+          </a:prstGeom>
+          <a:noFill/>
+        </p:spPr>
+        <p:txBody>
+          <a:bodyPr wrap="none" lIns="0" rIns="0" tIns="0" bIns="0" anchor="ctr">
+            <a:spAutoFit/>
+          </a:bodyPr>
+          <a:lstStyle/>
+          <a:p>
+            <a:pPr algn="ctr"/>
+            <a:r>
+              <a:rPr sz="1200" b="1" ea="Microsoft YaHei">
+                <a:solidFill>
+                  <a:srgbClr val="FFFFFF"/>
+                </a:solidFill>
+                <a:latin typeface="Microsoft YaHei"/>
+              </a:rPr>
+              <a:t>进度与计划</a:t>
+            </a:r>
+          </a:p>
+        </p:txBody>
+      </p:sp>
+      <p:sp>
+        <p:nvSpPr>
+          <p:cNvPr id="12" name="AGENT_FOOTER"/>
+          <p:cNvSpPr txBox="1"/>
+          <p:nvPr/>
+        </p:nvSpPr>
+        <p:spPr>
+          <a:xfrm>
+            <a:off x="320040" y="6510528"/>
+            <a:ext cx="8595360" cy="128016"/>
+          </a:xfrm>
+          <a:prstGeom prst="rect">
+            <a:avLst/>
+          </a:prstGeom>
+          <a:noFill/>
+        </p:spPr>
+        <p:txBody>
+          <a:bodyPr wrap="none" lIns="0" rIns="0" tIns="0" bIns="0" anchor="ctr">
+            <a:spAutoFit/>
+          </a:bodyPr>
+          <a:lstStyle/>
+          <a:p>
+            <a:pPr algn="l"/>
+            <a:r>
+              <a:rPr sz="800" b="0" ea="Microsoft YaHei">
+                <a:solidFill>
+                  <a:srgbClr val="696969"/>
+                </a:solidFill>
+                <a:latin typeface="Microsoft YaHei"/>
+              </a:rPr>
+              <a:t>纯视觉芍药行间除草机器人 · 组会进展汇报 · 2026-09-07</a:t>
+            </a:r>
+          </a:p>
+        </p:txBody>
+      </p:sp>
+      <p:sp>
+        <p:nvSpPr>
+          <p:cNvPr id="13" name="AGENT_PAGE_NUMBER"/>
+          <p:cNvSpPr txBox="1"/>
+          <p:nvPr/>
+        </p:nvSpPr>
+        <p:spPr>
+          <a:xfrm>
+            <a:off x="11521440" y="6501384"/>
+            <a:ext cx="256032" cy="128016"/>
+          </a:xfrm>
+          <a:prstGeom prst="rect">
+            <a:avLst/>
+          </a:prstGeom>
+          <a:noFill/>
+        </p:spPr>
+        <p:txBody>
+          <a:bodyPr wrap="none" lIns="0" rIns="0" tIns="0" bIns="0" anchor="ctr">
+            <a:spAutoFit/>
+          </a:bodyPr>
+          <a:lstStyle/>
+          <a:p>
+            <a:pPr algn="r"/>
+            <a:r>
+              <a:rPr sz="800" b="0" ea="Microsoft YaHei">
+                <a:solidFill>
+                  <a:srgbClr val="696969"/>
+                </a:solidFill>
+                <a:latin typeface="Microsoft YaHei"/>
+              </a:rPr>
+              <a:t>17</a:t>
+            </a:r>
+          </a:p>
+        </p:txBody>
+      </p:sp>
+      <p:sp>
+        <p:nvSpPr>
+          <p:cNvPr id="14" name="AGENT_TITLE"/>
+          <p:cNvSpPr txBox="1"/>
+          <p:nvPr/>
+        </p:nvSpPr>
+        <p:spPr>
+          <a:xfrm>
+            <a:off x="320040" y="539496"/>
+            <a:ext cx="11292840" cy="493776"/>
+          </a:xfrm>
+          <a:prstGeom prst="rect">
+            <a:avLst/>
+          </a:prstGeom>
+          <a:noFill/>
+        </p:spPr>
+        <p:txBody>
+          <a:bodyPr wrap="square" lIns="0" rIns="0" tIns="0" bIns="0" anchor="ctr">
+            <a:spAutoFit/>
+          </a:bodyPr>
+          <a:lstStyle/>
+          <a:p>
+            <a:pPr algn="l"/>
+            <a:r>
+              <a:rPr sz="3000" b="0" ea="Microsoft YaHei">
+                <a:solidFill>
+                  <a:srgbClr val="8B0D18"/>
+                </a:solidFill>
+                <a:latin typeface="Microsoft YaHei"/>
+              </a:rPr>
+              <a:t>后续四周：从台架到下田</a:t>
+            </a:r>
+          </a:p>
+        </p:txBody>
+      </p:sp>
+      <p:sp>
+        <p:nvSpPr>
+          <p:cNvPr id="15" name="AGENT_STEP_BOX_0"/>
+          <p:cNvSpPr/>
+          <p:nvPr/>
+        </p:nvSpPr>
+        <p:spPr>
+          <a:xfrm>
+            <a:off x="1051560" y="2743200"/>
+            <a:ext cx="2345436" cy="914400"/>
+          </a:xfrm>
+          <a:prstGeom prst="rect">
+            <a:avLst/>
+          </a:prstGeom>
+          <a:solidFill>
+            <a:srgbClr val="F7F7F7"/>
+          </a:solidFill>
+          <a:ln>
+            <a:noFill/>
+          </a:ln>
+        </p:spPr>
+        <p:style>
+          <a:lnRef idx="1">
+            <a:schemeClr val="accent1"/>
+          </a:lnRef>
+          <a:fillRef idx="3">
+            <a:schemeClr val="accent1"/>
+          </a:fillRef>
+          <a:effectRef idx="2">
+            <a:schemeClr val="accent1"/>
+          </a:effectRef>
+          <a:fontRef idx="minor">
+            <a:schemeClr val="lt1"/>
+          </a:fontRef>
+        </p:style>
+        <p:txBody>
+          <a:bodyPr rtlCol="0" anchor="ctr"/>
+          <a:lstStyle/>
+          <a:p>
+            <a:pPr algn="ctr"/>
+          </a:p>
+        </p:txBody>
+      </p:sp>
+      <p:sp>
+        <p:nvSpPr>
+          <p:cNvPr id="16" name="AGENT_STEP_TEXT_0"/>
+          <p:cNvSpPr txBox="1"/>
+          <p:nvPr/>
+        </p:nvSpPr>
+        <p:spPr>
+          <a:xfrm>
+            <a:off x="1124712" y="2880360"/>
+            <a:ext cx="2199132" cy="640080"/>
+          </a:xfrm>
+          <a:prstGeom prst="rect">
+            <a:avLst/>
+          </a:prstGeom>
+          <a:noFill/>
+        </p:spPr>
+        <p:txBody>
+          <a:bodyPr wrap="square" lIns="0" rIns="0" tIns="0" bIns="0" anchor="ctr">
+            <a:spAutoFit/>
+          </a:bodyPr>
+          <a:lstStyle/>
+          <a:p>
+            <a:pPr algn="ctr"/>
+            <a:r>
+              <a:rPr sz="1800" b="1" ea="Microsoft YaHei">
+                <a:solidFill>
+                  <a:srgbClr val="1E1E1E"/>
+                </a:solidFill>
+                <a:latin typeface="Microsoft YaHei"/>
+              </a:rPr>
+              <a:t>W1-W2 烧录对拍</a:t>
+            </a:r>
+          </a:p>
+        </p:txBody>
+      </p:sp>
+      <p:sp>
+        <p:nvSpPr>
+          <p:cNvPr id="17" name="AGENT_STEP_ARROW_0"/>
+          <p:cNvSpPr txBox="1"/>
+          <p:nvPr/>
+        </p:nvSpPr>
+        <p:spPr>
+          <a:xfrm>
+            <a:off x="3470148" y="2935224"/>
+            <a:ext cx="164592" cy="365760"/>
+          </a:xfrm>
+          <a:prstGeom prst="rect">
+            <a:avLst/>
+          </a:prstGeom>
+          <a:noFill/>
+        </p:spPr>
+        <p:txBody>
+          <a:bodyPr wrap="none" lIns="0" rIns="0" tIns="0" bIns="0" anchor="ctr">
+            <a:spAutoFit/>
+          </a:bodyPr>
+          <a:lstStyle/>
+          <a:p>
+            <a:pPr algn="ctr"/>
+            <a:r>
+              <a:rPr sz="2000" b="1" ea="Microsoft YaHei">
+                <a:solidFill>
+                  <a:srgbClr val="8B0D18"/>
+                </a:solidFill>
+                <a:latin typeface="Microsoft YaHei"/>
+              </a:rPr>
+              <a:t>→</a:t>
+            </a:r>
+          </a:p>
+        </p:txBody>
+      </p:sp>
+      <p:sp>
+        <p:nvSpPr>
+          <p:cNvPr id="18" name="AGENT_STEP_BOX_1"/>
+          <p:cNvSpPr/>
+          <p:nvPr/>
+        </p:nvSpPr>
+        <p:spPr>
+          <a:xfrm>
+            <a:off x="3543300" y="2743200"/>
+            <a:ext cx="2345436" cy="914400"/>
+          </a:xfrm>
+          <a:prstGeom prst="rect">
+            <a:avLst/>
+          </a:prstGeom>
+          <a:solidFill>
+            <a:srgbClr val="F7F7F7"/>
+          </a:solidFill>
+          <a:ln>
+            <a:noFill/>
+          </a:ln>
+        </p:spPr>
+        <p:style>
+          <a:lnRef idx="1">
+            <a:schemeClr val="accent1"/>
+          </a:lnRef>
+          <a:fillRef idx="3">
+            <a:schemeClr val="accent1"/>
+          </a:fillRef>
+          <a:effectRef idx="2">
+            <a:schemeClr val="accent1"/>
+          </a:effectRef>
+          <a:fontRef idx="minor">
+            <a:schemeClr val="lt1"/>
+          </a:fontRef>
+        </p:style>
+        <p:txBody>
+          <a:bodyPr rtlCol="0" anchor="ctr"/>
+          <a:lstStyle/>
+          <a:p>
+            <a:pPr algn="ctr"/>
+          </a:p>
+        </p:txBody>
+      </p:sp>
+      <p:sp>
+        <p:nvSpPr>
+          <p:cNvPr id="19" name="AGENT_STEP_TEXT_1"/>
+          <p:cNvSpPr txBox="1"/>
+          <p:nvPr/>
+        </p:nvSpPr>
+        <p:spPr>
+          <a:xfrm>
+            <a:off x="3616452" y="2880360"/>
+            <a:ext cx="2199132" cy="640080"/>
+          </a:xfrm>
+          <a:prstGeom prst="rect">
+            <a:avLst/>
+          </a:prstGeom>
+          <a:noFill/>
+        </p:spPr>
+        <p:txBody>
+          <a:bodyPr wrap="square" lIns="0" rIns="0" tIns="0" bIns="0" anchor="ctr">
+            <a:spAutoFit/>
+          </a:bodyPr>
+          <a:lstStyle/>
+          <a:p>
+            <a:pPr algn="ctr"/>
+            <a:r>
+              <a:rPr sz="1800" b="1" ea="Microsoft YaHei">
+                <a:solidFill>
+                  <a:srgbClr val="1E1E1E"/>
+                </a:solidFill>
+                <a:latin typeface="Microsoft YaHei"/>
+              </a:rPr>
+              <a:t>W3-W4 链路测试</a:t>
+            </a:r>
+          </a:p>
+        </p:txBody>
+      </p:sp>
+      <p:sp>
+        <p:nvSpPr>
+          <p:cNvPr id="20" name="AGENT_STEP_ARROW_1"/>
+          <p:cNvSpPr txBox="1"/>
+          <p:nvPr/>
+        </p:nvSpPr>
+        <p:spPr>
+          <a:xfrm>
+            <a:off x="5961888" y="2935224"/>
+            <a:ext cx="164592" cy="365760"/>
+          </a:xfrm>
+          <a:prstGeom prst="rect">
+            <a:avLst/>
+          </a:prstGeom>
+          <a:noFill/>
+        </p:spPr>
+        <p:txBody>
+          <a:bodyPr wrap="none" lIns="0" rIns="0" tIns="0" bIns="0" anchor="ctr">
+            <a:spAutoFit/>
+          </a:bodyPr>
+          <a:lstStyle/>
+          <a:p>
+            <a:pPr algn="ctr"/>
+            <a:r>
+              <a:rPr sz="2000" b="1" ea="Microsoft YaHei">
+                <a:solidFill>
+                  <a:srgbClr val="8B0D18"/>
+                </a:solidFill>
+                <a:latin typeface="Microsoft YaHei"/>
+              </a:rPr>
+              <a:t>→</a:t>
+            </a:r>
+          </a:p>
+        </p:txBody>
+      </p:sp>
+      <p:sp>
+        <p:nvSpPr>
+          <p:cNvPr id="21" name="AGENT_STEP_BOX_2"/>
+          <p:cNvSpPr/>
+          <p:nvPr/>
+        </p:nvSpPr>
+        <p:spPr>
+          <a:xfrm>
+            <a:off x="6035040" y="2743200"/>
+            <a:ext cx="2345436" cy="914400"/>
+          </a:xfrm>
+          <a:prstGeom prst="rect">
+            <a:avLst/>
+          </a:prstGeom>
+          <a:solidFill>
+            <a:srgbClr val="F7F7F7"/>
+          </a:solidFill>
+          <a:ln>
+            <a:noFill/>
+          </a:ln>
+        </p:spPr>
+        <p:style>
+          <a:lnRef idx="1">
+            <a:schemeClr val="accent1"/>
+          </a:lnRef>
+          <a:fillRef idx="3">
+            <a:schemeClr val="accent1"/>
+          </a:fillRef>
+          <a:effectRef idx="2">
+            <a:schemeClr val="accent1"/>
+          </a:effectRef>
+          <a:fontRef idx="minor">
+            <a:schemeClr val="lt1"/>
+          </a:fontRef>
+        </p:style>
+        <p:txBody>
+          <a:bodyPr rtlCol="0" anchor="ctr"/>
+          <a:lstStyle/>
+          <a:p>
+            <a:pPr algn="ctr"/>
+          </a:p>
+        </p:txBody>
+      </p:sp>
+      <p:sp>
+        <p:nvSpPr>
+          <p:cNvPr id="22" name="AGENT_STEP_TEXT_2"/>
+          <p:cNvSpPr txBox="1"/>
+          <p:nvPr/>
+        </p:nvSpPr>
+        <p:spPr>
+          <a:xfrm>
+            <a:off x="6108192" y="2880360"/>
+            <a:ext cx="2199132" cy="640080"/>
+          </a:xfrm>
+          <a:prstGeom prst="rect">
+            <a:avLst/>
+          </a:prstGeom>
+          <a:noFill/>
+        </p:spPr>
+        <p:txBody>
+          <a:bodyPr wrap="square" lIns="0" rIns="0" tIns="0" bIns="0" anchor="ctr">
+            <a:spAutoFit/>
+          </a:bodyPr>
+          <a:lstStyle/>
+          <a:p>
+            <a:pPr algn="ctr"/>
+            <a:r>
+              <a:rPr sz="1800" b="1" ea="Microsoft YaHei">
+                <a:solidFill>
+                  <a:srgbClr val="1E1E1E"/>
+                </a:solidFill>
+                <a:latin typeface="Microsoft YaHei"/>
+              </a:rPr>
+              <a:t>W5-W6 采样微调</a:t>
+            </a:r>
+          </a:p>
+        </p:txBody>
+      </p:sp>
+      <p:sp>
+        <p:nvSpPr>
+          <p:cNvPr id="23" name="AGENT_STEP_ARROW_2"/>
+          <p:cNvSpPr txBox="1"/>
+          <p:nvPr/>
+        </p:nvSpPr>
+        <p:spPr>
+          <a:xfrm>
+            <a:off x="8453628" y="2935224"/>
+            <a:ext cx="164592" cy="365760"/>
+          </a:xfrm>
+          <a:prstGeom prst="rect">
+            <a:avLst/>
+          </a:prstGeom>
+          <a:noFill/>
+        </p:spPr>
+        <p:txBody>
+          <a:bodyPr wrap="none" lIns="0" rIns="0" tIns="0" bIns="0" anchor="ctr">
+            <a:spAutoFit/>
+          </a:bodyPr>
+          <a:lstStyle/>
+          <a:p>
+            <a:pPr algn="ctr"/>
+            <a:r>
+              <a:rPr sz="2000" b="1" ea="Microsoft YaHei">
+                <a:solidFill>
+                  <a:srgbClr val="8B0D18"/>
+                </a:solidFill>
+                <a:latin typeface="Microsoft YaHei"/>
+              </a:rPr>
+              <a:t>→</a:t>
+            </a:r>
+          </a:p>
+        </p:txBody>
+      </p:sp>
+      <p:sp>
+        <p:nvSpPr>
+          <p:cNvPr id="24" name="AGENT_STEP_BOX_3"/>
+          <p:cNvSpPr/>
+          <p:nvPr/>
+        </p:nvSpPr>
+        <p:spPr>
+          <a:xfrm>
+            <a:off x="8526780" y="2743200"/>
+            <a:ext cx="2345436" cy="914400"/>
+          </a:xfrm>
+          <a:prstGeom prst="rect">
+            <a:avLst/>
+          </a:prstGeom>
+          <a:solidFill>
+            <a:srgbClr val="F7F7F7"/>
+          </a:solidFill>
+          <a:ln>
+            <a:noFill/>
+          </a:ln>
+        </p:spPr>
+        <p:style>
+          <a:lnRef idx="1">
+            <a:schemeClr val="accent1"/>
+          </a:lnRef>
+          <a:fillRef idx="3">
+            <a:schemeClr val="accent1"/>
+          </a:fillRef>
+          <a:effectRef idx="2">
+            <a:schemeClr val="accent1"/>
+          </a:effectRef>
+          <a:fontRef idx="minor">
+            <a:schemeClr val="lt1"/>
+          </a:fontRef>
+        </p:style>
+        <p:txBody>
+          <a:bodyPr rtlCol="0" anchor="ctr"/>
+          <a:lstStyle/>
+          <a:p>
+            <a:pPr algn="ctr"/>
+          </a:p>
+        </p:txBody>
+      </p:sp>
+      <p:sp>
+        <p:nvSpPr>
+          <p:cNvPr id="25" name="AGENT_STEP_TEXT_3"/>
+          <p:cNvSpPr txBox="1"/>
+          <p:nvPr/>
+        </p:nvSpPr>
+        <p:spPr>
+          <a:xfrm>
+            <a:off x="8599932" y="2880360"/>
+            <a:ext cx="2199132" cy="640080"/>
+          </a:xfrm>
+          <a:prstGeom prst="rect">
+            <a:avLst/>
+          </a:prstGeom>
+          <a:noFill/>
+        </p:spPr>
+        <p:txBody>
+          <a:bodyPr wrap="square" lIns="0" rIns="0" tIns="0" bIns="0" anchor="ctr">
+            <a:spAutoFit/>
+          </a:bodyPr>
+          <a:lstStyle/>
+          <a:p>
+            <a:pPr algn="ctr"/>
+            <a:r>
+              <a:rPr sz="1800" b="1" ea="Microsoft YaHei">
+                <a:solidFill>
+                  <a:srgbClr val="1E1E1E"/>
+                </a:solidFill>
+                <a:latin typeface="Microsoft YaHei"/>
+              </a:rPr>
+              <a:t>W7 起田间联调</a:t>
+            </a:r>
+          </a:p>
+        </p:txBody>
+      </p:sp>
+      <p:sp>
+        <p:nvSpPr>
+          <p:cNvPr id="26" name="AGENT_BODY"/>
+          <p:cNvSpPr txBox="1"/>
+          <p:nvPr/>
+        </p:nvSpPr>
+        <p:spPr>
+          <a:xfrm>
+            <a:off x="1005840" y="4251960"/>
+            <a:ext cx="9966960" cy="1051560"/>
+          </a:xfrm>
+          <a:prstGeom prst="rect">
+            <a:avLst/>
+          </a:prstGeom>
+          <a:noFill/>
+        </p:spPr>
+        <p:txBody>
+          <a:bodyPr wrap="square" lIns="0" rIns="0" tIns="0" bIns="0" anchor="ctr">
+            <a:spAutoFit/>
+          </a:bodyPr>
+          <a:lstStyle/>
+          <a:p>
+            <a:pPr algn="l"/>
+            <a:r>
+              <a:rPr sz="1800" b="0" ea="Microsoft YaHei">
+                <a:solidFill>
+                  <a:srgbClr val="1E1E1E"/>
+                </a:solidFill>
+                <a:latin typeface="Microsoft YaHei"/>
+              </a:rPr>
+              <a:t>1. 机械收尾与整机装配并行
+2. 安全清单逐项验证后下田</a:t>
+            </a:r>
+          </a:p>
+        </p:txBody>
+      </p:sp>
+    </p:spTree>
+  </p:cSld>
+  <p:clrMapOvr>
+    <a:masterClrMapping/>
+  </p:clrMapOvr>
+</p:sld>
+</file>
+
+<file path=ppt/slides/slide18.xml><?xml version="1.0" encoding="utf-8"?>
+<p:sld xmlns:a="http://schemas.openxmlformats.org/drawingml/2006/main" xmlns:p="http://schemas.openxmlformats.org/presentationml/2006/main" xmlns:r="http://schemas.openxmlformats.org/officeDocument/2006/relationships">
+  <p:cSld>
+    <p:spTree>
+      <p:nvGrpSpPr>
+        <p:cNvPr id="1" name=""/>
+        <p:cNvGrpSpPr/>
+        <p:nvPr/>
+      </p:nvGrpSpPr>
+      <p:grpSpPr/>
+      <p:sp>
+        <p:nvSpPr>
           <p:cNvPr id="2" name="AGENT_CLOSING"/>
           <p:cNvSpPr txBox="1"/>
           <p:nvPr/>
@@ -8716,7 +11884,7 @@
                 </a:solidFill>
                 <a:latin typeface="Microsoft YaHei"/>
               </a:rPr>
-              <a:t>四个关键决策均已论证并固化为设计基线</a:t>
+              <a:t>任务边界与刀头：每个选择都来自机理排除</a:t>
             </a:r>
           </a:p>
         </p:txBody>
@@ -8794,7 +11962,7 @@
                 </a:solidFill>
                 <a:latin typeface="Microsoft YaHei"/>
               </a:rPr>
-              <a:t>刀头</a:t>
+              <a:t>只做行间</a:t>
             </a:r>
           </a:p>
         </p:txBody>
@@ -8829,7 +11997,7 @@
                 </a:solidFill>
                 <a:latin typeface="Microsoft YaHei"/>
               </a:rPr>
-              <a:t>鸭掌铲主选 + 弹齿对比：除草率与伤苗率的权衡</a:t>
+              <a:t>株间单株识别是行业未解难题，行墙边界把问题难度降一量级</a:t>
             </a:r>
           </a:p>
         </p:txBody>
@@ -8907,7 +12075,7 @@
                 </a:solidFill>
                 <a:latin typeface="Microsoft YaHei"/>
               </a:rPr>
-              <a:t>算力</a:t>
+              <a:t>机械中耕</a:t>
             </a:r>
           </a:p>
         </p:txBody>
@@ -8942,7 +12110,7 @@
                 </a:solidFill>
                 <a:latin typeface="Microsoft YaHei"/>
               </a:rPr>
-              <a:t>PC 集中计算：一期固定算力变量，验证方法本身</a:t>
+              <a:t>零农残是硬约束，化学排除；激光/机械臂撑不起 3 亩/日效率</a:t>
             </a:r>
           </a:p>
         </p:txBody>
@@ -9020,7 +12188,7 @@
                 </a:solidFill>
                 <a:latin typeface="Microsoft YaHei"/>
               </a:rPr>
-              <a:t>线控</a:t>
+              <a:t>鸭掌铲主选</a:t>
             </a:r>
           </a:p>
         </p:txBody>
@@ -9055,7 +12223,7 @@
                 </a:solidFill>
                 <a:latin typeface="Microsoft YaHei"/>
               </a:rPr>
-              <a:t>固件 SBUS/UDP 双指令源：遥控保留为备份通道</a:t>
+              <a:t>切根+阻力小+有文献支撑；圆盘/旋转锄等 6 种按机理排除</a:t>
             </a:r>
           </a:p>
         </p:txBody>
@@ -9133,7 +12301,7 @@
                 </a:solidFill>
                 <a:latin typeface="Microsoft YaHei"/>
               </a:rPr>
-              <a:t>运动学</a:t>
+              <a:t>弹齿对比</a:t>
             </a:r>
           </a:p>
         </p:txBody>
@@ -9168,7 +12336,7 @@
                 </a:solidFill>
                 <a:latin typeface="Microsoft YaHei"/>
               </a:rPr>
-              <a:t>四轮差速滑移转向：与实车四轮独立驱动一致</a:t>
+              <a:t>伤苗低与鸭掌铲构成除草率-伤苗率权衡，为论文提供数据张力</a:t>
             </a:r>
           </a:p>
         </p:txBody>
@@ -9286,86 +12454,6 @@
             <a:avLst/>
           </a:prstGeom>
           <a:solidFill>
-            <a:srgbClr val="FFFFFF"/>
-          </a:solidFill>
-          <a:ln w="10160">
-            <a:solidFill>
-              <a:srgbClr val="BEBEBE"/>
-            </a:solidFill>
-          </a:ln>
-        </p:spPr>
-        <p:style>
-          <a:lnRef idx="1">
-            <a:schemeClr val="accent1"/>
-          </a:lnRef>
-          <a:fillRef idx="3">
-            <a:schemeClr val="accent1"/>
-          </a:fillRef>
-          <a:effectRef idx="2">
-            <a:schemeClr val="accent1"/>
-          </a:effectRef>
-          <a:fontRef idx="minor">
-            <a:schemeClr val="lt1"/>
-          </a:fontRef>
-        </p:style>
-        <p:txBody>
-          <a:bodyPr rtlCol="0" anchor="ctr"/>
-          <a:lstStyle/>
-          <a:p>
-            <a:pPr algn="ctr"/>
-          </a:p>
-        </p:txBody>
-      </p:sp>
-      <p:sp>
-        <p:nvSpPr>
-          <p:cNvPr id="5" name="AGENT_NAV_LABEL_1"/>
-          <p:cNvSpPr txBox="1"/>
-          <p:nvPr/>
-        </p:nvSpPr>
-        <p:spPr>
-          <a:xfrm>
-            <a:off x="2525572" y="59436"/>
-            <a:ext cx="2379268" cy="228600"/>
-          </a:xfrm>
-          <a:prstGeom prst="rect">
-            <a:avLst/>
-          </a:prstGeom>
-          <a:noFill/>
-        </p:spPr>
-        <p:txBody>
-          <a:bodyPr wrap="none" lIns="0" rIns="0" tIns="0" bIns="0" anchor="ctr">
-            <a:spAutoFit/>
-          </a:bodyPr>
-          <a:lstStyle/>
-          <a:p>
-            <a:pPr algn="ctr"/>
-            <a:r>
-              <a:rPr sz="1200" b="0" ea="Microsoft YaHei">
-                <a:solidFill>
-                  <a:srgbClr val="1E1E1E"/>
-                </a:solidFill>
-                <a:latin typeface="Microsoft YaHei"/>
-              </a:rPr>
-              <a:t>总体方案</a:t>
-            </a:r>
-          </a:p>
-        </p:txBody>
-      </p:sp>
-      <p:sp>
-        <p:nvSpPr>
-          <p:cNvPr id="6" name="AGENT_NAV_SLOT_2"/>
-          <p:cNvSpPr/>
-          <p:nvPr/>
-        </p:nvSpPr>
-        <p:spPr>
-          <a:xfrm>
-            <a:off x="4904841" y="27432"/>
-            <a:ext cx="2379268" cy="347472"/>
-          </a:xfrm>
-          <a:prstGeom prst="rect">
-            <a:avLst/>
-          </a:prstGeom>
-          <a:solidFill>
             <a:srgbClr val="8B0D18"/>
           </a:solidFill>
           <a:ln w="10160">
@@ -9398,13 +12486,13 @@
       </p:sp>
       <p:sp>
         <p:nvSpPr>
-          <p:cNvPr id="7" name="AGENT_NAV_LABEL_2"/>
-          <p:cNvSpPr txBox="1"/>
-          <p:nvPr/>
-        </p:nvSpPr>
-        <p:spPr>
-          <a:xfrm>
-            <a:off x="4904841" y="59436"/>
+          <p:cNvPr id="5" name="AGENT_NAV_LABEL_1"/>
+          <p:cNvSpPr txBox="1"/>
+          <p:nvPr/>
+        </p:nvSpPr>
+        <p:spPr>
+          <a:xfrm>
+            <a:off x="2525572" y="59436"/>
             <a:ext cx="2379268" cy="228600"/>
           </a:xfrm>
           <a:prstGeom prst="rect">
@@ -9426,20 +12514,20 @@
                 </a:solidFill>
                 <a:latin typeface="Microsoft YaHei"/>
               </a:rPr>
-              <a:t>理论方法</a:t>
-            </a:r>
-          </a:p>
-        </p:txBody>
-      </p:sp>
-      <p:sp>
-        <p:nvSpPr>
-          <p:cNvPr id="8" name="AGENT_NAV_SLOT_3"/>
+              <a:t>总体方案</a:t>
+            </a:r>
+          </a:p>
+        </p:txBody>
+      </p:sp>
+      <p:sp>
+        <p:nvSpPr>
+          <p:cNvPr id="6" name="AGENT_NAV_SLOT_2"/>
           <p:cNvSpPr/>
           <p:nvPr/>
         </p:nvSpPr>
         <p:spPr>
           <a:xfrm>
-            <a:off x="7284110" y="27432"/>
+            <a:off x="4904841" y="27432"/>
             <a:ext cx="2379268" cy="347472"/>
           </a:xfrm>
           <a:prstGeom prst="rect">
@@ -9478,13 +12566,13 @@
       </p:sp>
       <p:sp>
         <p:nvSpPr>
-          <p:cNvPr id="9" name="AGENT_NAV_LABEL_3"/>
-          <p:cNvSpPr txBox="1"/>
-          <p:nvPr/>
-        </p:nvSpPr>
-        <p:spPr>
-          <a:xfrm>
-            <a:off x="7284110" y="59436"/>
+          <p:cNvPr id="7" name="AGENT_NAV_LABEL_2"/>
+          <p:cNvSpPr txBox="1"/>
+          <p:nvPr/>
+        </p:nvSpPr>
+        <p:spPr>
+          <a:xfrm>
+            <a:off x="4904841" y="59436"/>
             <a:ext cx="2379268" cy="228600"/>
           </a:xfrm>
           <a:prstGeom prst="rect">
@@ -9506,20 +12594,20 @@
                 </a:solidFill>
                 <a:latin typeface="Microsoft YaHei"/>
               </a:rPr>
-              <a:t>试验设计</a:t>
-            </a:r>
-          </a:p>
-        </p:txBody>
-      </p:sp>
-      <p:sp>
-        <p:nvSpPr>
-          <p:cNvPr id="10" name="AGENT_NAV_SLOT_4"/>
+              <a:t>理论方法</a:t>
+            </a:r>
+          </a:p>
+        </p:txBody>
+      </p:sp>
+      <p:sp>
+        <p:nvSpPr>
+          <p:cNvPr id="8" name="AGENT_NAV_SLOT_3"/>
           <p:cNvSpPr/>
           <p:nvPr/>
         </p:nvSpPr>
         <p:spPr>
           <a:xfrm>
-            <a:off x="9663379" y="27432"/>
+            <a:off x="7284110" y="27432"/>
             <a:ext cx="2379268" cy="347472"/>
           </a:xfrm>
           <a:prstGeom prst="rect">
@@ -9558,13 +12646,13 @@
       </p:sp>
       <p:sp>
         <p:nvSpPr>
-          <p:cNvPr id="11" name="AGENT_NAV_LABEL_4"/>
-          <p:cNvSpPr txBox="1"/>
-          <p:nvPr/>
-        </p:nvSpPr>
-        <p:spPr>
-          <a:xfrm>
-            <a:off x="9663379" y="59436"/>
+          <p:cNvPr id="9" name="AGENT_NAV_LABEL_3"/>
+          <p:cNvSpPr txBox="1"/>
+          <p:nvPr/>
+        </p:nvSpPr>
+        <p:spPr>
+          <a:xfrm>
+            <a:off x="7284110" y="59436"/>
             <a:ext cx="2379268" cy="228600"/>
           </a:xfrm>
           <a:prstGeom prst="rect">
@@ -9586,128 +12674,23 @@
                 </a:solidFill>
                 <a:latin typeface="Microsoft YaHei"/>
               </a:rPr>
-              <a:t>进度与计划</a:t>
-            </a:r>
-          </a:p>
-        </p:txBody>
-      </p:sp>
-      <p:sp>
-        <p:nvSpPr>
-          <p:cNvPr id="12" name="AGENT_FOOTER"/>
-          <p:cNvSpPr txBox="1"/>
-          <p:nvPr/>
-        </p:nvSpPr>
-        <p:spPr>
-          <a:xfrm>
-            <a:off x="320040" y="6510528"/>
-            <a:ext cx="8595360" cy="128016"/>
-          </a:xfrm>
-          <a:prstGeom prst="rect">
-            <a:avLst/>
-          </a:prstGeom>
-          <a:noFill/>
-        </p:spPr>
-        <p:txBody>
-          <a:bodyPr wrap="none" lIns="0" rIns="0" tIns="0" bIns="0" anchor="ctr">
-            <a:spAutoFit/>
-          </a:bodyPr>
-          <a:lstStyle/>
-          <a:p>
-            <a:pPr algn="l"/>
-            <a:r>
-              <a:rPr sz="800" b="0" ea="Microsoft YaHei">
-                <a:solidFill>
-                  <a:srgbClr val="696969"/>
-                </a:solidFill>
-                <a:latin typeface="Microsoft YaHei"/>
-              </a:rPr>
-              <a:t>纯视觉芍药行间除草机器人 · 组会进展汇报 · 2026-09-07</a:t>
-            </a:r>
-          </a:p>
-        </p:txBody>
-      </p:sp>
-      <p:sp>
-        <p:nvSpPr>
-          <p:cNvPr id="13" name="AGENT_PAGE_NUMBER"/>
-          <p:cNvSpPr txBox="1"/>
-          <p:nvPr/>
-        </p:nvSpPr>
-        <p:spPr>
-          <a:xfrm>
-            <a:off x="11521440" y="6501384"/>
-            <a:ext cx="256032" cy="128016"/>
-          </a:xfrm>
-          <a:prstGeom prst="rect">
-            <a:avLst/>
-          </a:prstGeom>
-          <a:noFill/>
-        </p:spPr>
-        <p:txBody>
-          <a:bodyPr wrap="none" lIns="0" rIns="0" tIns="0" bIns="0" anchor="ctr">
-            <a:spAutoFit/>
-          </a:bodyPr>
-          <a:lstStyle/>
-          <a:p>
-            <a:pPr algn="r"/>
-            <a:r>
-              <a:rPr sz="800" b="0" ea="Microsoft YaHei">
-                <a:solidFill>
-                  <a:srgbClr val="696969"/>
-                </a:solidFill>
-                <a:latin typeface="Microsoft YaHei"/>
-              </a:rPr>
-              <a:t>5</a:t>
-            </a:r>
-          </a:p>
-        </p:txBody>
-      </p:sp>
-      <p:sp>
-        <p:nvSpPr>
-          <p:cNvPr id="14" name="AGENT_TITLE"/>
-          <p:cNvSpPr txBox="1"/>
-          <p:nvPr/>
-        </p:nvSpPr>
-        <p:spPr>
-          <a:xfrm>
-            <a:off x="320040" y="539496"/>
-            <a:ext cx="11292840" cy="493776"/>
-          </a:xfrm>
-          <a:prstGeom prst="rect">
-            <a:avLst/>
-          </a:prstGeom>
-          <a:noFill/>
-        </p:spPr>
-        <p:txBody>
-          <a:bodyPr wrap="square" lIns="0" rIns="0" tIns="0" bIns="0" anchor="ctr">
-            <a:spAutoFit/>
-          </a:bodyPr>
-          <a:lstStyle/>
-          <a:p>
-            <a:pPr algn="l"/>
-            <a:r>
-              <a:rPr sz="3000" b="0" ea="Microsoft YaHei">
-                <a:solidFill>
-                  <a:srgbClr val="8B0D18"/>
-                </a:solidFill>
-                <a:latin typeface="Microsoft YaHei"/>
-              </a:rPr>
-              <a:t>理论一：单目视觉双墙约束的对行方法</a:t>
-            </a:r>
-          </a:p>
-        </p:txBody>
-      </p:sp>
-      <p:sp>
-        <p:nvSpPr>
-          <p:cNvPr id="15" name="AGENT_TEXT_PANEL"/>
+              <a:t>试验设计</a:t>
+            </a:r>
+          </a:p>
+        </p:txBody>
+      </p:sp>
+      <p:sp>
+        <p:nvSpPr>
+          <p:cNvPr id="10" name="AGENT_NAV_SLOT_4"/>
           <p:cNvSpPr/>
           <p:nvPr/>
         </p:nvSpPr>
         <p:spPr>
           <a:xfrm>
-            <a:off x="685800" y="1417320"/>
-            <a:ext cx="10835640" cy="4434840"/>
-          </a:xfrm>
-          <a:prstGeom prst="roundRect">
+            <a:off x="9663379" y="27432"/>
+            <a:ext cx="2379268" cy="347472"/>
+          </a:xfrm>
+          <a:prstGeom prst="rect">
             <a:avLst/>
           </a:prstGeom>
           <a:solidFill>
@@ -9743,14 +12726,119 @@
       </p:sp>
       <p:sp>
         <p:nvSpPr>
-          <p:cNvPr id="16" name="AGENT_BODY"/>
-          <p:cNvSpPr txBox="1"/>
-          <p:nvPr/>
-        </p:nvSpPr>
-        <p:spPr>
-          <a:xfrm>
-            <a:off x="960120" y="1664208"/>
-            <a:ext cx="10287000" cy="3931920"/>
+          <p:cNvPr id="11" name="AGENT_NAV_LABEL_4"/>
+          <p:cNvSpPr txBox="1"/>
+          <p:nvPr/>
+        </p:nvSpPr>
+        <p:spPr>
+          <a:xfrm>
+            <a:off x="9663379" y="59436"/>
+            <a:ext cx="2379268" cy="228600"/>
+          </a:xfrm>
+          <a:prstGeom prst="rect">
+            <a:avLst/>
+          </a:prstGeom>
+          <a:noFill/>
+        </p:spPr>
+        <p:txBody>
+          <a:bodyPr wrap="none" lIns="0" rIns="0" tIns="0" bIns="0" anchor="ctr">
+            <a:spAutoFit/>
+          </a:bodyPr>
+          <a:lstStyle/>
+          <a:p>
+            <a:pPr algn="ctr"/>
+            <a:r>
+              <a:rPr sz="1200" b="0" ea="Microsoft YaHei">
+                <a:solidFill>
+                  <a:srgbClr val="1E1E1E"/>
+                </a:solidFill>
+                <a:latin typeface="Microsoft YaHei"/>
+              </a:rPr>
+              <a:t>进度与计划</a:t>
+            </a:r>
+          </a:p>
+        </p:txBody>
+      </p:sp>
+      <p:sp>
+        <p:nvSpPr>
+          <p:cNvPr id="12" name="AGENT_FOOTER"/>
+          <p:cNvSpPr txBox="1"/>
+          <p:nvPr/>
+        </p:nvSpPr>
+        <p:spPr>
+          <a:xfrm>
+            <a:off x="320040" y="6510528"/>
+            <a:ext cx="8595360" cy="128016"/>
+          </a:xfrm>
+          <a:prstGeom prst="rect">
+            <a:avLst/>
+          </a:prstGeom>
+          <a:noFill/>
+        </p:spPr>
+        <p:txBody>
+          <a:bodyPr wrap="none" lIns="0" rIns="0" tIns="0" bIns="0" anchor="ctr">
+            <a:spAutoFit/>
+          </a:bodyPr>
+          <a:lstStyle/>
+          <a:p>
+            <a:pPr algn="l"/>
+            <a:r>
+              <a:rPr sz="800" b="0" ea="Microsoft YaHei">
+                <a:solidFill>
+                  <a:srgbClr val="696969"/>
+                </a:solidFill>
+                <a:latin typeface="Microsoft YaHei"/>
+              </a:rPr>
+              <a:t>纯视觉芍药行间除草机器人 · 组会进展汇报 · 2026-09-07</a:t>
+            </a:r>
+          </a:p>
+        </p:txBody>
+      </p:sp>
+      <p:sp>
+        <p:nvSpPr>
+          <p:cNvPr id="13" name="AGENT_PAGE_NUMBER"/>
+          <p:cNvSpPr txBox="1"/>
+          <p:nvPr/>
+        </p:nvSpPr>
+        <p:spPr>
+          <a:xfrm>
+            <a:off x="11521440" y="6501384"/>
+            <a:ext cx="256032" cy="128016"/>
+          </a:xfrm>
+          <a:prstGeom prst="rect">
+            <a:avLst/>
+          </a:prstGeom>
+          <a:noFill/>
+        </p:spPr>
+        <p:txBody>
+          <a:bodyPr wrap="none" lIns="0" rIns="0" tIns="0" bIns="0" anchor="ctr">
+            <a:spAutoFit/>
+          </a:bodyPr>
+          <a:lstStyle/>
+          <a:p>
+            <a:pPr algn="r"/>
+            <a:r>
+              <a:rPr sz="800" b="0" ea="Microsoft YaHei">
+                <a:solidFill>
+                  <a:srgbClr val="696969"/>
+                </a:solidFill>
+                <a:latin typeface="Microsoft YaHei"/>
+              </a:rPr>
+              <a:t>5</a:t>
+            </a:r>
+          </a:p>
+        </p:txBody>
+      </p:sp>
+      <p:sp>
+        <p:nvSpPr>
+          <p:cNvPr id="14" name="AGENT_TITLE"/>
+          <p:cNvSpPr txBox="1"/>
+          <p:nvPr/>
+        </p:nvSpPr>
+        <p:spPr>
+          <a:xfrm>
+            <a:off x="320040" y="539496"/>
+            <a:ext cx="11292840" cy="493776"/>
           </a:xfrm>
           <a:prstGeom prst="rect">
             <a:avLst/>
@@ -9765,17 +12853,465 @@
           <a:p>
             <a:pPr algn="l"/>
             <a:r>
-              <a:rPr sz="2000" b="0" ea="Microsoft YaHei">
+              <a:rPr sz="3000" b="0" ea="Microsoft YaHei">
+                <a:solidFill>
+                  <a:srgbClr val="8B0D18"/>
+                </a:solidFill>
+                <a:latin typeface="Microsoft YaHei"/>
+              </a:rPr>
+              <a:t>算力与线控：分层解耦，遥控物理独立作备份</a:t>
+            </a:r>
+          </a:p>
+        </p:txBody>
+      </p:sp>
+      <p:sp>
+        <p:nvSpPr>
+          <p:cNvPr id="15" name="AGENT_SUMMARY_LINE_0"/>
+          <p:cNvSpPr/>
+          <p:nvPr/>
+        </p:nvSpPr>
+        <p:spPr>
+          <a:xfrm>
+            <a:off x="868680" y="1417320"/>
+            <a:ext cx="10378440" cy="10972"/>
+          </a:xfrm>
+          <a:prstGeom prst="rect">
+            <a:avLst/>
+          </a:prstGeom>
+          <a:solidFill>
+            <a:srgbClr val="8B0D18"/>
+          </a:solidFill>
+          <a:ln>
+            <a:noFill/>
+          </a:ln>
+        </p:spPr>
+        <p:style>
+          <a:lnRef idx="1">
+            <a:schemeClr val="accent1"/>
+          </a:lnRef>
+          <a:fillRef idx="3">
+            <a:schemeClr val="accent1"/>
+          </a:fillRef>
+          <a:effectRef idx="2">
+            <a:schemeClr val="accent1"/>
+          </a:effectRef>
+          <a:fontRef idx="minor">
+            <a:schemeClr val="lt1"/>
+          </a:fontRef>
+        </p:style>
+        <p:txBody>
+          <a:bodyPr rtlCol="0" anchor="ctr"/>
+          <a:lstStyle/>
+          <a:p>
+            <a:pPr algn="ctr"/>
+          </a:p>
+        </p:txBody>
+      </p:sp>
+      <p:sp>
+        <p:nvSpPr>
+          <p:cNvPr id="16" name="AGENT_SUMMARY_LABEL_0"/>
+          <p:cNvSpPr txBox="1"/>
+          <p:nvPr/>
+        </p:nvSpPr>
+        <p:spPr>
+          <a:xfrm>
+            <a:off x="960120" y="1527048"/>
+            <a:ext cx="1828800" cy="898398"/>
+          </a:xfrm>
+          <a:prstGeom prst="rect">
+            <a:avLst/>
+          </a:prstGeom>
+          <a:noFill/>
+        </p:spPr>
+        <p:txBody>
+          <a:bodyPr wrap="square" lIns="0" rIns="0" tIns="0" bIns="0" anchor="ctr">
+            <a:spAutoFit/>
+          </a:bodyPr>
+          <a:lstStyle/>
+          <a:p>
+            <a:pPr algn="l"/>
+            <a:r>
+              <a:rPr sz="1900" b="1" ea="Microsoft YaHei">
+                <a:solidFill>
+                  <a:srgbClr val="8B0D18"/>
+                </a:solidFill>
+                <a:latin typeface="Microsoft YaHei"/>
+              </a:rPr>
+              <a:t>PC 集中</a:t>
+            </a:r>
+          </a:p>
+        </p:txBody>
+      </p:sp>
+      <p:sp>
+        <p:nvSpPr>
+          <p:cNvPr id="17" name="AGENT_SUMMARY_VALUE_0"/>
+          <p:cNvSpPr txBox="1"/>
+          <p:nvPr/>
+        </p:nvSpPr>
+        <p:spPr>
+          <a:xfrm>
+            <a:off x="2926080" y="1527048"/>
+            <a:ext cx="7909560" cy="898398"/>
+          </a:xfrm>
+          <a:prstGeom prst="rect">
+            <a:avLst/>
+          </a:prstGeom>
+          <a:noFill/>
+        </p:spPr>
+        <p:txBody>
+          <a:bodyPr wrap="square" lIns="0" rIns="0" tIns="0" bIns="0" anchor="ctr">
+            <a:spAutoFit/>
+          </a:bodyPr>
+          <a:lstStyle/>
+          <a:p>
+            <a:pPr algn="l"/>
+            <a:r>
+              <a:rPr sz="1800" b="0" ea="Microsoft YaHei">
                 <a:solidFill>
                   <a:srgbClr val="1E1E1E"/>
                 </a:solidFill>
                 <a:latin typeface="Microsoft YaHei"/>
               </a:rPr>
-              <a:t>1. 分割出左右行墙，各自最小二乘拟合 x = a·y + b
-2. 中心线取两墙加权中点，权重按拟合内点率门控
-3. 遮挡场景引入像素密度偏置，改用按行投票裁剪拟合
-4. 消融验证：稠密遮挡下中心线误差 25.5px 降至 0.5px
-5. 远场中心线供底盘导航，近场供中间刀，双预视点分工</a:t>
+              <a:t>一期固定算力变量验证方法；真实链路即研究内容的一部分</a:t>
+            </a:r>
+          </a:p>
+        </p:txBody>
+      </p:sp>
+      <p:sp>
+        <p:nvSpPr>
+          <p:cNvPr id="18" name="AGENT_SUMMARY_LINE_1"/>
+          <p:cNvSpPr/>
+          <p:nvPr/>
+        </p:nvSpPr>
+        <p:spPr>
+          <a:xfrm>
+            <a:off x="868680" y="2480310"/>
+            <a:ext cx="10378440" cy="10972"/>
+          </a:xfrm>
+          <a:prstGeom prst="rect">
+            <a:avLst/>
+          </a:prstGeom>
+          <a:solidFill>
+            <a:srgbClr val="8B0D18"/>
+          </a:solidFill>
+          <a:ln>
+            <a:noFill/>
+          </a:ln>
+        </p:spPr>
+        <p:style>
+          <a:lnRef idx="1">
+            <a:schemeClr val="accent1"/>
+          </a:lnRef>
+          <a:fillRef idx="3">
+            <a:schemeClr val="accent1"/>
+          </a:fillRef>
+          <a:effectRef idx="2">
+            <a:schemeClr val="accent1"/>
+          </a:effectRef>
+          <a:fontRef idx="minor">
+            <a:schemeClr val="lt1"/>
+          </a:fontRef>
+        </p:style>
+        <p:txBody>
+          <a:bodyPr rtlCol="0" anchor="ctr"/>
+          <a:lstStyle/>
+          <a:p>
+            <a:pPr algn="ctr"/>
+          </a:p>
+        </p:txBody>
+      </p:sp>
+      <p:sp>
+        <p:nvSpPr>
+          <p:cNvPr id="19" name="AGENT_SUMMARY_LABEL_1"/>
+          <p:cNvSpPr txBox="1"/>
+          <p:nvPr/>
+        </p:nvSpPr>
+        <p:spPr>
+          <a:xfrm>
+            <a:off x="960120" y="2590038"/>
+            <a:ext cx="1828800" cy="898398"/>
+          </a:xfrm>
+          <a:prstGeom prst="rect">
+            <a:avLst/>
+          </a:prstGeom>
+          <a:noFill/>
+        </p:spPr>
+        <p:txBody>
+          <a:bodyPr wrap="square" lIns="0" rIns="0" tIns="0" bIns="0" anchor="ctr">
+            <a:spAutoFit/>
+          </a:bodyPr>
+          <a:lstStyle/>
+          <a:p>
+            <a:pPr algn="l"/>
+            <a:r>
+              <a:rPr sz="1900" b="1" ea="Microsoft YaHei">
+                <a:solidFill>
+                  <a:srgbClr val="8B0D18"/>
+                </a:solidFill>
+                <a:latin typeface="Microsoft YaHei"/>
+              </a:rPr>
+              <a:t>RDK 网关</a:t>
+            </a:r>
+          </a:p>
+        </p:txBody>
+      </p:sp>
+      <p:sp>
+        <p:nvSpPr>
+          <p:cNvPr id="20" name="AGENT_SUMMARY_VALUE_1"/>
+          <p:cNvSpPr txBox="1"/>
+          <p:nvPr/>
+        </p:nvSpPr>
+        <p:spPr>
+          <a:xfrm>
+            <a:off x="2926080" y="2590038"/>
+            <a:ext cx="7909560" cy="898398"/>
+          </a:xfrm>
+          <a:prstGeom prst="rect">
+            <a:avLst/>
+          </a:prstGeom>
+          <a:noFill/>
+        </p:spPr>
+        <p:txBody>
+          <a:bodyPr wrap="square" lIns="0" rIns="0" tIns="0" bIns="0" anchor="ctr">
+            <a:spAutoFit/>
+          </a:bodyPr>
+          <a:lstStyle/>
+          <a:p>
+            <a:pPr algn="l"/>
+            <a:r>
+              <a:rPr sz="1800" b="0" ea="Microsoft YaHei">
+                <a:solidFill>
+                  <a:srgbClr val="1E1E1E"/>
+                </a:solidFill>
+                <a:latin typeface="Microsoft YaHei"/>
+              </a:rPr>
+              <a:t>同价位多 10TOPS，二期感知下沉零二次采购</a:t>
+            </a:r>
+          </a:p>
+        </p:txBody>
+      </p:sp>
+      <p:sp>
+        <p:nvSpPr>
+          <p:cNvPr id="21" name="AGENT_SUMMARY_LINE_2"/>
+          <p:cNvSpPr/>
+          <p:nvPr/>
+        </p:nvSpPr>
+        <p:spPr>
+          <a:xfrm>
+            <a:off x="868680" y="3543300"/>
+            <a:ext cx="10378440" cy="10972"/>
+          </a:xfrm>
+          <a:prstGeom prst="rect">
+            <a:avLst/>
+          </a:prstGeom>
+          <a:solidFill>
+            <a:srgbClr val="8B0D18"/>
+          </a:solidFill>
+          <a:ln>
+            <a:noFill/>
+          </a:ln>
+        </p:spPr>
+        <p:style>
+          <a:lnRef idx="1">
+            <a:schemeClr val="accent1"/>
+          </a:lnRef>
+          <a:fillRef idx="3">
+            <a:schemeClr val="accent1"/>
+          </a:fillRef>
+          <a:effectRef idx="2">
+            <a:schemeClr val="accent1"/>
+          </a:effectRef>
+          <a:fontRef idx="minor">
+            <a:schemeClr val="lt1"/>
+          </a:fontRef>
+        </p:style>
+        <p:txBody>
+          <a:bodyPr rtlCol="0" anchor="ctr"/>
+          <a:lstStyle/>
+          <a:p>
+            <a:pPr algn="ctr"/>
+          </a:p>
+        </p:txBody>
+      </p:sp>
+      <p:sp>
+        <p:nvSpPr>
+          <p:cNvPr id="22" name="AGENT_SUMMARY_LABEL_2"/>
+          <p:cNvSpPr txBox="1"/>
+          <p:nvPr/>
+        </p:nvSpPr>
+        <p:spPr>
+          <a:xfrm>
+            <a:off x="960120" y="3653028"/>
+            <a:ext cx="1828800" cy="898398"/>
+          </a:xfrm>
+          <a:prstGeom prst="rect">
+            <a:avLst/>
+          </a:prstGeom>
+          <a:noFill/>
+        </p:spPr>
+        <p:txBody>
+          <a:bodyPr wrap="square" lIns="0" rIns="0" tIns="0" bIns="0" anchor="ctr">
+            <a:spAutoFit/>
+          </a:bodyPr>
+          <a:lstStyle/>
+          <a:p>
+            <a:pPr algn="l"/>
+            <a:r>
+              <a:rPr sz="1900" b="1" ea="Microsoft YaHei">
+                <a:solidFill>
+                  <a:srgbClr val="8B0D18"/>
+                </a:solidFill>
+                <a:latin typeface="Microsoft YaHei"/>
+              </a:rPr>
+              <a:t>双指令源</a:t>
+            </a:r>
+          </a:p>
+        </p:txBody>
+      </p:sp>
+      <p:sp>
+        <p:nvSpPr>
+          <p:cNvPr id="23" name="AGENT_SUMMARY_VALUE_2"/>
+          <p:cNvSpPr txBox="1"/>
+          <p:nvPr/>
+        </p:nvSpPr>
+        <p:spPr>
+          <a:xfrm>
+            <a:off x="2926080" y="3653028"/>
+            <a:ext cx="7909560" cy="898398"/>
+          </a:xfrm>
+          <a:prstGeom prst="rect">
+            <a:avLst/>
+          </a:prstGeom>
+          <a:noFill/>
+        </p:spPr>
+        <p:txBody>
+          <a:bodyPr wrap="square" lIns="0" rIns="0" tIns="0" bIns="0" anchor="ctr">
+            <a:spAutoFit/>
+          </a:bodyPr>
+          <a:lstStyle/>
+          <a:p>
+            <a:pPr algn="l"/>
+            <a:r>
+              <a:rPr sz="1800" b="0" ea="Microsoft YaHei">
+                <a:solidFill>
+                  <a:srgbClr val="1E1E1E"/>
+                </a:solidFill>
+                <a:latin typeface="Microsoft YaHei"/>
+              </a:rPr>
+              <a:t>SBUS 与协议链路物理独立，异常时拨回手动即恢复</a:t>
+            </a:r>
+          </a:p>
+        </p:txBody>
+      </p:sp>
+      <p:sp>
+        <p:nvSpPr>
+          <p:cNvPr id="24" name="AGENT_SUMMARY_LINE_3"/>
+          <p:cNvSpPr/>
+          <p:nvPr/>
+        </p:nvSpPr>
+        <p:spPr>
+          <a:xfrm>
+            <a:off x="868680" y="4606290"/>
+            <a:ext cx="10378440" cy="10972"/>
+          </a:xfrm>
+          <a:prstGeom prst="rect">
+            <a:avLst/>
+          </a:prstGeom>
+          <a:solidFill>
+            <a:srgbClr val="8B0D18"/>
+          </a:solidFill>
+          <a:ln>
+            <a:noFill/>
+          </a:ln>
+        </p:spPr>
+        <p:style>
+          <a:lnRef idx="1">
+            <a:schemeClr val="accent1"/>
+          </a:lnRef>
+          <a:fillRef idx="3">
+            <a:schemeClr val="accent1"/>
+          </a:fillRef>
+          <a:effectRef idx="2">
+            <a:schemeClr val="accent1"/>
+          </a:effectRef>
+          <a:fontRef idx="minor">
+            <a:schemeClr val="lt1"/>
+          </a:fontRef>
+        </p:style>
+        <p:txBody>
+          <a:bodyPr rtlCol="0" anchor="ctr"/>
+          <a:lstStyle/>
+          <a:p>
+            <a:pPr algn="ctr"/>
+          </a:p>
+        </p:txBody>
+      </p:sp>
+      <p:sp>
+        <p:nvSpPr>
+          <p:cNvPr id="25" name="AGENT_SUMMARY_LABEL_3"/>
+          <p:cNvSpPr txBox="1"/>
+          <p:nvPr/>
+        </p:nvSpPr>
+        <p:spPr>
+          <a:xfrm>
+            <a:off x="960120" y="4716018"/>
+            <a:ext cx="1828800" cy="898398"/>
+          </a:xfrm>
+          <a:prstGeom prst="rect">
+            <a:avLst/>
+          </a:prstGeom>
+          <a:noFill/>
+        </p:spPr>
+        <p:txBody>
+          <a:bodyPr wrap="square" lIns="0" rIns="0" tIns="0" bIns="0" anchor="ctr">
+            <a:spAutoFit/>
+          </a:bodyPr>
+          <a:lstStyle/>
+          <a:p>
+            <a:pPr algn="l"/>
+            <a:r>
+              <a:rPr sz="1900" b="1" ea="Microsoft YaHei">
+                <a:solidFill>
+                  <a:srgbClr val="8B0D18"/>
+                </a:solidFill>
+                <a:latin typeface="Microsoft YaHei"/>
+              </a:rPr>
+              <a:t>三级看门狗</a:t>
+            </a:r>
+          </a:p>
+        </p:txBody>
+      </p:sp>
+      <p:sp>
+        <p:nvSpPr>
+          <p:cNvPr id="26" name="AGENT_SUMMARY_VALUE_3"/>
+          <p:cNvSpPr txBox="1"/>
+          <p:nvPr/>
+        </p:nvSpPr>
+        <p:spPr>
+          <a:xfrm>
+            <a:off x="2926080" y="4716018"/>
+            <a:ext cx="7909560" cy="898398"/>
+          </a:xfrm>
+          <a:prstGeom prst="rect">
+            <a:avLst/>
+          </a:prstGeom>
+          <a:noFill/>
+        </p:spPr>
+        <p:txBody>
+          <a:bodyPr wrap="square" lIns="0" rIns="0" tIns="0" bIns="0" anchor="ctr">
+            <a:spAutoFit/>
+          </a:bodyPr>
+          <a:lstStyle/>
+          <a:p>
+            <a:pPr algn="l"/>
+            <a:r>
+              <a:rPr sz="1800" b="0" ea="Microsoft YaHei">
+                <a:solidFill>
+                  <a:srgbClr val="1E1E1E"/>
+                </a:solidFill>
+                <a:latin typeface="Microsoft YaHei"/>
+              </a:rPr>
+              <a:t>硬件复位/链路急停/桥接注入，三种故障模式三层兜底</a:t>
             </a:r>
           </a:p>
         </p:txBody>
@@ -9893,86 +13429,6 @@
             <a:avLst/>
           </a:prstGeom>
           <a:solidFill>
-            <a:srgbClr val="FFFFFF"/>
-          </a:solidFill>
-          <a:ln w="10160">
-            <a:solidFill>
-              <a:srgbClr val="BEBEBE"/>
-            </a:solidFill>
-          </a:ln>
-        </p:spPr>
-        <p:style>
-          <a:lnRef idx="1">
-            <a:schemeClr val="accent1"/>
-          </a:lnRef>
-          <a:fillRef idx="3">
-            <a:schemeClr val="accent1"/>
-          </a:fillRef>
-          <a:effectRef idx="2">
-            <a:schemeClr val="accent1"/>
-          </a:effectRef>
-          <a:fontRef idx="minor">
-            <a:schemeClr val="lt1"/>
-          </a:fontRef>
-        </p:style>
-        <p:txBody>
-          <a:bodyPr rtlCol="0" anchor="ctr"/>
-          <a:lstStyle/>
-          <a:p>
-            <a:pPr algn="ctr"/>
-          </a:p>
-        </p:txBody>
-      </p:sp>
-      <p:sp>
-        <p:nvSpPr>
-          <p:cNvPr id="5" name="AGENT_NAV_LABEL_1"/>
-          <p:cNvSpPr txBox="1"/>
-          <p:nvPr/>
-        </p:nvSpPr>
-        <p:spPr>
-          <a:xfrm>
-            <a:off x="2525572" y="59436"/>
-            <a:ext cx="2379268" cy="228600"/>
-          </a:xfrm>
-          <a:prstGeom prst="rect">
-            <a:avLst/>
-          </a:prstGeom>
-          <a:noFill/>
-        </p:spPr>
-        <p:txBody>
-          <a:bodyPr wrap="none" lIns="0" rIns="0" tIns="0" bIns="0" anchor="ctr">
-            <a:spAutoFit/>
-          </a:bodyPr>
-          <a:lstStyle/>
-          <a:p>
-            <a:pPr algn="ctr"/>
-            <a:r>
-              <a:rPr sz="1200" b="0" ea="Microsoft YaHei">
-                <a:solidFill>
-                  <a:srgbClr val="1E1E1E"/>
-                </a:solidFill>
-                <a:latin typeface="Microsoft YaHei"/>
-              </a:rPr>
-              <a:t>总体方案</a:t>
-            </a:r>
-          </a:p>
-        </p:txBody>
-      </p:sp>
-      <p:sp>
-        <p:nvSpPr>
-          <p:cNvPr id="6" name="AGENT_NAV_SLOT_2"/>
-          <p:cNvSpPr/>
-          <p:nvPr/>
-        </p:nvSpPr>
-        <p:spPr>
-          <a:xfrm>
-            <a:off x="4904841" y="27432"/>
-            <a:ext cx="2379268" cy="347472"/>
-          </a:xfrm>
-          <a:prstGeom prst="rect">
-            <a:avLst/>
-          </a:prstGeom>
-          <a:solidFill>
             <a:srgbClr val="8B0D18"/>
           </a:solidFill>
           <a:ln w="10160">
@@ -10005,13 +13461,13 @@
       </p:sp>
       <p:sp>
         <p:nvSpPr>
-          <p:cNvPr id="7" name="AGENT_NAV_LABEL_2"/>
-          <p:cNvSpPr txBox="1"/>
-          <p:nvPr/>
-        </p:nvSpPr>
-        <p:spPr>
-          <a:xfrm>
-            <a:off x="4904841" y="59436"/>
+          <p:cNvPr id="5" name="AGENT_NAV_LABEL_1"/>
+          <p:cNvSpPr txBox="1"/>
+          <p:nvPr/>
+        </p:nvSpPr>
+        <p:spPr>
+          <a:xfrm>
+            <a:off x="2525572" y="59436"/>
             <a:ext cx="2379268" cy="228600"/>
           </a:xfrm>
           <a:prstGeom prst="rect">
@@ -10033,20 +13489,20 @@
                 </a:solidFill>
                 <a:latin typeface="Microsoft YaHei"/>
               </a:rPr>
-              <a:t>理论方法</a:t>
-            </a:r>
-          </a:p>
-        </p:txBody>
-      </p:sp>
-      <p:sp>
-        <p:nvSpPr>
-          <p:cNvPr id="8" name="AGENT_NAV_SLOT_3"/>
+              <a:t>总体方案</a:t>
+            </a:r>
+          </a:p>
+        </p:txBody>
+      </p:sp>
+      <p:sp>
+        <p:nvSpPr>
+          <p:cNvPr id="6" name="AGENT_NAV_SLOT_2"/>
           <p:cNvSpPr/>
           <p:nvPr/>
         </p:nvSpPr>
         <p:spPr>
           <a:xfrm>
-            <a:off x="7284110" y="27432"/>
+            <a:off x="4904841" y="27432"/>
             <a:ext cx="2379268" cy="347472"/>
           </a:xfrm>
           <a:prstGeom prst="rect">
@@ -10085,13 +13541,13 @@
       </p:sp>
       <p:sp>
         <p:nvSpPr>
-          <p:cNvPr id="9" name="AGENT_NAV_LABEL_3"/>
-          <p:cNvSpPr txBox="1"/>
-          <p:nvPr/>
-        </p:nvSpPr>
-        <p:spPr>
-          <a:xfrm>
-            <a:off x="7284110" y="59436"/>
+          <p:cNvPr id="7" name="AGENT_NAV_LABEL_2"/>
+          <p:cNvSpPr txBox="1"/>
+          <p:nvPr/>
+        </p:nvSpPr>
+        <p:spPr>
+          <a:xfrm>
+            <a:off x="4904841" y="59436"/>
             <a:ext cx="2379268" cy="228600"/>
           </a:xfrm>
           <a:prstGeom prst="rect">
@@ -10113,20 +13569,20 @@
                 </a:solidFill>
                 <a:latin typeface="Microsoft YaHei"/>
               </a:rPr>
-              <a:t>试验设计</a:t>
-            </a:r>
-          </a:p>
-        </p:txBody>
-      </p:sp>
-      <p:sp>
-        <p:nvSpPr>
-          <p:cNvPr id="10" name="AGENT_NAV_SLOT_4"/>
+              <a:t>理论方法</a:t>
+            </a:r>
+          </a:p>
+        </p:txBody>
+      </p:sp>
+      <p:sp>
+        <p:nvSpPr>
+          <p:cNvPr id="8" name="AGENT_NAV_SLOT_3"/>
           <p:cNvSpPr/>
           <p:nvPr/>
         </p:nvSpPr>
         <p:spPr>
           <a:xfrm>
-            <a:off x="9663379" y="27432"/>
+            <a:off x="7284110" y="27432"/>
             <a:ext cx="2379268" cy="347472"/>
           </a:xfrm>
           <a:prstGeom prst="rect">
@@ -10165,13 +13621,13 @@
       </p:sp>
       <p:sp>
         <p:nvSpPr>
-          <p:cNvPr id="11" name="AGENT_NAV_LABEL_4"/>
-          <p:cNvSpPr txBox="1"/>
-          <p:nvPr/>
-        </p:nvSpPr>
-        <p:spPr>
-          <a:xfrm>
-            <a:off x="9663379" y="59436"/>
+          <p:cNvPr id="9" name="AGENT_NAV_LABEL_3"/>
+          <p:cNvSpPr txBox="1"/>
+          <p:nvPr/>
+        </p:nvSpPr>
+        <p:spPr>
+          <a:xfrm>
+            <a:off x="7284110" y="59436"/>
             <a:ext cx="2379268" cy="228600"/>
           </a:xfrm>
           <a:prstGeom prst="rect">
@@ -10193,128 +13649,23 @@
                 </a:solidFill>
                 <a:latin typeface="Microsoft YaHei"/>
               </a:rPr>
-              <a:t>进度与计划</a:t>
-            </a:r>
-          </a:p>
-        </p:txBody>
-      </p:sp>
-      <p:sp>
-        <p:nvSpPr>
-          <p:cNvPr id="12" name="AGENT_FOOTER"/>
-          <p:cNvSpPr txBox="1"/>
-          <p:nvPr/>
-        </p:nvSpPr>
-        <p:spPr>
-          <a:xfrm>
-            <a:off x="320040" y="6510528"/>
-            <a:ext cx="8595360" cy="128016"/>
-          </a:xfrm>
-          <a:prstGeom prst="rect">
-            <a:avLst/>
-          </a:prstGeom>
-          <a:noFill/>
-        </p:spPr>
-        <p:txBody>
-          <a:bodyPr wrap="none" lIns="0" rIns="0" tIns="0" bIns="0" anchor="ctr">
-            <a:spAutoFit/>
-          </a:bodyPr>
-          <a:lstStyle/>
-          <a:p>
-            <a:pPr algn="l"/>
-            <a:r>
-              <a:rPr sz="800" b="0" ea="Microsoft YaHei">
-                <a:solidFill>
-                  <a:srgbClr val="696969"/>
-                </a:solidFill>
-                <a:latin typeface="Microsoft YaHei"/>
-              </a:rPr>
-              <a:t>纯视觉芍药行间除草机器人 · 组会进展汇报 · 2026-09-07</a:t>
-            </a:r>
-          </a:p>
-        </p:txBody>
-      </p:sp>
-      <p:sp>
-        <p:nvSpPr>
-          <p:cNvPr id="13" name="AGENT_PAGE_NUMBER"/>
-          <p:cNvSpPr txBox="1"/>
-          <p:nvPr/>
-        </p:nvSpPr>
-        <p:spPr>
-          <a:xfrm>
-            <a:off x="11521440" y="6501384"/>
-            <a:ext cx="256032" cy="128016"/>
-          </a:xfrm>
-          <a:prstGeom prst="rect">
-            <a:avLst/>
-          </a:prstGeom>
-          <a:noFill/>
-        </p:spPr>
-        <p:txBody>
-          <a:bodyPr wrap="none" lIns="0" rIns="0" tIns="0" bIns="0" anchor="ctr">
-            <a:spAutoFit/>
-          </a:bodyPr>
-          <a:lstStyle/>
-          <a:p>
-            <a:pPr algn="r"/>
-            <a:r>
-              <a:rPr sz="800" b="0" ea="Microsoft YaHei">
-                <a:solidFill>
-                  <a:srgbClr val="696969"/>
-                </a:solidFill>
-                <a:latin typeface="Microsoft YaHei"/>
-              </a:rPr>
-              <a:t>6</a:t>
-            </a:r>
-          </a:p>
-        </p:txBody>
-      </p:sp>
-      <p:sp>
-        <p:nvSpPr>
-          <p:cNvPr id="14" name="AGENT_TITLE"/>
-          <p:cNvSpPr txBox="1"/>
-          <p:nvPr/>
-        </p:nvSpPr>
-        <p:spPr>
-          <a:xfrm>
-            <a:off x="320040" y="539496"/>
-            <a:ext cx="11292840" cy="493776"/>
-          </a:xfrm>
-          <a:prstGeom prst="rect">
-            <a:avLst/>
-          </a:prstGeom>
-          <a:noFill/>
-        </p:spPr>
-        <p:txBody>
-          <a:bodyPr wrap="square" lIns="0" rIns="0" tIns="0" bIns="0" anchor="ctr">
-            <a:spAutoFit/>
-          </a:bodyPr>
-          <a:lstStyle/>
-          <a:p>
-            <a:pPr algn="l"/>
-            <a:r>
-              <a:rPr sz="3000" b="0" ea="Microsoft YaHei">
-                <a:solidFill>
-                  <a:srgbClr val="8B0D18"/>
-                </a:solidFill>
-                <a:latin typeface="Microsoft YaHei"/>
-              </a:rPr>
-              <a:t>理论二：差速底盘横向误差模型与 PD 控制</a:t>
-            </a:r>
-          </a:p>
-        </p:txBody>
-      </p:sp>
-      <p:sp>
-        <p:nvSpPr>
-          <p:cNvPr id="15" name="AGENT_TEXT_PANEL"/>
+              <a:t>试验设计</a:t>
+            </a:r>
+          </a:p>
+        </p:txBody>
+      </p:sp>
+      <p:sp>
+        <p:nvSpPr>
+          <p:cNvPr id="10" name="AGENT_NAV_SLOT_4"/>
           <p:cNvSpPr/>
           <p:nvPr/>
         </p:nvSpPr>
         <p:spPr>
           <a:xfrm>
-            <a:off x="685800" y="1417320"/>
-            <a:ext cx="10835640" cy="4434840"/>
-          </a:xfrm>
-          <a:prstGeom prst="roundRect">
+            <a:off x="9663379" y="27432"/>
+            <a:ext cx="2379268" cy="347472"/>
+          </a:xfrm>
+          <a:prstGeom prst="rect">
             <a:avLst/>
           </a:prstGeom>
           <a:solidFill>
@@ -10350,14 +13701,119 @@
       </p:sp>
       <p:sp>
         <p:nvSpPr>
-          <p:cNvPr id="16" name="AGENT_BODY"/>
-          <p:cNvSpPr txBox="1"/>
-          <p:nvPr/>
-        </p:nvSpPr>
-        <p:spPr>
-          <a:xfrm>
-            <a:off x="960120" y="1664208"/>
-            <a:ext cx="10287000" cy="3931920"/>
+          <p:cNvPr id="11" name="AGENT_NAV_LABEL_4"/>
+          <p:cNvSpPr txBox="1"/>
+          <p:nvPr/>
+        </p:nvSpPr>
+        <p:spPr>
+          <a:xfrm>
+            <a:off x="9663379" y="59436"/>
+            <a:ext cx="2379268" cy="228600"/>
+          </a:xfrm>
+          <a:prstGeom prst="rect">
+            <a:avLst/>
+          </a:prstGeom>
+          <a:noFill/>
+        </p:spPr>
+        <p:txBody>
+          <a:bodyPr wrap="none" lIns="0" rIns="0" tIns="0" bIns="0" anchor="ctr">
+            <a:spAutoFit/>
+          </a:bodyPr>
+          <a:lstStyle/>
+          <a:p>
+            <a:pPr algn="ctr"/>
+            <a:r>
+              <a:rPr sz="1200" b="0" ea="Microsoft YaHei">
+                <a:solidFill>
+                  <a:srgbClr val="1E1E1E"/>
+                </a:solidFill>
+                <a:latin typeface="Microsoft YaHei"/>
+              </a:rPr>
+              <a:t>进度与计划</a:t>
+            </a:r>
+          </a:p>
+        </p:txBody>
+      </p:sp>
+      <p:sp>
+        <p:nvSpPr>
+          <p:cNvPr id="12" name="AGENT_FOOTER"/>
+          <p:cNvSpPr txBox="1"/>
+          <p:nvPr/>
+        </p:nvSpPr>
+        <p:spPr>
+          <a:xfrm>
+            <a:off x="320040" y="6510528"/>
+            <a:ext cx="8595360" cy="128016"/>
+          </a:xfrm>
+          <a:prstGeom prst="rect">
+            <a:avLst/>
+          </a:prstGeom>
+          <a:noFill/>
+        </p:spPr>
+        <p:txBody>
+          <a:bodyPr wrap="none" lIns="0" rIns="0" tIns="0" bIns="0" anchor="ctr">
+            <a:spAutoFit/>
+          </a:bodyPr>
+          <a:lstStyle/>
+          <a:p>
+            <a:pPr algn="l"/>
+            <a:r>
+              <a:rPr sz="800" b="0" ea="Microsoft YaHei">
+                <a:solidFill>
+                  <a:srgbClr val="696969"/>
+                </a:solidFill>
+                <a:latin typeface="Microsoft YaHei"/>
+              </a:rPr>
+              <a:t>纯视觉芍药行间除草机器人 · 组会进展汇报 · 2026-09-07</a:t>
+            </a:r>
+          </a:p>
+        </p:txBody>
+      </p:sp>
+      <p:sp>
+        <p:nvSpPr>
+          <p:cNvPr id="13" name="AGENT_PAGE_NUMBER"/>
+          <p:cNvSpPr txBox="1"/>
+          <p:nvPr/>
+        </p:nvSpPr>
+        <p:spPr>
+          <a:xfrm>
+            <a:off x="11521440" y="6501384"/>
+            <a:ext cx="256032" cy="128016"/>
+          </a:xfrm>
+          <a:prstGeom prst="rect">
+            <a:avLst/>
+          </a:prstGeom>
+          <a:noFill/>
+        </p:spPr>
+        <p:txBody>
+          <a:bodyPr wrap="none" lIns="0" rIns="0" tIns="0" bIns="0" anchor="ctr">
+            <a:spAutoFit/>
+          </a:bodyPr>
+          <a:lstStyle/>
+          <a:p>
+            <a:pPr algn="r"/>
+            <a:r>
+              <a:rPr sz="800" b="0" ea="Microsoft YaHei">
+                <a:solidFill>
+                  <a:srgbClr val="696969"/>
+                </a:solidFill>
+                <a:latin typeface="Microsoft YaHei"/>
+              </a:rPr>
+              <a:t>6</a:t>
+            </a:r>
+          </a:p>
+        </p:txBody>
+      </p:sp>
+      <p:sp>
+        <p:nvSpPr>
+          <p:cNvPr id="14" name="AGENT_TITLE"/>
+          <p:cNvSpPr txBox="1"/>
+          <p:nvPr/>
+        </p:nvSpPr>
+        <p:spPr>
+          <a:xfrm>
+            <a:off x="320040" y="539496"/>
+            <a:ext cx="11292840" cy="493776"/>
           </a:xfrm>
           <a:prstGeom prst="rect">
             <a:avLst/>
@@ -10372,17 +13828,465 @@
           <a:p>
             <a:pPr algn="l"/>
             <a:r>
-              <a:rPr sz="2000" b="0" ea="Microsoft YaHei">
+              <a:rPr sz="3000" b="0" ea="Microsoft YaHei">
+                <a:solidFill>
+                  <a:srgbClr val="8B0D18"/>
+                </a:solidFill>
+                <a:latin typeface="Microsoft YaHei"/>
+              </a:rPr>
+              <a:t>运动学与场景：模型必须与执行机构一致</a:t>
+            </a:r>
+          </a:p>
+        </p:txBody>
+      </p:sp>
+      <p:sp>
+        <p:nvSpPr>
+          <p:cNvPr id="15" name="AGENT_SUMMARY_LINE_0"/>
+          <p:cNvSpPr/>
+          <p:nvPr/>
+        </p:nvSpPr>
+        <p:spPr>
+          <a:xfrm>
+            <a:off x="868680" y="1417320"/>
+            <a:ext cx="10378440" cy="10972"/>
+          </a:xfrm>
+          <a:prstGeom prst="rect">
+            <a:avLst/>
+          </a:prstGeom>
+          <a:solidFill>
+            <a:srgbClr val="8B0D18"/>
+          </a:solidFill>
+          <a:ln>
+            <a:noFill/>
+          </a:ln>
+        </p:spPr>
+        <p:style>
+          <a:lnRef idx="1">
+            <a:schemeClr val="accent1"/>
+          </a:lnRef>
+          <a:fillRef idx="3">
+            <a:schemeClr val="accent1"/>
+          </a:fillRef>
+          <a:effectRef idx="2">
+            <a:schemeClr val="accent1"/>
+          </a:effectRef>
+          <a:fontRef idx="minor">
+            <a:schemeClr val="lt1"/>
+          </a:fontRef>
+        </p:style>
+        <p:txBody>
+          <a:bodyPr rtlCol="0" anchor="ctr"/>
+          <a:lstStyle/>
+          <a:p>
+            <a:pPr algn="ctr"/>
+          </a:p>
+        </p:txBody>
+      </p:sp>
+      <p:sp>
+        <p:nvSpPr>
+          <p:cNvPr id="16" name="AGENT_SUMMARY_LABEL_0"/>
+          <p:cNvSpPr txBox="1"/>
+          <p:nvPr/>
+        </p:nvSpPr>
+        <p:spPr>
+          <a:xfrm>
+            <a:off x="960120" y="1527048"/>
+            <a:ext cx="1828800" cy="898398"/>
+          </a:xfrm>
+          <a:prstGeom prst="rect">
+            <a:avLst/>
+          </a:prstGeom>
+          <a:noFill/>
+        </p:spPr>
+        <p:txBody>
+          <a:bodyPr wrap="square" lIns="0" rIns="0" tIns="0" bIns="0" anchor="ctr">
+            <a:spAutoFit/>
+          </a:bodyPr>
+          <a:lstStyle/>
+          <a:p>
+            <a:pPr algn="l"/>
+            <a:r>
+              <a:rPr sz="1900" b="1" ea="Microsoft YaHei">
+                <a:solidFill>
+                  <a:srgbClr val="8B0D18"/>
+                </a:solidFill>
+                <a:latin typeface="Microsoft YaHei"/>
+              </a:rPr>
+              <a:t>差速模型</a:t>
+            </a:r>
+          </a:p>
+        </p:txBody>
+      </p:sp>
+      <p:sp>
+        <p:nvSpPr>
+          <p:cNvPr id="17" name="AGENT_SUMMARY_VALUE_0"/>
+          <p:cNvSpPr txBox="1"/>
+          <p:nvPr/>
+        </p:nvSpPr>
+        <p:spPr>
+          <a:xfrm>
+            <a:off x="2926080" y="1527048"/>
+            <a:ext cx="7909560" cy="898398"/>
+          </a:xfrm>
+          <a:prstGeom prst="rect">
+            <a:avLst/>
+          </a:prstGeom>
+          <a:noFill/>
+        </p:spPr>
+        <p:txBody>
+          <a:bodyPr wrap="square" lIns="0" rIns="0" tIns="0" bIns="0" anchor="ctr">
+            <a:spAutoFit/>
+          </a:bodyPr>
+          <a:lstStyle/>
+          <a:p>
+            <a:pPr algn="l"/>
+            <a:r>
+              <a:rPr sz="1800" b="0" ea="Microsoft YaHei">
                 <a:solidFill>
                   <a:srgbClr val="1E1E1E"/>
                 </a:solidFill>
                 <a:latin typeface="Microsoft YaHei"/>
               </a:rPr>
-              <a:t>1. 运动学：v=(vR+vL)/2，ω=(vR−vL)/W_eff（滑移转向）
-2. 横向误差动态：ė = v·ψ，ψ̇ = 2Δv/W_eff
-3. 控制量 Δv = k_p·e + k_d·ė，闭环三阶可作稳定性分析
-4. 执行滞后 τ≈0.1s 时 k_lat 上限由相位裕度反算
-5. 轮速由 TIM3 输入捕获实测，打滑系数田间标定修正</a:t>
+              <a:t>实车四轮独立驱动无转向执行器，滑移转向可解析推导</a:t>
+            </a:r>
+          </a:p>
+        </p:txBody>
+      </p:sp>
+      <p:sp>
+        <p:nvSpPr>
+          <p:cNvPr id="18" name="AGENT_SUMMARY_LINE_1"/>
+          <p:cNvSpPr/>
+          <p:nvPr/>
+        </p:nvSpPr>
+        <p:spPr>
+          <a:xfrm>
+            <a:off x="868680" y="2480310"/>
+            <a:ext cx="10378440" cy="10972"/>
+          </a:xfrm>
+          <a:prstGeom prst="rect">
+            <a:avLst/>
+          </a:prstGeom>
+          <a:solidFill>
+            <a:srgbClr val="8B0D18"/>
+          </a:solidFill>
+          <a:ln>
+            <a:noFill/>
+          </a:ln>
+        </p:spPr>
+        <p:style>
+          <a:lnRef idx="1">
+            <a:schemeClr val="accent1"/>
+          </a:lnRef>
+          <a:fillRef idx="3">
+            <a:schemeClr val="accent1"/>
+          </a:fillRef>
+          <a:effectRef idx="2">
+            <a:schemeClr val="accent1"/>
+          </a:effectRef>
+          <a:fontRef idx="minor">
+            <a:schemeClr val="lt1"/>
+          </a:fontRef>
+        </p:style>
+        <p:txBody>
+          <a:bodyPr rtlCol="0" anchor="ctr"/>
+          <a:lstStyle/>
+          <a:p>
+            <a:pPr algn="ctr"/>
+          </a:p>
+        </p:txBody>
+      </p:sp>
+      <p:sp>
+        <p:nvSpPr>
+          <p:cNvPr id="19" name="AGENT_SUMMARY_LABEL_1"/>
+          <p:cNvSpPr txBox="1"/>
+          <p:nvPr/>
+        </p:nvSpPr>
+        <p:spPr>
+          <a:xfrm>
+            <a:off x="960120" y="2590038"/>
+            <a:ext cx="1828800" cy="898398"/>
+          </a:xfrm>
+          <a:prstGeom prst="rect">
+            <a:avLst/>
+          </a:prstGeom>
+          <a:noFill/>
+        </p:spPr>
+        <p:txBody>
+          <a:bodyPr wrap="square" lIns="0" rIns="0" tIns="0" bIns="0" anchor="ctr">
+            <a:spAutoFit/>
+          </a:bodyPr>
+          <a:lstStyle/>
+          <a:p>
+            <a:pPr algn="l"/>
+            <a:r>
+              <a:rPr sz="1900" b="1" ea="Microsoft YaHei">
+                <a:solidFill>
+                  <a:srgbClr val="8B0D18"/>
+                </a:solidFill>
+                <a:latin typeface="Microsoft YaHei"/>
+              </a:rPr>
+              <a:t>开题调整</a:t>
+            </a:r>
+          </a:p>
+        </p:txBody>
+      </p:sp>
+      <p:sp>
+        <p:nvSpPr>
+          <p:cNvPr id="20" name="AGENT_SUMMARY_VALUE_1"/>
+          <p:cNvSpPr txBox="1"/>
+          <p:nvPr/>
+        </p:nvSpPr>
+        <p:spPr>
+          <a:xfrm>
+            <a:off x="2926080" y="2590038"/>
+            <a:ext cx="7909560" cy="898398"/>
+          </a:xfrm>
+          <a:prstGeom prst="rect">
+            <a:avLst/>
+          </a:prstGeom>
+          <a:noFill/>
+        </p:spPr>
+        <p:txBody>
+          <a:bodyPr wrap="square" lIns="0" rIns="0" tIns="0" bIns="0" anchor="ctr">
+            <a:spAutoFit/>
+          </a:bodyPr>
+          <a:lstStyle/>
+          <a:p>
+            <a:pPr algn="l"/>
+            <a:r>
+              <a:rPr sz="1800" b="0" ea="Microsoft YaHei">
+                <a:solidFill>
+                  <a:srgbClr val="1E1E1E"/>
+                </a:solidFill>
+                <a:latin typeface="Microsoft YaHei"/>
+              </a:rPr>
+              <a:t>4WS→差速：代码保留可切换；林下→大田：光影鲁棒性保留</a:t>
+            </a:r>
+          </a:p>
+        </p:txBody>
+      </p:sp>
+      <p:sp>
+        <p:nvSpPr>
+          <p:cNvPr id="21" name="AGENT_SUMMARY_LINE_2"/>
+          <p:cNvSpPr/>
+          <p:nvPr/>
+        </p:nvSpPr>
+        <p:spPr>
+          <a:xfrm>
+            <a:off x="868680" y="3543300"/>
+            <a:ext cx="10378440" cy="10972"/>
+          </a:xfrm>
+          <a:prstGeom prst="rect">
+            <a:avLst/>
+          </a:prstGeom>
+          <a:solidFill>
+            <a:srgbClr val="8B0D18"/>
+          </a:solidFill>
+          <a:ln>
+            <a:noFill/>
+          </a:ln>
+        </p:spPr>
+        <p:style>
+          <a:lnRef idx="1">
+            <a:schemeClr val="accent1"/>
+          </a:lnRef>
+          <a:fillRef idx="3">
+            <a:schemeClr val="accent1"/>
+          </a:fillRef>
+          <a:effectRef idx="2">
+            <a:schemeClr val="accent1"/>
+          </a:effectRef>
+          <a:fontRef idx="minor">
+            <a:schemeClr val="lt1"/>
+          </a:fontRef>
+        </p:style>
+        <p:txBody>
+          <a:bodyPr rtlCol="0" anchor="ctr"/>
+          <a:lstStyle/>
+          <a:p>
+            <a:pPr algn="ctr"/>
+          </a:p>
+        </p:txBody>
+      </p:sp>
+      <p:sp>
+        <p:nvSpPr>
+          <p:cNvPr id="22" name="AGENT_SUMMARY_LABEL_2"/>
+          <p:cNvSpPr txBox="1"/>
+          <p:nvPr/>
+        </p:nvSpPr>
+        <p:spPr>
+          <a:xfrm>
+            <a:off x="960120" y="3653028"/>
+            <a:ext cx="1828800" cy="898398"/>
+          </a:xfrm>
+          <a:prstGeom prst="rect">
+            <a:avLst/>
+          </a:prstGeom>
+          <a:noFill/>
+        </p:spPr>
+        <p:txBody>
+          <a:bodyPr wrap="square" lIns="0" rIns="0" tIns="0" bIns="0" anchor="ctr">
+            <a:spAutoFit/>
+          </a:bodyPr>
+          <a:lstStyle/>
+          <a:p>
+            <a:pPr algn="l"/>
+            <a:r>
+              <a:rPr sz="1900" b="1" ea="Microsoft YaHei">
+                <a:solidFill>
+                  <a:srgbClr val="8B0D18"/>
+                </a:solidFill>
+                <a:latin typeface="Microsoft YaHei"/>
+              </a:rPr>
+              <a:t>双预视点</a:t>
+            </a:r>
+          </a:p>
+        </p:txBody>
+      </p:sp>
+      <p:sp>
+        <p:nvSpPr>
+          <p:cNvPr id="23" name="AGENT_SUMMARY_VALUE_2"/>
+          <p:cNvSpPr txBox="1"/>
+          <p:nvPr/>
+        </p:nvSpPr>
+        <p:spPr>
+          <a:xfrm>
+            <a:off x="2926080" y="3653028"/>
+            <a:ext cx="7909560" cy="898398"/>
+          </a:xfrm>
+          <a:prstGeom prst="rect">
+            <a:avLst/>
+          </a:prstGeom>
+          <a:noFill/>
+        </p:spPr>
+        <p:txBody>
+          <a:bodyPr wrap="square" lIns="0" rIns="0" tIns="0" bIns="0" anchor="ctr">
+            <a:spAutoFit/>
+          </a:bodyPr>
+          <a:lstStyle/>
+          <a:p>
+            <a:pPr algn="l"/>
+            <a:r>
+              <a:rPr sz="1800" b="0" ea="Microsoft YaHei">
+                <a:solidFill>
+                  <a:srgbClr val="1E1E1E"/>
+                </a:solidFill>
+                <a:latin typeface="Microsoft YaHei"/>
+              </a:rPr>
+              <a:t>远场供导航容忍噪声，近场供刀具要求精确</a:t>
+            </a:r>
+          </a:p>
+        </p:txBody>
+      </p:sp>
+      <p:sp>
+        <p:nvSpPr>
+          <p:cNvPr id="24" name="AGENT_SUMMARY_LINE_3"/>
+          <p:cNvSpPr/>
+          <p:nvPr/>
+        </p:nvSpPr>
+        <p:spPr>
+          <a:xfrm>
+            <a:off x="868680" y="4606290"/>
+            <a:ext cx="10378440" cy="10972"/>
+          </a:xfrm>
+          <a:prstGeom prst="rect">
+            <a:avLst/>
+          </a:prstGeom>
+          <a:solidFill>
+            <a:srgbClr val="8B0D18"/>
+          </a:solidFill>
+          <a:ln>
+            <a:noFill/>
+          </a:ln>
+        </p:spPr>
+        <p:style>
+          <a:lnRef idx="1">
+            <a:schemeClr val="accent1"/>
+          </a:lnRef>
+          <a:fillRef idx="3">
+            <a:schemeClr val="accent1"/>
+          </a:fillRef>
+          <a:effectRef idx="2">
+            <a:schemeClr val="accent1"/>
+          </a:effectRef>
+          <a:fontRef idx="minor">
+            <a:schemeClr val="lt1"/>
+          </a:fontRef>
+        </p:style>
+        <p:txBody>
+          <a:bodyPr rtlCol="0" anchor="ctr"/>
+          <a:lstStyle/>
+          <a:p>
+            <a:pPr algn="ctr"/>
+          </a:p>
+        </p:txBody>
+      </p:sp>
+      <p:sp>
+        <p:nvSpPr>
+          <p:cNvPr id="25" name="AGENT_SUMMARY_LABEL_3"/>
+          <p:cNvSpPr txBox="1"/>
+          <p:nvPr/>
+        </p:nvSpPr>
+        <p:spPr>
+          <a:xfrm>
+            <a:off x="960120" y="4716018"/>
+            <a:ext cx="1828800" cy="898398"/>
+          </a:xfrm>
+          <a:prstGeom prst="rect">
+            <a:avLst/>
+          </a:prstGeom>
+          <a:noFill/>
+        </p:spPr>
+        <p:txBody>
+          <a:bodyPr wrap="square" lIns="0" rIns="0" tIns="0" bIns="0" anchor="ctr">
+            <a:spAutoFit/>
+          </a:bodyPr>
+          <a:lstStyle/>
+          <a:p>
+            <a:pPr algn="l"/>
+            <a:r>
+              <a:rPr sz="1900" b="1" ea="Microsoft YaHei">
+                <a:solidFill>
+                  <a:srgbClr val="8B0D18"/>
+                </a:solidFill>
+                <a:latin typeface="Microsoft YaHei"/>
+              </a:rPr>
+              <a:t>IPM 单应</a:t>
+            </a:r>
+          </a:p>
+        </p:txBody>
+      </p:sp>
+      <p:sp>
+        <p:nvSpPr>
+          <p:cNvPr id="26" name="AGENT_SUMMARY_VALUE_3"/>
+          <p:cNvSpPr txBox="1"/>
+          <p:nvPr/>
+        </p:nvSpPr>
+        <p:spPr>
+          <a:xfrm>
+            <a:off x="2926080" y="4716018"/>
+            <a:ext cx="7909560" cy="898398"/>
+          </a:xfrm>
+          <a:prstGeom prst="rect">
+            <a:avLst/>
+          </a:prstGeom>
+          <a:noFill/>
+        </p:spPr>
+        <p:txBody>
+          <a:bodyPr wrap="square" lIns="0" rIns="0" tIns="0" bIns="0" anchor="ctr">
+            <a:spAutoFit/>
+          </a:bodyPr>
+          <a:lstStyle/>
+          <a:p>
+            <a:pPr algn="l"/>
+            <a:r>
+              <a:rPr sz="1800" b="0" ea="Microsoft YaHei">
+                <a:solidFill>
+                  <a:srgbClr val="1E1E1E"/>
+                </a:solidFill>
+                <a:latin typeface="Microsoft YaHei"/>
+              </a:rPr>
+              <a:t>4 点标定把安装误差吸收进 H，田间可随时重做</a:t>
             </a:r>
           </a:p>
         </p:txBody>
@@ -10500,86 +14404,6 @@
             <a:avLst/>
           </a:prstGeom>
           <a:solidFill>
-            <a:srgbClr val="FFFFFF"/>
-          </a:solidFill>
-          <a:ln w="10160">
-            <a:solidFill>
-              <a:srgbClr val="BEBEBE"/>
-            </a:solidFill>
-          </a:ln>
-        </p:spPr>
-        <p:style>
-          <a:lnRef idx="1">
-            <a:schemeClr val="accent1"/>
-          </a:lnRef>
-          <a:fillRef idx="3">
-            <a:schemeClr val="accent1"/>
-          </a:fillRef>
-          <a:effectRef idx="2">
-            <a:schemeClr val="accent1"/>
-          </a:effectRef>
-          <a:fontRef idx="minor">
-            <a:schemeClr val="lt1"/>
-          </a:fontRef>
-        </p:style>
-        <p:txBody>
-          <a:bodyPr rtlCol="0" anchor="ctr"/>
-          <a:lstStyle/>
-          <a:p>
-            <a:pPr algn="ctr"/>
-          </a:p>
-        </p:txBody>
-      </p:sp>
-      <p:sp>
-        <p:nvSpPr>
-          <p:cNvPr id="5" name="AGENT_NAV_LABEL_1"/>
-          <p:cNvSpPr txBox="1"/>
-          <p:nvPr/>
-        </p:nvSpPr>
-        <p:spPr>
-          <a:xfrm>
-            <a:off x="2525572" y="59436"/>
-            <a:ext cx="2379268" cy="228600"/>
-          </a:xfrm>
-          <a:prstGeom prst="rect">
-            <a:avLst/>
-          </a:prstGeom>
-          <a:noFill/>
-        </p:spPr>
-        <p:txBody>
-          <a:bodyPr wrap="none" lIns="0" rIns="0" tIns="0" bIns="0" anchor="ctr">
-            <a:spAutoFit/>
-          </a:bodyPr>
-          <a:lstStyle/>
-          <a:p>
-            <a:pPr algn="ctr"/>
-            <a:r>
-              <a:rPr sz="1200" b="0" ea="Microsoft YaHei">
-                <a:solidFill>
-                  <a:srgbClr val="1E1E1E"/>
-                </a:solidFill>
-                <a:latin typeface="Microsoft YaHei"/>
-              </a:rPr>
-              <a:t>总体方案</a:t>
-            </a:r>
-          </a:p>
-        </p:txBody>
-      </p:sp>
-      <p:sp>
-        <p:nvSpPr>
-          <p:cNvPr id="6" name="AGENT_NAV_SLOT_2"/>
-          <p:cNvSpPr/>
-          <p:nvPr/>
-        </p:nvSpPr>
-        <p:spPr>
-          <a:xfrm>
-            <a:off x="4904841" y="27432"/>
-            <a:ext cx="2379268" cy="347472"/>
-          </a:xfrm>
-          <a:prstGeom prst="rect">
-            <a:avLst/>
-          </a:prstGeom>
-          <a:solidFill>
             <a:srgbClr val="8B0D18"/>
           </a:solidFill>
           <a:ln w="10160">
@@ -10612,13 +14436,13 @@
       </p:sp>
       <p:sp>
         <p:nvSpPr>
-          <p:cNvPr id="7" name="AGENT_NAV_LABEL_2"/>
-          <p:cNvSpPr txBox="1"/>
-          <p:nvPr/>
-        </p:nvSpPr>
-        <p:spPr>
-          <a:xfrm>
-            <a:off x="4904841" y="59436"/>
+          <p:cNvPr id="5" name="AGENT_NAV_LABEL_1"/>
+          <p:cNvSpPr txBox="1"/>
+          <p:nvPr/>
+        </p:nvSpPr>
+        <p:spPr>
+          <a:xfrm>
+            <a:off x="2525572" y="59436"/>
             <a:ext cx="2379268" cy="228600"/>
           </a:xfrm>
           <a:prstGeom prst="rect">
@@ -10640,20 +14464,20 @@
                 </a:solidFill>
                 <a:latin typeface="Microsoft YaHei"/>
               </a:rPr>
-              <a:t>理论方法</a:t>
-            </a:r>
-          </a:p>
-        </p:txBody>
-      </p:sp>
-      <p:sp>
-        <p:nvSpPr>
-          <p:cNvPr id="8" name="AGENT_NAV_SLOT_3"/>
+              <a:t>总体方案</a:t>
+            </a:r>
+          </a:p>
+        </p:txBody>
+      </p:sp>
+      <p:sp>
+        <p:nvSpPr>
+          <p:cNvPr id="6" name="AGENT_NAV_SLOT_2"/>
           <p:cNvSpPr/>
           <p:nvPr/>
         </p:nvSpPr>
         <p:spPr>
           <a:xfrm>
-            <a:off x="7284110" y="27432"/>
+            <a:off x="4904841" y="27432"/>
             <a:ext cx="2379268" cy="347472"/>
           </a:xfrm>
           <a:prstGeom prst="rect">
@@ -10692,13 +14516,13 @@
       </p:sp>
       <p:sp>
         <p:nvSpPr>
-          <p:cNvPr id="9" name="AGENT_NAV_LABEL_3"/>
-          <p:cNvSpPr txBox="1"/>
-          <p:nvPr/>
-        </p:nvSpPr>
-        <p:spPr>
-          <a:xfrm>
-            <a:off x="7284110" y="59436"/>
+          <p:cNvPr id="7" name="AGENT_NAV_LABEL_2"/>
+          <p:cNvSpPr txBox="1"/>
+          <p:nvPr/>
+        </p:nvSpPr>
+        <p:spPr>
+          <a:xfrm>
+            <a:off x="4904841" y="59436"/>
             <a:ext cx="2379268" cy="228600"/>
           </a:xfrm>
           <a:prstGeom prst="rect">
@@ -10720,20 +14544,20 @@
                 </a:solidFill>
                 <a:latin typeface="Microsoft YaHei"/>
               </a:rPr>
-              <a:t>试验设计</a:t>
-            </a:r>
-          </a:p>
-        </p:txBody>
-      </p:sp>
-      <p:sp>
-        <p:nvSpPr>
-          <p:cNvPr id="10" name="AGENT_NAV_SLOT_4"/>
+              <a:t>理论方法</a:t>
+            </a:r>
+          </a:p>
+        </p:txBody>
+      </p:sp>
+      <p:sp>
+        <p:nvSpPr>
+          <p:cNvPr id="8" name="AGENT_NAV_SLOT_3"/>
           <p:cNvSpPr/>
           <p:nvPr/>
         </p:nvSpPr>
         <p:spPr>
           <a:xfrm>
-            <a:off x="9663379" y="27432"/>
+            <a:off x="7284110" y="27432"/>
             <a:ext cx="2379268" cy="347472"/>
           </a:xfrm>
           <a:prstGeom prst="rect">
@@ -10772,13 +14596,13 @@
       </p:sp>
       <p:sp>
         <p:nvSpPr>
-          <p:cNvPr id="11" name="AGENT_NAV_LABEL_4"/>
-          <p:cNvSpPr txBox="1"/>
-          <p:nvPr/>
-        </p:nvSpPr>
-        <p:spPr>
-          <a:xfrm>
-            <a:off x="9663379" y="59436"/>
+          <p:cNvPr id="9" name="AGENT_NAV_LABEL_3"/>
+          <p:cNvSpPr txBox="1"/>
+          <p:nvPr/>
+        </p:nvSpPr>
+        <p:spPr>
+          <a:xfrm>
+            <a:off x="7284110" y="59436"/>
             <a:ext cx="2379268" cy="228600"/>
           </a:xfrm>
           <a:prstGeom prst="rect">
@@ -10800,128 +14624,23 @@
                 </a:solidFill>
                 <a:latin typeface="Microsoft YaHei"/>
               </a:rPr>
-              <a:t>进度与计划</a:t>
-            </a:r>
-          </a:p>
-        </p:txBody>
-      </p:sp>
-      <p:sp>
-        <p:nvSpPr>
-          <p:cNvPr id="12" name="AGENT_FOOTER"/>
-          <p:cNvSpPr txBox="1"/>
-          <p:nvPr/>
-        </p:nvSpPr>
-        <p:spPr>
-          <a:xfrm>
-            <a:off x="320040" y="6510528"/>
-            <a:ext cx="8595360" cy="128016"/>
-          </a:xfrm>
-          <a:prstGeom prst="rect">
-            <a:avLst/>
-          </a:prstGeom>
-          <a:noFill/>
-        </p:spPr>
-        <p:txBody>
-          <a:bodyPr wrap="none" lIns="0" rIns="0" tIns="0" bIns="0" anchor="ctr">
-            <a:spAutoFit/>
-          </a:bodyPr>
-          <a:lstStyle/>
-          <a:p>
-            <a:pPr algn="l"/>
-            <a:r>
-              <a:rPr sz="800" b="0" ea="Microsoft YaHei">
-                <a:solidFill>
-                  <a:srgbClr val="696969"/>
-                </a:solidFill>
-                <a:latin typeface="Microsoft YaHei"/>
-              </a:rPr>
-              <a:t>纯视觉芍药行间除草机器人 · 组会进展汇报 · 2026-09-07</a:t>
-            </a:r>
-          </a:p>
-        </p:txBody>
-      </p:sp>
-      <p:sp>
-        <p:nvSpPr>
-          <p:cNvPr id="13" name="AGENT_PAGE_NUMBER"/>
-          <p:cNvSpPr txBox="1"/>
-          <p:nvPr/>
-        </p:nvSpPr>
-        <p:spPr>
-          <a:xfrm>
-            <a:off x="11521440" y="6501384"/>
-            <a:ext cx="256032" cy="128016"/>
-          </a:xfrm>
-          <a:prstGeom prst="rect">
-            <a:avLst/>
-          </a:prstGeom>
-          <a:noFill/>
-        </p:spPr>
-        <p:txBody>
-          <a:bodyPr wrap="none" lIns="0" rIns="0" tIns="0" bIns="0" anchor="ctr">
-            <a:spAutoFit/>
-          </a:bodyPr>
-          <a:lstStyle/>
-          <a:p>
-            <a:pPr algn="r"/>
-            <a:r>
-              <a:rPr sz="800" b="0" ea="Microsoft YaHei">
-                <a:solidFill>
-                  <a:srgbClr val="696969"/>
-                </a:solidFill>
-                <a:latin typeface="Microsoft YaHei"/>
-              </a:rPr>
-              <a:t>7</a:t>
-            </a:r>
-          </a:p>
-        </p:txBody>
-      </p:sp>
-      <p:sp>
-        <p:nvSpPr>
-          <p:cNvPr id="14" name="AGENT_TITLE"/>
-          <p:cNvSpPr txBox="1"/>
-          <p:nvPr/>
-        </p:nvSpPr>
-        <p:spPr>
-          <a:xfrm>
-            <a:off x="320040" y="539496"/>
-            <a:ext cx="11292840" cy="493776"/>
-          </a:xfrm>
-          <a:prstGeom prst="rect">
-            <a:avLst/>
-          </a:prstGeom>
-          <a:noFill/>
-        </p:spPr>
-        <p:txBody>
-          <a:bodyPr wrap="square" lIns="0" rIns="0" tIns="0" bIns="0" anchor="ctr">
-            <a:spAutoFit/>
-          </a:bodyPr>
-          <a:lstStyle/>
-          <a:p>
-            <a:pPr algn="l"/>
-            <a:r>
-              <a:rPr sz="3000" b="0" ea="Microsoft YaHei">
-                <a:solidFill>
-                  <a:srgbClr val="8B0D18"/>
-                </a:solidFill>
-                <a:latin typeface="Microsoft YaHei"/>
-              </a:rPr>
-              <a:t>理论三：无线链路时延的前馈补偿</a:t>
-            </a:r>
-          </a:p>
-        </p:txBody>
-      </p:sp>
-      <p:sp>
-        <p:nvSpPr>
-          <p:cNvPr id="15" name="AGENT_TEXT_PANEL"/>
+              <a:t>试验设计</a:t>
+            </a:r>
+          </a:p>
+        </p:txBody>
+      </p:sp>
+      <p:sp>
+        <p:nvSpPr>
+          <p:cNvPr id="10" name="AGENT_NAV_SLOT_4"/>
           <p:cNvSpPr/>
           <p:nvPr/>
         </p:nvSpPr>
         <p:spPr>
           <a:xfrm>
-            <a:off x="685800" y="1417320"/>
-            <a:ext cx="10835640" cy="4434840"/>
-          </a:xfrm>
-          <a:prstGeom prst="roundRect">
+            <a:off x="9663379" y="27432"/>
+            <a:ext cx="2379268" cy="347472"/>
+          </a:xfrm>
+          <a:prstGeom prst="rect">
             <a:avLst/>
           </a:prstGeom>
           <a:solidFill>
@@ -10957,14 +14676,119 @@
       </p:sp>
       <p:sp>
         <p:nvSpPr>
-          <p:cNvPr id="16" name="AGENT_BODY"/>
-          <p:cNvSpPr txBox="1"/>
-          <p:nvPr/>
-        </p:nvSpPr>
-        <p:spPr>
-          <a:xfrm>
-            <a:off x="960120" y="1664208"/>
-            <a:ext cx="10287000" cy="3931920"/>
+          <p:cNvPr id="11" name="AGENT_NAV_LABEL_4"/>
+          <p:cNvSpPr txBox="1"/>
+          <p:nvPr/>
+        </p:nvSpPr>
+        <p:spPr>
+          <a:xfrm>
+            <a:off x="9663379" y="59436"/>
+            <a:ext cx="2379268" cy="228600"/>
+          </a:xfrm>
+          <a:prstGeom prst="rect">
+            <a:avLst/>
+          </a:prstGeom>
+          <a:noFill/>
+        </p:spPr>
+        <p:txBody>
+          <a:bodyPr wrap="none" lIns="0" rIns="0" tIns="0" bIns="0" anchor="ctr">
+            <a:spAutoFit/>
+          </a:bodyPr>
+          <a:lstStyle/>
+          <a:p>
+            <a:pPr algn="ctr"/>
+            <a:r>
+              <a:rPr sz="1200" b="0" ea="Microsoft YaHei">
+                <a:solidFill>
+                  <a:srgbClr val="1E1E1E"/>
+                </a:solidFill>
+                <a:latin typeface="Microsoft YaHei"/>
+              </a:rPr>
+              <a:t>进度与计划</a:t>
+            </a:r>
+          </a:p>
+        </p:txBody>
+      </p:sp>
+      <p:sp>
+        <p:nvSpPr>
+          <p:cNvPr id="12" name="AGENT_FOOTER"/>
+          <p:cNvSpPr txBox="1"/>
+          <p:nvPr/>
+        </p:nvSpPr>
+        <p:spPr>
+          <a:xfrm>
+            <a:off x="320040" y="6510528"/>
+            <a:ext cx="8595360" cy="128016"/>
+          </a:xfrm>
+          <a:prstGeom prst="rect">
+            <a:avLst/>
+          </a:prstGeom>
+          <a:noFill/>
+        </p:spPr>
+        <p:txBody>
+          <a:bodyPr wrap="none" lIns="0" rIns="0" tIns="0" bIns="0" anchor="ctr">
+            <a:spAutoFit/>
+          </a:bodyPr>
+          <a:lstStyle/>
+          <a:p>
+            <a:pPr algn="l"/>
+            <a:r>
+              <a:rPr sz="800" b="0" ea="Microsoft YaHei">
+                <a:solidFill>
+                  <a:srgbClr val="696969"/>
+                </a:solidFill>
+                <a:latin typeface="Microsoft YaHei"/>
+              </a:rPr>
+              <a:t>纯视觉芍药行间除草机器人 · 组会进展汇报 · 2026-09-07</a:t>
+            </a:r>
+          </a:p>
+        </p:txBody>
+      </p:sp>
+      <p:sp>
+        <p:nvSpPr>
+          <p:cNvPr id="13" name="AGENT_PAGE_NUMBER"/>
+          <p:cNvSpPr txBox="1"/>
+          <p:nvPr/>
+        </p:nvSpPr>
+        <p:spPr>
+          <a:xfrm>
+            <a:off x="11521440" y="6501384"/>
+            <a:ext cx="256032" cy="128016"/>
+          </a:xfrm>
+          <a:prstGeom prst="rect">
+            <a:avLst/>
+          </a:prstGeom>
+          <a:noFill/>
+        </p:spPr>
+        <p:txBody>
+          <a:bodyPr wrap="none" lIns="0" rIns="0" tIns="0" bIns="0" anchor="ctr">
+            <a:spAutoFit/>
+          </a:bodyPr>
+          <a:lstStyle/>
+          <a:p>
+            <a:pPr algn="r"/>
+            <a:r>
+              <a:rPr sz="800" b="0" ea="Microsoft YaHei">
+                <a:solidFill>
+                  <a:srgbClr val="696969"/>
+                </a:solidFill>
+                <a:latin typeface="Microsoft YaHei"/>
+              </a:rPr>
+              <a:t>7</a:t>
+            </a:r>
+          </a:p>
+        </p:txBody>
+      </p:sp>
+      <p:sp>
+        <p:nvSpPr>
+          <p:cNvPr id="14" name="AGENT_TITLE"/>
+          <p:cNvSpPr txBox="1"/>
+          <p:nvPr/>
+        </p:nvSpPr>
+        <p:spPr>
+          <a:xfrm>
+            <a:off x="320040" y="539496"/>
+            <a:ext cx="11292840" cy="493776"/>
           </a:xfrm>
           <a:prstGeom prst="rect">
             <a:avLst/>
@@ -10979,17 +14803,465 @@
           <a:p>
             <a:pPr algn="l"/>
             <a:r>
-              <a:rPr sz="2000" b="0" ea="Microsoft YaHei">
+              <a:rPr sz="3000" b="0" ea="Microsoft YaHei">
+                <a:solidFill>
+                  <a:srgbClr val="8B0D18"/>
+                </a:solidFill>
+                <a:latin typeface="Microsoft YaHei"/>
+              </a:rPr>
+              <a:t>算法设计由消融数据驱动，非直觉拍板</a:t>
+            </a:r>
+          </a:p>
+        </p:txBody>
+      </p:sp>
+      <p:sp>
+        <p:nvSpPr>
+          <p:cNvPr id="15" name="AGENT_SUMMARY_LINE_0"/>
+          <p:cNvSpPr/>
+          <p:nvPr/>
+        </p:nvSpPr>
+        <p:spPr>
+          <a:xfrm>
+            <a:off x="868680" y="1417320"/>
+            <a:ext cx="10378440" cy="10972"/>
+          </a:xfrm>
+          <a:prstGeom prst="rect">
+            <a:avLst/>
+          </a:prstGeom>
+          <a:solidFill>
+            <a:srgbClr val="8B0D18"/>
+          </a:solidFill>
+          <a:ln>
+            <a:noFill/>
+          </a:ln>
+        </p:spPr>
+        <p:style>
+          <a:lnRef idx="1">
+            <a:schemeClr val="accent1"/>
+          </a:lnRef>
+          <a:fillRef idx="3">
+            <a:schemeClr val="accent1"/>
+          </a:fillRef>
+          <a:effectRef idx="2">
+            <a:schemeClr val="accent1"/>
+          </a:effectRef>
+          <a:fontRef idx="minor">
+            <a:schemeClr val="lt1"/>
+          </a:fontRef>
+        </p:style>
+        <p:txBody>
+          <a:bodyPr rtlCol="0" anchor="ctr"/>
+          <a:lstStyle/>
+          <a:p>
+            <a:pPr algn="ctr"/>
+          </a:p>
+        </p:txBody>
+      </p:sp>
+      <p:sp>
+        <p:nvSpPr>
+          <p:cNvPr id="16" name="AGENT_SUMMARY_LABEL_0"/>
+          <p:cNvSpPr txBox="1"/>
+          <p:nvPr/>
+        </p:nvSpPr>
+        <p:spPr>
+          <a:xfrm>
+            <a:off x="960120" y="1527048"/>
+            <a:ext cx="1828800" cy="898398"/>
+          </a:xfrm>
+          <a:prstGeom prst="rect">
+            <a:avLst/>
+          </a:prstGeom>
+          <a:noFill/>
+        </p:spPr>
+        <p:txBody>
+          <a:bodyPr wrap="square" lIns="0" rIns="0" tIns="0" bIns="0" anchor="ctr">
+            <a:spAutoFit/>
+          </a:bodyPr>
+          <a:lstStyle/>
+          <a:p>
+            <a:pPr algn="l"/>
+            <a:r>
+              <a:rPr sz="1900" b="1" ea="Microsoft YaHei">
+                <a:solidFill>
+                  <a:srgbClr val="8B0D18"/>
+                </a:solidFill>
+                <a:latin typeface="Microsoft YaHei"/>
+              </a:rPr>
+              <a:t>行投票裁剪</a:t>
+            </a:r>
+          </a:p>
+        </p:txBody>
+      </p:sp>
+      <p:sp>
+        <p:nvSpPr>
+          <p:cNvPr id="17" name="AGENT_SUMMARY_VALUE_0"/>
+          <p:cNvSpPr txBox="1"/>
+          <p:nvPr/>
+        </p:nvSpPr>
+        <p:spPr>
+          <a:xfrm>
+            <a:off x="2926080" y="1527048"/>
+            <a:ext cx="7909560" cy="898398"/>
+          </a:xfrm>
+          <a:prstGeom prst="rect">
+            <a:avLst/>
+          </a:prstGeom>
+          <a:noFill/>
+        </p:spPr>
+        <p:txBody>
+          <a:bodyPr wrap="square" lIns="0" rIns="0" tIns="0" bIns="0" anchor="ctr">
+            <a:spAutoFit/>
+          </a:bodyPr>
+          <a:lstStyle/>
+          <a:p>
+            <a:pPr algn="l"/>
+            <a:r>
+              <a:rPr sz="1800" b="0" ea="Microsoft YaHei">
                 <a:solidFill>
                   <a:srgbClr val="1E1E1E"/>
                 </a:solidFill>
                 <a:latin typeface="Microsoft YaHei"/>
               </a:rPr>
-              <a:t>1. 补偿律：e_exec = e_meas + ė·τ，开环前馈不改特征方程
-2. 时延统计取滚动中位数，对 Wi-Fi 重尾分布稳健
-3. p95 超过 50ms 触发告警，500ms 断链强制急停
-4. 可验证预言：关补偿时 RMS 偏差恶化量应正比于 τ·v
-5. 补偿置于工程实现章节，方法贡献聚焦在对行本身</a:t>
+              <a:t>像素密度偏置实测 25.5px→0.5px：每行一票消除遮挡偏置</a:t>
+            </a:r>
+          </a:p>
+        </p:txBody>
+      </p:sp>
+      <p:sp>
+        <p:nvSpPr>
+          <p:cNvPr id="18" name="AGENT_SUMMARY_LINE_1"/>
+          <p:cNvSpPr/>
+          <p:nvPr/>
+        </p:nvSpPr>
+        <p:spPr>
+          <a:xfrm>
+            <a:off x="868680" y="2480310"/>
+            <a:ext cx="10378440" cy="10972"/>
+          </a:xfrm>
+          <a:prstGeom prst="rect">
+            <a:avLst/>
+          </a:prstGeom>
+          <a:solidFill>
+            <a:srgbClr val="8B0D18"/>
+          </a:solidFill>
+          <a:ln>
+            <a:noFill/>
+          </a:ln>
+        </p:spPr>
+        <p:style>
+          <a:lnRef idx="1">
+            <a:schemeClr val="accent1"/>
+          </a:lnRef>
+          <a:fillRef idx="3">
+            <a:schemeClr val="accent1"/>
+          </a:fillRef>
+          <a:effectRef idx="2">
+            <a:schemeClr val="accent1"/>
+          </a:effectRef>
+          <a:fontRef idx="minor">
+            <a:schemeClr val="lt1"/>
+          </a:fontRef>
+        </p:style>
+        <p:txBody>
+          <a:bodyPr rtlCol="0" anchor="ctr"/>
+          <a:lstStyle/>
+          <a:p>
+            <a:pPr algn="ctr"/>
+          </a:p>
+        </p:txBody>
+      </p:sp>
+      <p:sp>
+        <p:nvSpPr>
+          <p:cNvPr id="19" name="AGENT_SUMMARY_LABEL_1"/>
+          <p:cNvSpPr txBox="1"/>
+          <p:nvPr/>
+        </p:nvSpPr>
+        <p:spPr>
+          <a:xfrm>
+            <a:off x="960120" y="2590038"/>
+            <a:ext cx="1828800" cy="898398"/>
+          </a:xfrm>
+          <a:prstGeom prst="rect">
+            <a:avLst/>
+          </a:prstGeom>
+          <a:noFill/>
+        </p:spPr>
+        <p:txBody>
+          <a:bodyPr wrap="square" lIns="0" rIns="0" tIns="0" bIns="0" anchor="ctr">
+            <a:spAutoFit/>
+          </a:bodyPr>
+          <a:lstStyle/>
+          <a:p>
+            <a:pPr algn="l"/>
+            <a:r>
+              <a:rPr sz="1900" b="1" ea="Microsoft YaHei">
+                <a:solidFill>
+                  <a:srgbClr val="8B0D18"/>
+                </a:solidFill>
+                <a:latin typeface="Microsoft YaHei"/>
+              </a:rPr>
+              <a:t>门控权重</a:t>
+            </a:r>
+          </a:p>
+        </p:txBody>
+      </p:sp>
+      <p:sp>
+        <p:nvSpPr>
+          <p:cNvPr id="20" name="AGENT_SUMMARY_VALUE_1"/>
+          <p:cNvSpPr txBox="1"/>
+          <p:nvPr/>
+        </p:nvSpPr>
+        <p:spPr>
+          <a:xfrm>
+            <a:off x="2926080" y="2590038"/>
+            <a:ext cx="7909560" cy="898398"/>
+          </a:xfrm>
+          <a:prstGeom prst="rect">
+            <a:avLst/>
+          </a:prstGeom>
+          <a:noFill/>
+        </p:spPr>
+        <p:txBody>
+          <a:bodyPr wrap="square" lIns="0" rIns="0" tIns="0" bIns="0" anchor="ctr">
+            <a:spAutoFit/>
+          </a:bodyPr>
+          <a:lstStyle/>
+          <a:p>
+            <a:pPr algn="l"/>
+            <a:r>
+              <a:rPr sz="1800" b="0" ea="Microsoft YaHei">
+                <a:solidFill>
+                  <a:srgbClr val="1E1E1E"/>
+                </a:solidFill>
+                <a:latin typeface="Microsoft YaHei"/>
+              </a:rPr>
+              <a:t>仅单墙内点率&lt;0.5 激活，平时严格中点（多加权反引 2.2px 噪声）</a:t>
+            </a:r>
+          </a:p>
+        </p:txBody>
+      </p:sp>
+      <p:sp>
+        <p:nvSpPr>
+          <p:cNvPr id="21" name="AGENT_SUMMARY_LINE_2"/>
+          <p:cNvSpPr/>
+          <p:nvPr/>
+        </p:nvSpPr>
+        <p:spPr>
+          <a:xfrm>
+            <a:off x="868680" y="3543300"/>
+            <a:ext cx="10378440" cy="10972"/>
+          </a:xfrm>
+          <a:prstGeom prst="rect">
+            <a:avLst/>
+          </a:prstGeom>
+          <a:solidFill>
+            <a:srgbClr val="8B0D18"/>
+          </a:solidFill>
+          <a:ln>
+            <a:noFill/>
+          </a:ln>
+        </p:spPr>
+        <p:style>
+          <a:lnRef idx="1">
+            <a:schemeClr val="accent1"/>
+          </a:lnRef>
+          <a:fillRef idx="3">
+            <a:schemeClr val="accent1"/>
+          </a:fillRef>
+          <a:effectRef idx="2">
+            <a:schemeClr val="accent1"/>
+          </a:effectRef>
+          <a:fontRef idx="minor">
+            <a:schemeClr val="lt1"/>
+          </a:fontRef>
+        </p:style>
+        <p:txBody>
+          <a:bodyPr rtlCol="0" anchor="ctr"/>
+          <a:lstStyle/>
+          <a:p>
+            <a:pPr algn="ctr"/>
+          </a:p>
+        </p:txBody>
+      </p:sp>
+      <p:sp>
+        <p:nvSpPr>
+          <p:cNvPr id="22" name="AGENT_SUMMARY_LABEL_2"/>
+          <p:cNvSpPr txBox="1"/>
+          <p:nvPr/>
+        </p:nvSpPr>
+        <p:spPr>
+          <a:xfrm>
+            <a:off x="960120" y="3653028"/>
+            <a:ext cx="1828800" cy="898398"/>
+          </a:xfrm>
+          <a:prstGeom prst="rect">
+            <a:avLst/>
+          </a:prstGeom>
+          <a:noFill/>
+        </p:spPr>
+        <p:txBody>
+          <a:bodyPr wrap="square" lIns="0" rIns="0" tIns="0" bIns="0" anchor="ctr">
+            <a:spAutoFit/>
+          </a:bodyPr>
+          <a:lstStyle/>
+          <a:p>
+            <a:pPr algn="l"/>
+            <a:r>
+              <a:rPr sz="1900" b="1" ea="Microsoft YaHei">
+                <a:solidFill>
+                  <a:srgbClr val="8B0D18"/>
+                </a:solidFill>
+                <a:latin typeface="Microsoft YaHei"/>
+              </a:rPr>
+              <a:t>时延前馈</a:t>
+            </a:r>
+          </a:p>
+        </p:txBody>
+      </p:sp>
+      <p:sp>
+        <p:nvSpPr>
+          <p:cNvPr id="23" name="AGENT_SUMMARY_VALUE_2"/>
+          <p:cNvSpPr txBox="1"/>
+          <p:nvPr/>
+        </p:nvSpPr>
+        <p:spPr>
+          <a:xfrm>
+            <a:off x="2926080" y="3653028"/>
+            <a:ext cx="7909560" cy="898398"/>
+          </a:xfrm>
+          <a:prstGeom prst="rect">
+            <a:avLst/>
+          </a:prstGeom>
+          <a:noFill/>
+        </p:spPr>
+        <p:txBody>
+          <a:bodyPr wrap="square" lIns="0" rIns="0" tIns="0" bIns="0" anchor="ctr">
+            <a:spAutoFit/>
+          </a:bodyPr>
+          <a:lstStyle/>
+          <a:p>
+            <a:pPr algn="l"/>
+            <a:r>
+              <a:rPr sz="1800" b="0" ea="Microsoft YaHei">
+                <a:solidFill>
+                  <a:srgbClr val="1E1E1E"/>
+                </a:solidFill>
+                <a:latin typeface="Microsoft YaHei"/>
+              </a:rPr>
+              <a:t>开环补偿不依赖对象模型，无稳定性风险（弃 Smith 预估器）</a:t>
+            </a:r>
+          </a:p>
+        </p:txBody>
+      </p:sp>
+      <p:sp>
+        <p:nvSpPr>
+          <p:cNvPr id="24" name="AGENT_SUMMARY_LINE_3"/>
+          <p:cNvSpPr/>
+          <p:nvPr/>
+        </p:nvSpPr>
+        <p:spPr>
+          <a:xfrm>
+            <a:off x="868680" y="4606290"/>
+            <a:ext cx="10378440" cy="10972"/>
+          </a:xfrm>
+          <a:prstGeom prst="rect">
+            <a:avLst/>
+          </a:prstGeom>
+          <a:solidFill>
+            <a:srgbClr val="8B0D18"/>
+          </a:solidFill>
+          <a:ln>
+            <a:noFill/>
+          </a:ln>
+        </p:spPr>
+        <p:style>
+          <a:lnRef idx="1">
+            <a:schemeClr val="accent1"/>
+          </a:lnRef>
+          <a:fillRef idx="3">
+            <a:schemeClr val="accent1"/>
+          </a:fillRef>
+          <a:effectRef idx="2">
+            <a:schemeClr val="accent1"/>
+          </a:effectRef>
+          <a:fontRef idx="minor">
+            <a:schemeClr val="lt1"/>
+          </a:fontRef>
+        </p:style>
+        <p:txBody>
+          <a:bodyPr rtlCol="0" anchor="ctr"/>
+          <a:lstStyle/>
+          <a:p>
+            <a:pPr algn="ctr"/>
+          </a:p>
+        </p:txBody>
+      </p:sp>
+      <p:sp>
+        <p:nvSpPr>
+          <p:cNvPr id="25" name="AGENT_SUMMARY_LABEL_3"/>
+          <p:cNvSpPr txBox="1"/>
+          <p:nvPr/>
+        </p:nvSpPr>
+        <p:spPr>
+          <a:xfrm>
+            <a:off x="960120" y="4716018"/>
+            <a:ext cx="1828800" cy="898398"/>
+          </a:xfrm>
+          <a:prstGeom prst="rect">
+            <a:avLst/>
+          </a:prstGeom>
+          <a:noFill/>
+        </p:spPr>
+        <p:txBody>
+          <a:bodyPr wrap="square" lIns="0" rIns="0" tIns="0" bIns="0" anchor="ctr">
+            <a:spAutoFit/>
+          </a:bodyPr>
+          <a:lstStyle/>
+          <a:p>
+            <a:pPr algn="l"/>
+            <a:r>
+              <a:rPr sz="1900" b="1" ea="Microsoft YaHei">
+                <a:solidFill>
+                  <a:srgbClr val="8B0D18"/>
+                </a:solidFill>
+                <a:latin typeface="Microsoft YaHei"/>
+              </a:rPr>
+              <a:t>安全默认态</a:t>
+            </a:r>
+          </a:p>
+        </p:txBody>
+      </p:sp>
+      <p:sp>
+        <p:nvSpPr>
+          <p:cNvPr id="26" name="AGENT_SUMMARY_VALUE_3"/>
+          <p:cNvSpPr txBox="1"/>
+          <p:nvPr/>
+        </p:nvSpPr>
+        <p:spPr>
+          <a:xfrm>
+            <a:off x="2926080" y="4716018"/>
+            <a:ext cx="7909560" cy="898398"/>
+          </a:xfrm>
+          <a:prstGeom prst="rect">
+            <a:avLst/>
+          </a:prstGeom>
+          <a:noFill/>
+        </p:spPr>
+        <p:txBody>
+          <a:bodyPr wrap="square" lIns="0" rIns="0" tIns="0" bIns="0" anchor="ctr">
+            <a:spAutoFit/>
+          </a:bodyPr>
+          <a:lstStyle/>
+          <a:p>
+            <a:pPr algn="l"/>
+            <a:r>
+              <a:rPr sz="1800" b="0" ea="Microsoft YaHei">
+                <a:solidFill>
+                  <a:srgbClr val="1E1E1E"/>
+                </a:solidFill>
+                <a:latin typeface="Microsoft YaHei"/>
+              </a:rPr>
+              <a:t>刀控指令 500ms 过期自动提刀，失效方向恒为安全</a:t>
             </a:r>
           </a:p>
         </p:txBody>
@@ -11107,86 +15379,6 @@
             <a:avLst/>
           </a:prstGeom>
           <a:solidFill>
-            <a:srgbClr val="FFFFFF"/>
-          </a:solidFill>
-          <a:ln w="10160">
-            <a:solidFill>
-              <a:srgbClr val="BEBEBE"/>
-            </a:solidFill>
-          </a:ln>
-        </p:spPr>
-        <p:style>
-          <a:lnRef idx="1">
-            <a:schemeClr val="accent1"/>
-          </a:lnRef>
-          <a:fillRef idx="3">
-            <a:schemeClr val="accent1"/>
-          </a:fillRef>
-          <a:effectRef idx="2">
-            <a:schemeClr val="accent1"/>
-          </a:effectRef>
-          <a:fontRef idx="minor">
-            <a:schemeClr val="lt1"/>
-          </a:fontRef>
-        </p:style>
-        <p:txBody>
-          <a:bodyPr rtlCol="0" anchor="ctr"/>
-          <a:lstStyle/>
-          <a:p>
-            <a:pPr algn="ctr"/>
-          </a:p>
-        </p:txBody>
-      </p:sp>
-      <p:sp>
-        <p:nvSpPr>
-          <p:cNvPr id="5" name="AGENT_NAV_LABEL_1"/>
-          <p:cNvSpPr txBox="1"/>
-          <p:nvPr/>
-        </p:nvSpPr>
-        <p:spPr>
-          <a:xfrm>
-            <a:off x="2525572" y="59436"/>
-            <a:ext cx="2379268" cy="228600"/>
-          </a:xfrm>
-          <a:prstGeom prst="rect">
-            <a:avLst/>
-          </a:prstGeom>
-          <a:noFill/>
-        </p:spPr>
-        <p:txBody>
-          <a:bodyPr wrap="none" lIns="0" rIns="0" tIns="0" bIns="0" anchor="ctr">
-            <a:spAutoFit/>
-          </a:bodyPr>
-          <a:lstStyle/>
-          <a:p>
-            <a:pPr algn="ctr"/>
-            <a:r>
-              <a:rPr sz="1200" b="0" ea="Microsoft YaHei">
-                <a:solidFill>
-                  <a:srgbClr val="1E1E1E"/>
-                </a:solidFill>
-                <a:latin typeface="Microsoft YaHei"/>
-              </a:rPr>
-              <a:t>总体方案</a:t>
-            </a:r>
-          </a:p>
-        </p:txBody>
-      </p:sp>
-      <p:sp>
-        <p:nvSpPr>
-          <p:cNvPr id="6" name="AGENT_NAV_SLOT_2"/>
-          <p:cNvSpPr/>
-          <p:nvPr/>
-        </p:nvSpPr>
-        <p:spPr>
-          <a:xfrm>
-            <a:off x="4904841" y="27432"/>
-            <a:ext cx="2379268" cy="347472"/>
-          </a:xfrm>
-          <a:prstGeom prst="rect">
-            <a:avLst/>
-          </a:prstGeom>
-          <a:solidFill>
             <a:srgbClr val="8B0D18"/>
           </a:solidFill>
           <a:ln w="10160">
@@ -11219,13 +15411,13 @@
       </p:sp>
       <p:sp>
         <p:nvSpPr>
-          <p:cNvPr id="7" name="AGENT_NAV_LABEL_2"/>
-          <p:cNvSpPr txBox="1"/>
-          <p:nvPr/>
-        </p:nvSpPr>
-        <p:spPr>
-          <a:xfrm>
-            <a:off x="4904841" y="59436"/>
+          <p:cNvPr id="5" name="AGENT_NAV_LABEL_1"/>
+          <p:cNvSpPr txBox="1"/>
+          <p:nvPr/>
+        </p:nvSpPr>
+        <p:spPr>
+          <a:xfrm>
+            <a:off x="2525572" y="59436"/>
             <a:ext cx="2379268" cy="228600"/>
           </a:xfrm>
           <a:prstGeom prst="rect">
@@ -11247,20 +15439,20 @@
                 </a:solidFill>
                 <a:latin typeface="Microsoft YaHei"/>
               </a:rPr>
-              <a:t>理论方法</a:t>
-            </a:r>
-          </a:p>
-        </p:txBody>
-      </p:sp>
-      <p:sp>
-        <p:nvSpPr>
-          <p:cNvPr id="8" name="AGENT_NAV_SLOT_3"/>
+              <a:t>总体方案</a:t>
+            </a:r>
+          </a:p>
+        </p:txBody>
+      </p:sp>
+      <p:sp>
+        <p:nvSpPr>
+          <p:cNvPr id="6" name="AGENT_NAV_SLOT_2"/>
           <p:cNvSpPr/>
           <p:nvPr/>
         </p:nvSpPr>
         <p:spPr>
           <a:xfrm>
-            <a:off x="7284110" y="27432"/>
+            <a:off x="4904841" y="27432"/>
             <a:ext cx="2379268" cy="347472"/>
           </a:xfrm>
           <a:prstGeom prst="rect">
@@ -11299,13 +15491,13 @@
       </p:sp>
       <p:sp>
         <p:nvSpPr>
-          <p:cNvPr id="9" name="AGENT_NAV_LABEL_3"/>
-          <p:cNvSpPr txBox="1"/>
-          <p:nvPr/>
-        </p:nvSpPr>
-        <p:spPr>
-          <a:xfrm>
-            <a:off x="7284110" y="59436"/>
+          <p:cNvPr id="7" name="AGENT_NAV_LABEL_2"/>
+          <p:cNvSpPr txBox="1"/>
+          <p:nvPr/>
+        </p:nvSpPr>
+        <p:spPr>
+          <a:xfrm>
+            <a:off x="4904841" y="59436"/>
             <a:ext cx="2379268" cy="228600"/>
           </a:xfrm>
           <a:prstGeom prst="rect">
@@ -11327,20 +15519,20 @@
                 </a:solidFill>
                 <a:latin typeface="Microsoft YaHei"/>
               </a:rPr>
-              <a:t>试验设计</a:t>
-            </a:r>
-          </a:p>
-        </p:txBody>
-      </p:sp>
-      <p:sp>
-        <p:nvSpPr>
-          <p:cNvPr id="10" name="AGENT_NAV_SLOT_4"/>
+              <a:t>理论方法</a:t>
+            </a:r>
+          </a:p>
+        </p:txBody>
+      </p:sp>
+      <p:sp>
+        <p:nvSpPr>
+          <p:cNvPr id="8" name="AGENT_NAV_SLOT_3"/>
           <p:cNvSpPr/>
           <p:nvPr/>
         </p:nvSpPr>
         <p:spPr>
           <a:xfrm>
-            <a:off x="9663379" y="27432"/>
+            <a:off x="7284110" y="27432"/>
             <a:ext cx="2379268" cy="347472"/>
           </a:xfrm>
           <a:prstGeom prst="rect">
@@ -11379,6 +15571,86 @@
       </p:sp>
       <p:sp>
         <p:nvSpPr>
+          <p:cNvPr id="9" name="AGENT_NAV_LABEL_3"/>
+          <p:cNvSpPr txBox="1"/>
+          <p:nvPr/>
+        </p:nvSpPr>
+        <p:spPr>
+          <a:xfrm>
+            <a:off x="7284110" y="59436"/>
+            <a:ext cx="2379268" cy="228600"/>
+          </a:xfrm>
+          <a:prstGeom prst="rect">
+            <a:avLst/>
+          </a:prstGeom>
+          <a:noFill/>
+        </p:spPr>
+        <p:txBody>
+          <a:bodyPr wrap="none" lIns="0" rIns="0" tIns="0" bIns="0" anchor="ctr">
+            <a:spAutoFit/>
+          </a:bodyPr>
+          <a:lstStyle/>
+          <a:p>
+            <a:pPr algn="ctr"/>
+            <a:r>
+              <a:rPr sz="1200" b="0" ea="Microsoft YaHei">
+                <a:solidFill>
+                  <a:srgbClr val="1E1E1E"/>
+                </a:solidFill>
+                <a:latin typeface="Microsoft YaHei"/>
+              </a:rPr>
+              <a:t>试验设计</a:t>
+            </a:r>
+          </a:p>
+        </p:txBody>
+      </p:sp>
+      <p:sp>
+        <p:nvSpPr>
+          <p:cNvPr id="10" name="AGENT_NAV_SLOT_4"/>
+          <p:cNvSpPr/>
+          <p:nvPr/>
+        </p:nvSpPr>
+        <p:spPr>
+          <a:xfrm>
+            <a:off x="9663379" y="27432"/>
+            <a:ext cx="2379268" cy="347472"/>
+          </a:xfrm>
+          <a:prstGeom prst="rect">
+            <a:avLst/>
+          </a:prstGeom>
+          <a:solidFill>
+            <a:srgbClr val="FFFFFF"/>
+          </a:solidFill>
+          <a:ln w="10160">
+            <a:solidFill>
+              <a:srgbClr val="BEBEBE"/>
+            </a:solidFill>
+          </a:ln>
+        </p:spPr>
+        <p:style>
+          <a:lnRef idx="1">
+            <a:schemeClr val="accent1"/>
+          </a:lnRef>
+          <a:fillRef idx="3">
+            <a:schemeClr val="accent1"/>
+          </a:fillRef>
+          <a:effectRef idx="2">
+            <a:schemeClr val="accent1"/>
+          </a:effectRef>
+          <a:fontRef idx="minor">
+            <a:schemeClr val="lt1"/>
+          </a:fontRef>
+        </p:style>
+        <p:txBody>
+          <a:bodyPr rtlCol="0" anchor="ctr"/>
+          <a:lstStyle/>
+          <a:p>
+            <a:pPr algn="ctr"/>
+          </a:p>
+        </p:txBody>
+      </p:sp>
+      <p:sp>
+        <p:nvSpPr>
           <p:cNvPr id="11" name="AGENT_NAV_LABEL_4"/>
           <p:cNvSpPr txBox="1"/>
           <p:nvPr/>
@@ -11512,7 +15784,7 @@
                 </a:solidFill>
                 <a:latin typeface="Microsoft YaHei"/>
               </a:rPr>
-              <a:t>IPM 投影误差已分解，对策覆盖主要误差源</a:t>
+              <a:t>研究内容与开题完全对应，两处按实车调整</a:t>
             </a:r>
           </a:p>
         </p:txBody>
@@ -11569,7 +15841,7 @@
         <p:spPr>
           <a:xfrm>
             <a:off x="960120" y="1527048"/>
-            <a:ext cx="1828800" cy="898398"/>
+            <a:ext cx="1828800" cy="685800"/>
           </a:xfrm>
           <a:prstGeom prst="rect">
             <a:avLst/>
@@ -11590,7 +15862,7 @@
                 </a:solidFill>
                 <a:latin typeface="Microsoft YaHei"/>
               </a:rPr>
-              <a:t>安装高度</a:t>
+              <a:t>内容一</a:t>
             </a:r>
           </a:p>
         </p:txBody>
@@ -11604,7 +15876,7 @@
         <p:spPr>
           <a:xfrm>
             <a:off x="2926080" y="1527048"/>
-            <a:ext cx="7909560" cy="898398"/>
+            <a:ext cx="7909560" cy="685800"/>
           </a:xfrm>
           <a:prstGeom prst="rect">
             <a:avLst/>
@@ -11625,7 +15897,7 @@
                 </a:solidFill>
                 <a:latin typeface="Microsoft YaHei"/>
               </a:rPr>
-              <a:t>0.9m 机位下约 1.1cm，一次标定消除</a:t>
+              <a:t>平台与除草装置设计 → 三刀装置+刀头选型+限深仿形（对应中）</a:t>
             </a:r>
           </a:p>
         </p:txBody>
@@ -11638,7 +15910,7 @@
         </p:nvSpPr>
         <p:spPr>
           <a:xfrm>
-            <a:off x="868680" y="2480310"/>
+            <a:off x="868680" y="2267712"/>
             <a:ext cx="10378440" cy="10972"/>
           </a:xfrm>
           <a:prstGeom prst="rect">
@@ -11681,8 +15953,8 @@
         </p:nvSpPr>
         <p:spPr>
           <a:xfrm>
-            <a:off x="960120" y="2590038"/>
-            <a:ext cx="1828800" cy="898398"/>
+            <a:off x="960120" y="2377440"/>
+            <a:ext cx="1828800" cy="685800"/>
           </a:xfrm>
           <a:prstGeom prst="rect">
             <a:avLst/>
@@ -11703,7 +15975,7 @@
                 </a:solidFill>
                 <a:latin typeface="Microsoft YaHei"/>
               </a:rPr>
-              <a:t>俯仰角</a:t>
+              <a:t>内容二</a:t>
             </a:r>
           </a:p>
         </p:txBody>
@@ -11716,8 +15988,8 @@
         </p:nvSpPr>
         <p:spPr>
           <a:xfrm>
-            <a:off x="2926080" y="2590038"/>
-            <a:ext cx="7909560" cy="898398"/>
+            <a:off x="2926080" y="2377440"/>
+            <a:ext cx="7909560" cy="685800"/>
           </a:xfrm>
           <a:prstGeom prst="rect">
             <a:avLst/>
@@ -11738,7 +16010,7 @@
                 </a:solidFill>
                 <a:latin typeface="Microsoft YaHei"/>
               </a:rPr>
-              <a:t>误差随距离二次增长——远场只用于导航</a:t>
+              <a:t>导航线提取 → 分割 + 行投票裁剪拟合，含霍夫/最小二乘对比（对应）</a:t>
             </a:r>
           </a:p>
         </p:txBody>
@@ -11751,7 +16023,7 @@
         </p:nvSpPr>
         <p:spPr>
           <a:xfrm>
-            <a:off x="868680" y="3543300"/>
+            <a:off x="868680" y="3118104"/>
             <a:ext cx="10378440" cy="10972"/>
           </a:xfrm>
           <a:prstGeom prst="rect">
@@ -11794,8 +16066,8 @@
         </p:nvSpPr>
         <p:spPr>
           <a:xfrm>
-            <a:off x="960120" y="3653028"/>
-            <a:ext cx="1828800" cy="898398"/>
+            <a:off x="960120" y="3227832"/>
+            <a:ext cx="1828800" cy="685800"/>
           </a:xfrm>
           <a:prstGeom prst="rect">
             <a:avLst/>
@@ -11816,7 +16088,7 @@
                 </a:solidFill>
                 <a:latin typeface="Microsoft YaHei"/>
               </a:rPr>
-              <a:t>畸变/垄形</a:t>
+              <a:t>内容三</a:t>
             </a:r>
           </a:p>
         </p:txBody>
@@ -11829,8 +16101,8 @@
         </p:nvSpPr>
         <p:spPr>
           <a:xfrm>
-            <a:off x="2926080" y="3653028"/>
-            <a:ext cx="7909560" cy="898398"/>
+            <a:off x="2926080" y="3227832"/>
+            <a:ext cx="7909560" cy="685800"/>
           </a:xfrm>
           <a:prstGeom prst="rect">
             <a:avLst/>
@@ -11851,7 +16123,7 @@
                 </a:solidFill>
                 <a:latin typeface="Microsoft YaHei"/>
               </a:rPr>
-              <a:t>先校正再投影；起伏交由 Kalman 滤波</a:t>
+              <a:t>上下位机解耦控制 → PC+STM32+协议帧+三级看门狗（对应）</a:t>
             </a:r>
           </a:p>
         </p:txBody>
@@ -11864,7 +16136,7 @@
         </p:nvSpPr>
         <p:spPr>
           <a:xfrm>
-            <a:off x="868680" y="4606290"/>
+            <a:off x="868680" y="3968496"/>
             <a:ext cx="10378440" cy="10972"/>
           </a:xfrm>
           <a:prstGeom prst="rect">
@@ -11907,8 +16179,8 @@
         </p:nvSpPr>
         <p:spPr>
           <a:xfrm>
-            <a:off x="960120" y="4716018"/>
-            <a:ext cx="1828800" cy="898398"/>
+            <a:off x="960120" y="4078224"/>
+            <a:ext cx="1828800" cy="685800"/>
           </a:xfrm>
           <a:prstGeom prst="rect">
             <a:avLst/>
@@ -11929,7 +16201,7 @@
                 </a:solidFill>
                 <a:latin typeface="Microsoft YaHei"/>
               </a:rPr>
-              <a:t>验收线</a:t>
+              <a:t>调整一</a:t>
             </a:r>
           </a:p>
         </p:txBody>
@@ -11942,8 +16214,8 @@
         </p:nvSpPr>
         <p:spPr>
           <a:xfrm>
-            <a:off x="2926080" y="4716018"/>
-            <a:ext cx="7909560" cy="898398"/>
+            <a:off x="2926080" y="4078224"/>
+            <a:ext cx="7909560" cy="685800"/>
           </a:xfrm>
           <a:prstGeom prst="rect">
             <a:avLst/>
@@ -11964,7 +16236,120 @@
                 </a:solidFill>
                 <a:latin typeface="Microsoft YaHei"/>
               </a:rPr>
-              <a:t>标记点重投影误差 ≤2cm，工具链已备好</a:t>
+              <a:t>种植场景由林下调整为大田，光影鲁棒性保留为采集维度</a:t>
+            </a:r>
+          </a:p>
+        </p:txBody>
+      </p:sp>
+      <p:sp>
+        <p:nvSpPr>
+          <p:cNvPr id="27" name="AGENT_SUMMARY_LINE_4"/>
+          <p:cNvSpPr/>
+          <p:nvPr/>
+        </p:nvSpPr>
+        <p:spPr>
+          <a:xfrm>
+            <a:off x="868680" y="4818888"/>
+            <a:ext cx="10378440" cy="10972"/>
+          </a:xfrm>
+          <a:prstGeom prst="rect">
+            <a:avLst/>
+          </a:prstGeom>
+          <a:solidFill>
+            <a:srgbClr val="8B0D18"/>
+          </a:solidFill>
+          <a:ln>
+            <a:noFill/>
+          </a:ln>
+        </p:spPr>
+        <p:style>
+          <a:lnRef idx="1">
+            <a:schemeClr val="accent1"/>
+          </a:lnRef>
+          <a:fillRef idx="3">
+            <a:schemeClr val="accent1"/>
+          </a:fillRef>
+          <a:effectRef idx="2">
+            <a:schemeClr val="accent1"/>
+          </a:effectRef>
+          <a:fontRef idx="minor">
+            <a:schemeClr val="lt1"/>
+          </a:fontRef>
+        </p:style>
+        <p:txBody>
+          <a:bodyPr rtlCol="0" anchor="ctr"/>
+          <a:lstStyle/>
+          <a:p>
+            <a:pPr algn="ctr"/>
+          </a:p>
+        </p:txBody>
+      </p:sp>
+      <p:sp>
+        <p:nvSpPr>
+          <p:cNvPr id="28" name="AGENT_SUMMARY_LABEL_4"/>
+          <p:cNvSpPr txBox="1"/>
+          <p:nvPr/>
+        </p:nvSpPr>
+        <p:spPr>
+          <a:xfrm>
+            <a:off x="960120" y="4928616"/>
+            <a:ext cx="1828800" cy="685800"/>
+          </a:xfrm>
+          <a:prstGeom prst="rect">
+            <a:avLst/>
+          </a:prstGeom>
+          <a:noFill/>
+        </p:spPr>
+        <p:txBody>
+          <a:bodyPr wrap="square" lIns="0" rIns="0" tIns="0" bIns="0" anchor="ctr">
+            <a:spAutoFit/>
+          </a:bodyPr>
+          <a:lstStyle/>
+          <a:p>
+            <a:pPr algn="l"/>
+            <a:r>
+              <a:rPr sz="1900" b="1" ea="Microsoft YaHei">
+                <a:solidFill>
+                  <a:srgbClr val="8B0D18"/>
+                </a:solidFill>
+                <a:latin typeface="Microsoft YaHei"/>
+              </a:rPr>
+              <a:t>调整二</a:t>
+            </a:r>
+          </a:p>
+        </p:txBody>
+      </p:sp>
+      <p:sp>
+        <p:nvSpPr>
+          <p:cNvPr id="29" name="AGENT_SUMMARY_VALUE_4"/>
+          <p:cNvSpPr txBox="1"/>
+          <p:nvPr/>
+        </p:nvSpPr>
+        <p:spPr>
+          <a:xfrm>
+            <a:off x="2926080" y="4928616"/>
+            <a:ext cx="7909560" cy="685800"/>
+          </a:xfrm>
+          <a:prstGeom prst="rect">
+            <a:avLst/>
+          </a:prstGeom>
+          <a:noFill/>
+        </p:spPr>
+        <p:txBody>
+          <a:bodyPr wrap="square" lIns="0" rIns="0" tIns="0" bIns="0" anchor="ctr">
+            <a:spAutoFit/>
+          </a:bodyPr>
+          <a:lstStyle/>
+          <a:p>
+            <a:pPr algn="l"/>
+            <a:r>
+              <a:rPr sz="1800" b="0" ea="Microsoft YaHei">
+                <a:solidFill>
+                  <a:srgbClr val="1E1E1E"/>
+                </a:solidFill>
+                <a:latin typeface="Microsoft YaHei"/>
+              </a:rPr>
+              <a:t>底盘由四轮转向改为四轮独立驱动差速，运动学模型同步修正</a:t>
             </a:r>
           </a:p>
         </p:txBody>
@@ -12487,30 +16872,32 @@
                 </a:solidFill>
                 <a:latin typeface="Microsoft YaHei"/>
               </a:rPr>
-              <a:t>创新点定稿：方法为核心，装置为载体</a:t>
-            </a:r>
-          </a:p>
-        </p:txBody>
-      </p:sp>
-      <p:sp>
-        <p:nvSpPr>
-          <p:cNvPr id="15" name="AGENT_SUMMARY_LINE_0"/>
+              <a:t>理论一：单目视觉双墙约束的对行方法</a:t>
+            </a:r>
+          </a:p>
+        </p:txBody>
+      </p:sp>
+      <p:sp>
+        <p:nvSpPr>
+          <p:cNvPr id="15" name="AGENT_TEXT_PANEL"/>
           <p:cNvSpPr/>
           <p:nvPr/>
         </p:nvSpPr>
         <p:spPr>
           <a:xfrm>
-            <a:off x="868680" y="1417320"/>
-            <a:ext cx="10378440" cy="10972"/>
-          </a:xfrm>
-          <a:prstGeom prst="rect">
+            <a:off x="685800" y="1417320"/>
+            <a:ext cx="10835640" cy="4434840"/>
+          </a:xfrm>
+          <a:prstGeom prst="roundRect">
             <a:avLst/>
           </a:prstGeom>
           <a:solidFill>
-            <a:srgbClr val="8B0D18"/>
+            <a:srgbClr val="FFFFFF"/>
           </a:solidFill>
-          <a:ln>
-            <a:noFill/>
+          <a:ln w="10160">
+            <a:solidFill>
+              <a:srgbClr val="BEBEBE"/>
+            </a:solidFill>
           </a:ln>
         </p:spPr>
         <p:style>
@@ -12537,14 +16924,14 @@
       </p:sp>
       <p:sp>
         <p:nvSpPr>
-          <p:cNvPr id="16" name="AGENT_SUMMARY_LABEL_0"/>
-          <p:cNvSpPr txBox="1"/>
-          <p:nvPr/>
-        </p:nvSpPr>
-        <p:spPr>
-          <a:xfrm>
-            <a:off x="960120" y="1527048"/>
-            <a:ext cx="1828800" cy="898398"/>
+          <p:cNvPr id="16" name="AGENT_BODY"/>
+          <p:cNvSpPr txBox="1"/>
+          <p:nvPr/>
+        </p:nvSpPr>
+        <p:spPr>
+          <a:xfrm>
+            <a:off x="960120" y="1664208"/>
+            <a:ext cx="10287000" cy="3931920"/>
           </a:xfrm>
           <a:prstGeom prst="rect">
             <a:avLst/>
@@ -12559,387 +16946,17 @@
           <a:p>
             <a:pPr algn="l"/>
             <a:r>
-              <a:rPr sz="1900" b="1" ea="Microsoft YaHei">
-                <a:solidFill>
-                  <a:srgbClr val="8B0D18"/>
-                </a:solidFill>
-                <a:latin typeface="Microsoft YaHei"/>
-              </a:rPr>
-              <a:t>创新点1</a:t>
-            </a:r>
-          </a:p>
-        </p:txBody>
-      </p:sp>
-      <p:sp>
-        <p:nvSpPr>
-          <p:cNvPr id="17" name="AGENT_SUMMARY_VALUE_0"/>
-          <p:cNvSpPr txBox="1"/>
-          <p:nvPr/>
-        </p:nvSpPr>
-        <p:spPr>
-          <a:xfrm>
-            <a:off x="2926080" y="1527048"/>
-            <a:ext cx="7909560" cy="898398"/>
-          </a:xfrm>
-          <a:prstGeom prst="rect">
-            <a:avLst/>
-          </a:prstGeom>
-          <a:noFill/>
-        </p:spPr>
-        <p:txBody>
-          <a:bodyPr wrap="square" lIns="0" rIns="0" tIns="0" bIns="0" anchor="ctr">
-            <a:spAutoFit/>
-          </a:bodyPr>
-          <a:lstStyle/>
-          <a:p>
-            <a:pPr algn="l"/>
-            <a:r>
-              <a:rPr sz="1800" b="0" ea="Microsoft YaHei">
+              <a:rPr sz="2000" b="0" ea="Microsoft YaHei">
                 <a:solidFill>
                   <a:srgbClr val="1E1E1E"/>
                 </a:solidFill>
                 <a:latin typeface="Microsoft YaHei"/>
               </a:rPr>
-              <a:t>三刀装置 + 双墙约束主动对行方法（核心）</a:t>
-            </a:r>
-          </a:p>
-        </p:txBody>
-      </p:sp>
-      <p:sp>
-        <p:nvSpPr>
-          <p:cNvPr id="18" name="AGENT_SUMMARY_LINE_1"/>
-          <p:cNvSpPr/>
-          <p:nvPr/>
-        </p:nvSpPr>
-        <p:spPr>
-          <a:xfrm>
-            <a:off x="868680" y="2480310"/>
-            <a:ext cx="10378440" cy="10972"/>
-          </a:xfrm>
-          <a:prstGeom prst="rect">
-            <a:avLst/>
-          </a:prstGeom>
-          <a:solidFill>
-            <a:srgbClr val="8B0D18"/>
-          </a:solidFill>
-          <a:ln>
-            <a:noFill/>
-          </a:ln>
-        </p:spPr>
-        <p:style>
-          <a:lnRef idx="1">
-            <a:schemeClr val="accent1"/>
-          </a:lnRef>
-          <a:fillRef idx="3">
-            <a:schemeClr val="accent1"/>
-          </a:fillRef>
-          <a:effectRef idx="2">
-            <a:schemeClr val="accent1"/>
-          </a:effectRef>
-          <a:fontRef idx="minor">
-            <a:schemeClr val="lt1"/>
-          </a:fontRef>
-        </p:style>
-        <p:txBody>
-          <a:bodyPr rtlCol="0" anchor="ctr"/>
-          <a:lstStyle/>
-          <a:p>
-            <a:pPr algn="ctr"/>
-          </a:p>
-        </p:txBody>
-      </p:sp>
-      <p:sp>
-        <p:nvSpPr>
-          <p:cNvPr id="19" name="AGENT_SUMMARY_LABEL_1"/>
-          <p:cNvSpPr txBox="1"/>
-          <p:nvPr/>
-        </p:nvSpPr>
-        <p:spPr>
-          <a:xfrm>
-            <a:off x="960120" y="2590038"/>
-            <a:ext cx="1828800" cy="898398"/>
-          </a:xfrm>
-          <a:prstGeom prst="rect">
-            <a:avLst/>
-          </a:prstGeom>
-          <a:noFill/>
-        </p:spPr>
-        <p:txBody>
-          <a:bodyPr wrap="square" lIns="0" rIns="0" tIns="0" bIns="0" anchor="ctr">
-            <a:spAutoFit/>
-          </a:bodyPr>
-          <a:lstStyle/>
-          <a:p>
-            <a:pPr algn="l"/>
-            <a:r>
-              <a:rPr sz="1900" b="1" ea="Microsoft YaHei">
-                <a:solidFill>
-                  <a:srgbClr val="8B0D18"/>
-                </a:solidFill>
-                <a:latin typeface="Microsoft YaHei"/>
-              </a:rPr>
-              <a:t>创新点2</a:t>
-            </a:r>
-          </a:p>
-        </p:txBody>
-      </p:sp>
-      <p:sp>
-        <p:nvSpPr>
-          <p:cNvPr id="20" name="AGENT_SUMMARY_VALUE_1"/>
-          <p:cNvSpPr txBox="1"/>
-          <p:nvPr/>
-        </p:nvSpPr>
-        <p:spPr>
-          <a:xfrm>
-            <a:off x="2926080" y="2590038"/>
-            <a:ext cx="7909560" cy="898398"/>
-          </a:xfrm>
-          <a:prstGeom prst="rect">
-            <a:avLst/>
-          </a:prstGeom>
-          <a:noFill/>
-        </p:spPr>
-        <p:txBody>
-          <a:bodyPr wrap="square" lIns="0" rIns="0" tIns="0" bIns="0" anchor="ctr">
-            <a:spAutoFit/>
-          </a:bodyPr>
-          <a:lstStyle/>
-          <a:p>
-            <a:pPr algn="l"/>
-            <a:r>
-              <a:rPr sz="1800" b="0" ea="Microsoft YaHei">
-                <a:solidFill>
-                  <a:srgbClr val="1E1E1E"/>
-                </a:solidFill>
-                <a:latin typeface="Microsoft YaHei"/>
-              </a:rPr>
-              <a:t>限深仿形机构设计与刀头对比优化</a:t>
-            </a:r>
-          </a:p>
-        </p:txBody>
-      </p:sp>
-      <p:sp>
-        <p:nvSpPr>
-          <p:cNvPr id="21" name="AGENT_SUMMARY_LINE_2"/>
-          <p:cNvSpPr/>
-          <p:nvPr/>
-        </p:nvSpPr>
-        <p:spPr>
-          <a:xfrm>
-            <a:off x="868680" y="3543300"/>
-            <a:ext cx="10378440" cy="10972"/>
-          </a:xfrm>
-          <a:prstGeom prst="rect">
-            <a:avLst/>
-          </a:prstGeom>
-          <a:solidFill>
-            <a:srgbClr val="8B0D18"/>
-          </a:solidFill>
-          <a:ln>
-            <a:noFill/>
-          </a:ln>
-        </p:spPr>
-        <p:style>
-          <a:lnRef idx="1">
-            <a:schemeClr val="accent1"/>
-          </a:lnRef>
-          <a:fillRef idx="3">
-            <a:schemeClr val="accent1"/>
-          </a:fillRef>
-          <a:effectRef idx="2">
-            <a:schemeClr val="accent1"/>
-          </a:effectRef>
-          <a:fontRef idx="minor">
-            <a:schemeClr val="lt1"/>
-          </a:fontRef>
-        </p:style>
-        <p:txBody>
-          <a:bodyPr rtlCol="0" anchor="ctr"/>
-          <a:lstStyle/>
-          <a:p>
-            <a:pPr algn="ctr"/>
-          </a:p>
-        </p:txBody>
-      </p:sp>
-      <p:sp>
-        <p:nvSpPr>
-          <p:cNvPr id="22" name="AGENT_SUMMARY_LABEL_2"/>
-          <p:cNvSpPr txBox="1"/>
-          <p:nvPr/>
-        </p:nvSpPr>
-        <p:spPr>
-          <a:xfrm>
-            <a:off x="960120" y="3653028"/>
-            <a:ext cx="1828800" cy="898398"/>
-          </a:xfrm>
-          <a:prstGeom prst="rect">
-            <a:avLst/>
-          </a:prstGeom>
-          <a:noFill/>
-        </p:spPr>
-        <p:txBody>
-          <a:bodyPr wrap="square" lIns="0" rIns="0" tIns="0" bIns="0" anchor="ctr">
-            <a:spAutoFit/>
-          </a:bodyPr>
-          <a:lstStyle/>
-          <a:p>
-            <a:pPr algn="l"/>
-            <a:r>
-              <a:rPr sz="1900" b="1" ea="Microsoft YaHei">
-                <a:solidFill>
-                  <a:srgbClr val="8B0D18"/>
-                </a:solidFill>
-                <a:latin typeface="Microsoft YaHei"/>
-              </a:rPr>
-              <a:t>后备点3</a:t>
-            </a:r>
-          </a:p>
-        </p:txBody>
-      </p:sp>
-      <p:sp>
-        <p:nvSpPr>
-          <p:cNvPr id="23" name="AGENT_SUMMARY_VALUE_2"/>
-          <p:cNvSpPr txBox="1"/>
-          <p:nvPr/>
-        </p:nvSpPr>
-        <p:spPr>
-          <a:xfrm>
-            <a:off x="2926080" y="3653028"/>
-            <a:ext cx="7909560" cy="898398"/>
-          </a:xfrm>
-          <a:prstGeom prst="rect">
-            <a:avLst/>
-          </a:prstGeom>
-          <a:noFill/>
-        </p:spPr>
-        <p:txBody>
-          <a:bodyPr wrap="square" lIns="0" rIns="0" tIns="0" bIns="0" anchor="ctr">
-            <a:spAutoFit/>
-          </a:bodyPr>
-          <a:lstStyle/>
-          <a:p>
-            <a:pPr algn="l"/>
-            <a:r>
-              <a:rPr sz="1800" b="0" ea="Microsoft YaHei">
-                <a:solidFill>
-                  <a:srgbClr val="1E1E1E"/>
-                </a:solidFill>
-                <a:latin typeface="Microsoft YaHei"/>
-              </a:rPr>
-              <a:t>时延前馈补偿，视试验显著性决定升格</a:t>
-            </a:r>
-          </a:p>
-        </p:txBody>
-      </p:sp>
-      <p:sp>
-        <p:nvSpPr>
-          <p:cNvPr id="24" name="AGENT_SUMMARY_LINE_3"/>
-          <p:cNvSpPr/>
-          <p:nvPr/>
-        </p:nvSpPr>
-        <p:spPr>
-          <a:xfrm>
-            <a:off x="868680" y="4606290"/>
-            <a:ext cx="10378440" cy="10972"/>
-          </a:xfrm>
-          <a:prstGeom prst="rect">
-            <a:avLst/>
-          </a:prstGeom>
-          <a:solidFill>
-            <a:srgbClr val="8B0D18"/>
-          </a:solidFill>
-          <a:ln>
-            <a:noFill/>
-          </a:ln>
-        </p:spPr>
-        <p:style>
-          <a:lnRef idx="1">
-            <a:schemeClr val="accent1"/>
-          </a:lnRef>
-          <a:fillRef idx="3">
-            <a:schemeClr val="accent1"/>
-          </a:fillRef>
-          <a:effectRef idx="2">
-            <a:schemeClr val="accent1"/>
-          </a:effectRef>
-          <a:fontRef idx="minor">
-            <a:schemeClr val="lt1"/>
-          </a:fontRef>
-        </p:style>
-        <p:txBody>
-          <a:bodyPr rtlCol="0" anchor="ctr"/>
-          <a:lstStyle/>
-          <a:p>
-            <a:pPr algn="ctr"/>
-          </a:p>
-        </p:txBody>
-      </p:sp>
-      <p:sp>
-        <p:nvSpPr>
-          <p:cNvPr id="25" name="AGENT_SUMMARY_LABEL_3"/>
-          <p:cNvSpPr txBox="1"/>
-          <p:nvPr/>
-        </p:nvSpPr>
-        <p:spPr>
-          <a:xfrm>
-            <a:off x="960120" y="4716018"/>
-            <a:ext cx="1828800" cy="898398"/>
-          </a:xfrm>
-          <a:prstGeom prst="rect">
-            <a:avLst/>
-          </a:prstGeom>
-          <a:noFill/>
-        </p:spPr>
-        <p:txBody>
-          <a:bodyPr wrap="square" lIns="0" rIns="0" tIns="0" bIns="0" anchor="ctr">
-            <a:spAutoFit/>
-          </a:bodyPr>
-          <a:lstStyle/>
-          <a:p>
-            <a:pPr algn="l"/>
-            <a:r>
-              <a:rPr sz="1900" b="1" ea="Microsoft YaHei">
-                <a:solidFill>
-                  <a:srgbClr val="8B0D18"/>
-                </a:solidFill>
-                <a:latin typeface="Microsoft YaHei"/>
-              </a:rPr>
-              <a:t>证据</a:t>
-            </a:r>
-          </a:p>
-        </p:txBody>
-      </p:sp>
-      <p:sp>
-        <p:nvSpPr>
-          <p:cNvPr id="26" name="AGENT_SUMMARY_VALUE_3"/>
-          <p:cNvSpPr txBox="1"/>
-          <p:nvPr/>
-        </p:nvSpPr>
-        <p:spPr>
-          <a:xfrm>
-            <a:off x="2926080" y="4716018"/>
-            <a:ext cx="7909560" cy="898398"/>
-          </a:xfrm>
-          <a:prstGeom prst="rect">
-            <a:avLst/>
-          </a:prstGeom>
-          <a:noFill/>
-        </p:spPr>
-        <p:txBody>
-          <a:bodyPr wrap="square" lIns="0" rIns="0" tIns="0" bIns="0" anchor="ctr">
-            <a:spAutoFit/>
-          </a:bodyPr>
-          <a:lstStyle/>
-          <a:p>
-            <a:pPr algn="l"/>
-            <a:r>
-              <a:rPr sz="1800" b="0" ea="Microsoft YaHei">
-                <a:solidFill>
-                  <a:srgbClr val="1E1E1E"/>
-                </a:solidFill>
-                <a:latin typeface="Microsoft YaHei"/>
-              </a:rPr>
-              <a:t>主动 vs 固定刀对比试验直接验证方法</a:t>
+              <a:t>1. 分割出左右行墙，各自最小二乘拟合 x = a·y + b
+2. 中心线取两墙加权中点，权重按拟合内点率门控
+3. 遮挡场景引入像素密度偏置，改用按行投票裁剪拟合
+4. 消融验证：稠密遮挡下中心线误差 25.5px 降至 0.5px
+5. 远场中心线供底盘导航，近场供中间刀，双预视点分工</a:t>
             </a:r>
           </a:p>
         </p:txBody>
